--- a/slides/ARC3133_Class01.pptx
+++ b/slides/ARC3133_Class01.pptx
@@ -4,6 +4,9 @@
   <p:sldMasterIdLst>
     <p:sldMasterId id="2147483648" r:id="rId1"/>
   </p:sldMasterIdLst>
+  <p:notesMasterIdLst>
+    <p:notesMasterId r:id="rId14"/>
+  </p:notesMasterIdLst>
   <p:sldIdLst>
     <p:sldId id="256" r:id="rId2"/>
     <p:sldId id="257" r:id="rId3"/>
@@ -18,9 +21,6 @@
     <p:sldId id="266" r:id="rId12"/>
     <p:sldId id="267" r:id="rId13"/>
   </p:sldIdLst>
-  <p:notesMasterIdLst>
-    <p:notesMasterId r:id="rId14"/>
-  </p:notesMasterIdLst>
   <p:sldSz cx="12192000" cy="6858000"/>
   <p:notesSz cx="6858000" cy="12192000"/>
   <p:defaultTextStyle>
@@ -115,6 +115,11 @@
       </a:defRPr>
     </a:lvl9pPr>
   </p:defaultTextStyle>
+  <p:extLst>
+    <p:ext uri="{EFAFB233-063F-42B5-8137-9DF3F51BA10A}">
+      <p15:sldGuideLst xmlns:p15="http://schemas.microsoft.com/office/powerpoint/2012/main"/>
+    </p:ext>
+  </p:extLst>
 </p:presentation>
 </file>
 
@@ -140,234 +145,10 @@
           <a:chExt cx="0" cy="0"/>
         </a:xfrm>
       </p:grpSpPr>
-      <p:sp>
-        <p:nvSpPr>
-          <p:cNvPr id="2" name="Header Placeholder 1"/>
-          <p:cNvSpPr>
-            <a:spLocks noGrp="1"/>
-          </p:cNvSpPr>
-          <p:nvPr>
-            <p:ph type="hdr" sz="quarter"/>
-          </p:nvPr>
-        </p:nvSpPr>
-        <p:spPr>
-          <a:xfrm>
-            <a:off x="0" y="0"/>
-            <a:ext cx="2971800" cy="458788"/>
-          </a:xfrm>
-          <a:prstGeom prst="rect">
-            <a:avLst/>
-          </a:prstGeom>
-        </p:spPr>
-        <p:txBody>
-          <a:bodyPr vert="horz" lIns="91440" tIns="45720" rIns="91440" bIns="45720" rtlCol="0"/>
-          <a:lstStyle>
-            <a:lvl1pPr algn="l">
-              <a:defRPr sz="1200"/>
-            </a:lvl1pPr>
-          </a:lstStyle>
-          <a:p>
-            <a:endParaRPr lang="en-US"/>
-          </a:p>
-        </p:txBody>
-      </p:sp>
-      <p:sp>
-        <p:nvSpPr>
-          <p:cNvPr id="3" name="Date Placeholder 2"/>
-          <p:cNvSpPr>
-            <a:spLocks noGrp="1"/>
-          </p:cNvSpPr>
-          <p:nvPr>
-            <p:ph type="dt" idx="1"/>
-          </p:nvPr>
-        </p:nvSpPr>
-        <p:spPr>
-          <a:xfrm>
-            <a:off x="3884613" y="0"/>
-            <a:ext cx="2971800" cy="458788"/>
-          </a:xfrm>
-          <a:prstGeom prst="rect">
-            <a:avLst/>
-          </a:prstGeom>
-        </p:spPr>
-        <p:txBody>
-          <a:bodyPr vert="horz" lIns="91440" tIns="45720" rIns="91440" bIns="45720" rtlCol="0"/>
-          <a:lstStyle>
-            <a:lvl1pPr algn="r">
-              <a:defRPr sz="1200"/>
-            </a:lvl1pPr>
-          </a:lstStyle>
-          <a:p>
-            <a:fld id="{5282F153-3F37-0F45-9E97-73ACFA13230C}" type="datetimeFigureOut">
-              <a:rPr lang="en-US"/>
-              <a:t>7/23/19</a:t>
-            </a:fld>
-            <a:endParaRPr lang="en-US"/>
-          </a:p>
-        </p:txBody>
-      </p:sp>
-      <p:sp>
-        <p:nvSpPr>
-          <p:cNvPr id="4" name="Slide Image Placeholder 3"/>
-          <p:cNvSpPr>
-            <a:spLocks noGrp="1" noRot="1" noChangeAspect="1"/>
-          </p:cNvSpPr>
-          <p:nvPr>
-            <p:ph type="sldImg" idx="2"/>
-          </p:nvPr>
-        </p:nvSpPr>
-        <p:spPr>
-          <a:xfrm>
-            <a:off x="685800" y="1143000"/>
-            <a:ext cx="5486400" cy="3086100"/>
-          </a:xfrm>
-          <a:prstGeom prst="rect">
-            <a:avLst/>
-          </a:prstGeom>
-          <a:noFill/>
-          <a:ln w="12700">
-            <a:solidFill>
-              <a:prstClr val="black"/>
-            </a:solidFill>
-          </a:ln>
-        </p:spPr>
-        <p:txBody>
-          <a:bodyPr vert="horz" lIns="91440" tIns="45720" rIns="91440" bIns="45720" rtlCol="0" anchor="ctr"/>
-          <a:lstStyle/>
-          <a:p>
-            <a:endParaRPr lang="en-US"/>
-          </a:p>
-        </p:txBody>
-      </p:sp>
-      <p:sp>
-        <p:nvSpPr>
-          <p:cNvPr id="5" name="Notes Placeholder 4"/>
-          <p:cNvSpPr>
-            <a:spLocks noGrp="1"/>
-          </p:cNvSpPr>
-          <p:nvPr>
-            <p:ph type="body" sz="quarter" idx="3"/>
-          </p:nvPr>
-        </p:nvSpPr>
-        <p:spPr>
-          <a:xfrm>
-            <a:off x="685800" y="4400550"/>
-            <a:ext cx="5486400" cy="3600450"/>
-          </a:xfrm>
-          <a:prstGeom prst="rect">
-            <a:avLst/>
-          </a:prstGeom>
-        </p:spPr>
-        <p:txBody>
-          <a:bodyPr vert="horz" lIns="91440" tIns="45720" rIns="91440" bIns="45720" rtlCol="0"/>
-          <a:lstStyle/>
-          <a:p>
-            <a:pPr lvl="0"/>
-            <a:r>
-              <a:rPr lang="en-US"/>
-              <a:t>Click to edit Master text styles</a:t>
-            </a:r>
-          </a:p>
-          <a:p>
-            <a:pPr lvl="1"/>
-            <a:r>
-              <a:rPr lang="en-US"/>
-              <a:t>Second level</a:t>
-            </a:r>
-          </a:p>
-          <a:p>
-            <a:pPr lvl="2"/>
-            <a:r>
-              <a:rPr lang="en-US"/>
-              <a:t>Third level</a:t>
-            </a:r>
-          </a:p>
-          <a:p>
-            <a:pPr lvl="3"/>
-            <a:r>
-              <a:rPr lang="en-US"/>
-              <a:t>Fourth level</a:t>
-            </a:r>
-          </a:p>
-          <a:p>
-            <a:pPr lvl="4"/>
-            <a:r>
-              <a:rPr lang="en-US"/>
-              <a:t>Fifth level</a:t>
-            </a:r>
-          </a:p>
-        </p:txBody>
-      </p:sp>
-      <p:sp>
-        <p:nvSpPr>
-          <p:cNvPr id="6" name="Footer Placeholder 5"/>
-          <p:cNvSpPr>
-            <a:spLocks noGrp="1"/>
-          </p:cNvSpPr>
-          <p:nvPr>
-            <p:ph type="ftr" sz="quarter" idx="4"/>
-          </p:nvPr>
-        </p:nvSpPr>
-        <p:spPr>
-          <a:xfrm>
-            <a:off x="0" y="8685213"/>
-            <a:ext cx="2971800" cy="458787"/>
-          </a:xfrm>
-          <a:prstGeom prst="rect">
-            <a:avLst/>
-          </a:prstGeom>
-        </p:spPr>
-        <p:txBody>
-          <a:bodyPr vert="horz" lIns="91440" tIns="45720" rIns="91440" bIns="45720" rtlCol="0" anchor="b"/>
-          <a:lstStyle>
-            <a:lvl1pPr algn="l">
-              <a:defRPr sz="1200"/>
-            </a:lvl1pPr>
-          </a:lstStyle>
-          <a:p>
-            <a:endParaRPr lang="en-US"/>
-          </a:p>
-        </p:txBody>
-      </p:sp>
-      <p:sp>
-        <p:nvSpPr>
-          <p:cNvPr id="7" name="Slide Number Placeholder 6"/>
-          <p:cNvSpPr>
-            <a:spLocks noGrp="1"/>
-          </p:cNvSpPr>
-          <p:nvPr>
-            <p:ph type="sldNum" sz="quarter" idx="5"/>
-          </p:nvPr>
-        </p:nvSpPr>
-        <p:spPr>
-          <a:xfrm>
-            <a:off x="3884613" y="8685213"/>
-            <a:ext cx="2971800" cy="458787"/>
-          </a:xfrm>
-          <a:prstGeom prst="rect">
-            <a:avLst/>
-          </a:prstGeom>
-        </p:spPr>
-        <p:txBody>
-          <a:bodyPr vert="horz" lIns="91440" tIns="45720" rIns="91440" bIns="45720" rtlCol="0" anchor="b"/>
-          <a:lstStyle>
-            <a:lvl1pPr algn="r">
-              <a:defRPr sz="1200"/>
-            </a:lvl1pPr>
-          </a:lstStyle>
-          <a:p>
-            <a:fld id="{CE5E9CC1-C706-0F49-92D6-E571CC5EEA8F}" type="slidenum">
-              <a:rPr lang="en-US"/>
-              <a:t>‹#›</a:t>
-            </a:fld>
-            <a:endParaRPr lang="en-US"/>
-          </a:p>
-        </p:txBody>
-      </p:sp>
     </p:spTree>
     <p:extLst>
       <p:ext uri="{BB962C8B-B14F-4D97-AF65-F5344CB8AC3E}">
-        <p14:creationId xmlns:p14="http://schemas.microsoft.com/office/powerpoint/2010/main" val="1024086991"/>
+        <p14:creationId xmlns:p14="http://schemas.microsoft.com/office/powerpoint/2010/main" val="2747121811"/>
       </p:ext>
     </p:extLst>
   </p:cSld>
@@ -516,7 +297,6 @@
               <a:t>Welcome. Today: what the course is, how it runs, the one big idea, and your first assignment.
 Don't open software today — this is the framing class.</a:t>
             </a:r>
-            <a:endParaRPr lang="en-US" dirty="0"/>
           </a:p>
         </p:txBody>
       </p:sp>
@@ -606,7 +386,6 @@
 Due Class 4 — you'll have done 0.1 by then, so it gets tested against real work.
 Every sheet for the rest of the semester uses this.</a:t>
             </a:r>
-            <a:endParaRPr lang="en-US" dirty="0"/>
           </a:p>
         </p:txBody>
       </p:sp>
@@ -696,7 +475,6 @@
 If they pick Fallingwater they cannot describe it in five Booleans and the exercise fails.
 Have a fallback list ready.</a:t>
             </a:r>
-            <a:endParaRPr lang="en-US" dirty="0"/>
           </a:p>
         </p:txBody>
       </p:sp>
@@ -784,7 +562,6 @@
               <a:rPr lang="en-US" dirty="0"/>
               <a:t>Leave this up while they ask. Repeat the three words — they'll hear them all semester.</a:t>
             </a:r>
-            <a:endParaRPr lang="en-US" dirty="0"/>
           </a:p>
         </p:txBody>
       </p:sp>
@@ -874,7 +651,6 @@
 Here the deliverable is the system. The images are evidence of the system.
 This sentence is the whole course.</a:t>
             </a:r>
-            <a:endParaRPr lang="en-US" dirty="0"/>
           </a:p>
         </p:txBody>
       </p:sp>
@@ -963,7 +739,6 @@
               <a:t>Draw this on the board too. Everything we build fits here.
 The question that separates the three paradigms: how determined is the output?</a:t>
             </a:r>
-            <a:endParaRPr lang="en-US" dirty="0"/>
           </a:p>
         </p:txBody>
       </p:sp>
@@ -1054,7 +829,6 @@
 Watch for the obvious question: if parametric always gives the same output for the same input, why is it only PARTIALLY expected? Answer: because you are defining a SPACE, not a result. You know its range, not every member. That is the whole point.
 Ask the room for an example of each before you give yours.</a:t>
             </a:r>
-            <a:endParaRPr lang="en-US" dirty="0"/>
           </a:p>
         </p:txBody>
       </p:sp>
@@ -1145,7 +919,6 @@
 Every execution differs — that ambiguity was the point for LeWitt. In assignment 0.1 you must do the opposite and pin the outcome down.
 Also flag forward: points, nearest neighbours, connecting lines — that is Module 1, and it is what the plotter draws.</a:t>
             </a:r>
-            <a:endParaRPr lang="en-US" dirty="0"/>
           </a:p>
         </p:txBody>
       </p:sp>
@@ -1235,7 +1008,6 @@
 Show a Grasshopper definition on screen — move one slider, let them watch everything update.
 That visible cause-and-effect is why we work in graphs.</a:t>
             </a:r>
-            <a:endParaRPr lang="en-US" dirty="0"/>
           </a:p>
         </p:txBody>
       </p:sp>
@@ -1325,7 +1097,6 @@
 Four rules, no design, and it produces things nobody specified.
 That's the last three weeks of this course.</a:t>
             </a:r>
-            <a:endParaRPr lang="en-US" dirty="0"/>
           </a:p>
         </p:txBody>
       </p:sp>
@@ -1414,7 +1185,6 @@
               <a:t>Be blunt about step 2. A session spent watching what you could have watched at home is wasted.
 Everything is in two versions — pick your environment and stay in it.</a:t>
             </a:r>
-            <a:endParaRPr lang="en-US" dirty="0"/>
           </a:p>
         </p:txBody>
       </p:sp>
@@ -1503,7 +1273,6 @@
               <a:t>Point at the fabrication column. Everything you compute, you also make.
 That's what makes this different from a software class.</a:t>
             </a:r>
-            <a:endParaRPr lang="en-US" dirty="0"/>
           </a:p>
         </p:txBody>
       </p:sp>
@@ -1576,6 +1345,11 @@
 <file path=ppt/slideMasters/slideMaster1.xml><?xml version="1.0" encoding="utf-8"?>
 <p:sldMaster xmlns:a="http://schemas.openxmlformats.org/drawingml/2006/main" xmlns:r="http://schemas.openxmlformats.org/officeDocument/2006/relationships" xmlns:p="http://schemas.openxmlformats.org/presentationml/2006/main">
   <p:cSld>
+    <p:bg>
+      <p:bgRef idx="1001">
+        <a:schemeClr val="bg1"/>
+      </p:bgRef>
+    </p:bg>
     <p:spTree>
       <p:nvGrpSpPr>
         <p:cNvPr id="1" name=""/>
@@ -1858,6 +1632,7 @@
         <a:solidFill>
           <a:srgbClr val="FFE500"/>
         </a:solidFill>
+        <a:effectLst/>
       </p:bgPr>
     </p:bg>
     <p:spTree>
@@ -1893,6 +1668,13 @@
           </a:solidFill>
           <a:ln/>
         </p:spPr>
+        <p:txBody>
+          <a:bodyPr/>
+          <a:lstStyle/>
+          <a:p>
+            <a:endParaRPr lang="en-US"/>
+          </a:p>
+        </p:txBody>
       </p:sp>
       <p:sp>
         <p:nvSpPr>
@@ -1915,11 +1697,11 @@
           <a:bodyPr wrap="square" lIns="0" tIns="0" rIns="0" bIns="0" rtlCol="0" anchor="ctr"/>
           <a:lstStyle/>
           <a:p>
-            <a:pPr indent="0" marL="0">
-              <a:buNone/>
-            </a:pPr>
-            <a:r>
-              <a:rPr lang="en-US" sz="1800" b="1" spc="500" kern="0" dirty="0">
+            <a:pPr marL="0" indent="0">
+              <a:buNone/>
+            </a:pPr>
+            <a:r>
+              <a:rPr lang="en-US" sz="1800" b="1" kern="0" spc="500" dirty="0">
                 <a:solidFill>
                   <a:srgbClr val="000000"/>
                 </a:solidFill>
@@ -1957,6 +1739,13 @@
             <a:prstDash val="solid"/>
           </a:ln>
         </p:spPr>
+        <p:txBody>
+          <a:bodyPr/>
+          <a:lstStyle/>
+          <a:p>
+            <a:endParaRPr lang="en-US"/>
+          </a:p>
+        </p:txBody>
       </p:sp>
       <p:sp>
         <p:nvSpPr>
@@ -1982,6 +1771,13 @@
             <a:prstDash val="solid"/>
           </a:ln>
         </p:spPr>
+        <p:txBody>
+          <a:bodyPr/>
+          <a:lstStyle/>
+          <a:p>
+            <a:endParaRPr lang="en-US"/>
+          </a:p>
+        </p:txBody>
       </p:sp>
       <p:sp>
         <p:nvSpPr>
@@ -2004,14 +1800,14 @@
           <a:bodyPr wrap="square" lIns="0" tIns="0" rIns="0" bIns="0" rtlCol="0" anchor="ctr"/>
           <a:lstStyle/>
           <a:p>
-            <a:pPr indent="0" marL="0">
+            <a:pPr marL="0" indent="0">
               <a:lnSpc>
                 <a:spcPts val="4400"/>
               </a:lnSpc>
               <a:buNone/>
             </a:pPr>
             <a:r>
-              <a:rPr lang="en-US" sz="4000" b="1" spc="-100" kern="0" dirty="0">
+              <a:rPr lang="en-US" sz="4000" b="1" kern="0" spc="-100" dirty="0">
                 <a:solidFill>
                   <a:srgbClr val="000000"/>
                 </a:solidFill>
@@ -2024,14 +1820,14 @@
             <a:endParaRPr lang="en-US" sz="4000" dirty="0"/>
           </a:p>
           <a:p>
-            <a:pPr indent="0" marL="0">
+            <a:pPr marL="0" indent="0">
               <a:lnSpc>
                 <a:spcPts val="4400"/>
               </a:lnSpc>
               <a:buNone/>
             </a:pPr>
             <a:r>
-              <a:rPr lang="en-US" sz="4000" b="1" spc="-100" kern="0" dirty="0">
+              <a:rPr lang="en-US" sz="4000" b="1" kern="0" spc="-100" dirty="0">
                 <a:solidFill>
                   <a:srgbClr val="000000"/>
                 </a:solidFill>
@@ -2044,14 +1840,14 @@
             <a:endParaRPr lang="en-US" sz="4000" dirty="0"/>
           </a:p>
           <a:p>
-            <a:pPr indent="0" marL="0">
+            <a:pPr marL="0" indent="0">
               <a:lnSpc>
                 <a:spcPts val="4400"/>
               </a:lnSpc>
               <a:buNone/>
             </a:pPr>
             <a:r>
-              <a:rPr lang="en-US" sz="4000" b="1" spc="-100" kern="0" dirty="0">
+              <a:rPr lang="en-US" sz="4000" b="1" kern="0" spc="-100" dirty="0">
                 <a:solidFill>
                   <a:srgbClr val="000000"/>
                 </a:solidFill>
@@ -2089,6 +1885,13 @@
             <a:prstDash val="solid"/>
           </a:ln>
         </p:spPr>
+        <p:txBody>
+          <a:bodyPr/>
+          <a:lstStyle/>
+          <a:p>
+            <a:endParaRPr lang="en-US"/>
+          </a:p>
+        </p:txBody>
       </p:sp>
       <p:sp>
         <p:nvSpPr>
@@ -2114,6 +1917,13 @@
             <a:prstDash val="solid"/>
           </a:ln>
         </p:spPr>
+        <p:txBody>
+          <a:bodyPr/>
+          <a:lstStyle/>
+          <a:p>
+            <a:endParaRPr lang="en-US"/>
+          </a:p>
+        </p:txBody>
       </p:sp>
       <p:sp>
         <p:nvSpPr>
@@ -2136,11 +1946,11 @@
           <a:bodyPr wrap="square" lIns="0" tIns="0" rIns="0" bIns="0" rtlCol="0" anchor="ctr"/>
           <a:lstStyle/>
           <a:p>
-            <a:pPr indent="0" marL="0">
-              <a:buNone/>
-            </a:pPr>
-            <a:r>
-              <a:rPr lang="en-US" sz="1250" b="1" spc="40" kern="0" dirty="0">
+            <a:pPr marL="0" indent="0">
+              <a:buNone/>
+            </a:pPr>
+            <a:r>
+              <a:rPr lang="en-US" sz="1250" b="1" kern="0" spc="40" dirty="0">
                 <a:solidFill>
                   <a:srgbClr val="000000"/>
                 </a:solidFill>
@@ -2175,11 +1985,11 @@
           <a:bodyPr wrap="square" lIns="0" tIns="0" rIns="0" bIns="0" rtlCol="0" anchor="ctr"/>
           <a:lstStyle/>
           <a:p>
-            <a:pPr indent="0" marL="0">
-              <a:buNone/>
-            </a:pPr>
-            <a:r>
-              <a:rPr lang="en-US" sz="1050" b="1" spc="80" kern="0" dirty="0">
+            <a:pPr marL="0" indent="0">
+              <a:buNone/>
+            </a:pPr>
+            <a:r>
+              <a:rPr lang="en-US" sz="1050" b="1" kern="0" spc="80" dirty="0">
                 <a:solidFill>
                   <a:srgbClr val="000000"/>
                 </a:solidFill>
@@ -2209,6 +2019,7 @@
         <a:solidFill>
           <a:srgbClr val="000000"/>
         </a:solidFill>
+        <a:effectLst/>
       </p:bgPr>
     </p:bg>
     <p:spTree>
@@ -2249,6 +2060,13 @@
             <a:prstDash val="solid"/>
           </a:ln>
         </p:spPr>
+        <p:txBody>
+          <a:bodyPr/>
+          <a:lstStyle/>
+          <a:p>
+            <a:endParaRPr lang="en-US"/>
+          </a:p>
+        </p:txBody>
       </p:sp>
       <p:sp>
         <p:nvSpPr>
@@ -2274,6 +2092,13 @@
             <a:prstDash val="solid"/>
           </a:ln>
         </p:spPr>
+        <p:txBody>
+          <a:bodyPr/>
+          <a:lstStyle/>
+          <a:p>
+            <a:endParaRPr lang="en-US"/>
+          </a:p>
+        </p:txBody>
       </p:sp>
       <p:sp>
         <p:nvSpPr>
@@ -2296,11 +2121,11 @@
           <a:bodyPr wrap="square" lIns="0" tIns="0" rIns="0" bIns="0" rtlCol="0" anchor="ctr"/>
           <a:lstStyle/>
           <a:p>
-            <a:pPr algn="ctr" indent="0" marL="0">
-              <a:buNone/>
-            </a:pPr>
-            <a:r>
-              <a:rPr lang="en-US" sz="1100" b="1" spc="100" kern="0" dirty="0">
+            <a:pPr marL="0" indent="0" algn="ctr">
+              <a:buNone/>
+            </a:pPr>
+            <a:r>
+              <a:rPr lang="en-US" sz="1100" b="1" kern="0" spc="100" dirty="0">
                 <a:solidFill>
                   <a:srgbClr val="000000"/>
                 </a:solidFill>
@@ -2335,11 +2160,11 @@
           <a:bodyPr wrap="square" lIns="0" tIns="0" rIns="0" bIns="0" rtlCol="0" anchor="ctr"/>
           <a:lstStyle/>
           <a:p>
-            <a:pPr indent="0" marL="0">
-              <a:buNone/>
-            </a:pPr>
-            <a:r>
-              <a:rPr lang="en-US" sz="3200" b="1" spc="-80" kern="0" dirty="0">
+            <a:pPr marL="0" indent="0">
+              <a:buNone/>
+            </a:pPr>
+            <a:r>
+              <a:rPr lang="en-US" sz="3200" b="1" kern="0" spc="-80" dirty="0">
                 <a:solidFill>
                   <a:srgbClr val="FFFDF7"/>
                 </a:solidFill>
@@ -2375,6 +2200,13 @@
             <a:prstDash val="solid"/>
           </a:ln>
         </p:spPr>
+        <p:txBody>
+          <a:bodyPr/>
+          <a:lstStyle/>
+          <a:p>
+            <a:endParaRPr lang="en-US"/>
+          </a:p>
+        </p:txBody>
       </p:sp>
       <p:sp>
         <p:nvSpPr>
@@ -2397,11 +2229,11 @@
           <a:bodyPr wrap="square" lIns="0" tIns="0" rIns="0" bIns="0" rtlCol="0" anchor="ctr"/>
           <a:lstStyle/>
           <a:p>
-            <a:pPr indent="0" marL="0">
-              <a:buNone/>
-            </a:pPr>
-            <a:r>
-              <a:rPr lang="en-US" sz="1300" b="1" spc="50" kern="0" dirty="0">
+            <a:pPr marL="0" indent="0">
+              <a:buNone/>
+            </a:pPr>
+            <a:r>
+              <a:rPr lang="en-US" sz="1300" b="1" kern="0" spc="50" dirty="0">
                 <a:solidFill>
                   <a:srgbClr val="FFE500"/>
                 </a:solidFill>
@@ -2439,6 +2271,13 @@
             <a:prstDash val="solid"/>
           </a:ln>
         </p:spPr>
+        <p:txBody>
+          <a:bodyPr/>
+          <a:lstStyle/>
+          <a:p>
+            <a:endParaRPr lang="en-US"/>
+          </a:p>
+        </p:txBody>
       </p:sp>
       <p:sp>
         <p:nvSpPr>
@@ -2464,6 +2303,13 @@
             <a:prstDash val="solid"/>
           </a:ln>
         </p:spPr>
+        <p:txBody>
+          <a:bodyPr/>
+          <a:lstStyle/>
+          <a:p>
+            <a:endParaRPr lang="en-US"/>
+          </a:p>
+        </p:txBody>
       </p:sp>
       <p:sp>
         <p:nvSpPr>
@@ -2486,7 +2332,7 @@
           <a:bodyPr wrap="square" lIns="0" tIns="0" rIns="0" bIns="0" rtlCol="0" anchor="ctr"/>
           <a:lstStyle/>
           <a:p>
-            <a:pPr algn="ctr" indent="0" marL="0">
+            <a:pPr marL="0" indent="0" algn="ctr">
               <a:buNone/>
             </a:pPr>
             <a:r>
@@ -2525,7 +2371,7 @@
           <a:bodyPr wrap="square" lIns="0" tIns="0" rIns="0" bIns="0" rtlCol="0" anchor="ctr"/>
           <a:lstStyle/>
           <a:p>
-            <a:pPr indent="0" marL="0">
+            <a:pPr marL="0" indent="0">
               <a:buNone/>
             </a:pPr>
             <a:r>
@@ -2567,6 +2413,13 @@
             <a:prstDash val="solid"/>
           </a:ln>
         </p:spPr>
+        <p:txBody>
+          <a:bodyPr/>
+          <a:lstStyle/>
+          <a:p>
+            <a:endParaRPr lang="en-US"/>
+          </a:p>
+        </p:txBody>
       </p:sp>
       <p:sp>
         <p:nvSpPr>
@@ -2592,6 +2445,13 @@
             <a:prstDash val="solid"/>
           </a:ln>
         </p:spPr>
+        <p:txBody>
+          <a:bodyPr/>
+          <a:lstStyle/>
+          <a:p>
+            <a:endParaRPr lang="en-US"/>
+          </a:p>
+        </p:txBody>
       </p:sp>
       <p:sp>
         <p:nvSpPr>
@@ -2614,7 +2474,7 @@
           <a:bodyPr wrap="square" lIns="0" tIns="0" rIns="0" bIns="0" rtlCol="0" anchor="ctr"/>
           <a:lstStyle/>
           <a:p>
-            <a:pPr algn="ctr" indent="0" marL="0">
+            <a:pPr marL="0" indent="0" algn="ctr">
               <a:buNone/>
             </a:pPr>
             <a:r>
@@ -2653,7 +2513,7 @@
           <a:bodyPr wrap="square" lIns="0" tIns="0" rIns="0" bIns="0" rtlCol="0" anchor="ctr"/>
           <a:lstStyle/>
           <a:p>
-            <a:pPr indent="0" marL="0">
+            <a:pPr marL="0" indent="0">
               <a:buNone/>
             </a:pPr>
             <a:r>
@@ -2695,6 +2555,13 @@
             <a:prstDash val="solid"/>
           </a:ln>
         </p:spPr>
+        <p:txBody>
+          <a:bodyPr/>
+          <a:lstStyle/>
+          <a:p>
+            <a:endParaRPr lang="en-US"/>
+          </a:p>
+        </p:txBody>
       </p:sp>
       <p:sp>
         <p:nvSpPr>
@@ -2720,6 +2587,13 @@
             <a:prstDash val="solid"/>
           </a:ln>
         </p:spPr>
+        <p:txBody>
+          <a:bodyPr/>
+          <a:lstStyle/>
+          <a:p>
+            <a:endParaRPr lang="en-US"/>
+          </a:p>
+        </p:txBody>
       </p:sp>
       <p:sp>
         <p:nvSpPr>
@@ -2742,7 +2616,7 @@
           <a:bodyPr wrap="square" lIns="0" tIns="0" rIns="0" bIns="0" rtlCol="0" anchor="ctr"/>
           <a:lstStyle/>
           <a:p>
-            <a:pPr algn="ctr" indent="0" marL="0">
+            <a:pPr marL="0" indent="0" algn="ctr">
               <a:buNone/>
             </a:pPr>
             <a:r>
@@ -2781,7 +2655,7 @@
           <a:bodyPr wrap="square" lIns="0" tIns="0" rIns="0" bIns="0" rtlCol="0" anchor="ctr"/>
           <a:lstStyle/>
           <a:p>
-            <a:pPr indent="0" marL="0">
+            <a:pPr marL="0" indent="0">
               <a:buNone/>
             </a:pPr>
             <a:r>
@@ -2823,6 +2697,13 @@
             <a:prstDash val="solid"/>
           </a:ln>
         </p:spPr>
+        <p:txBody>
+          <a:bodyPr/>
+          <a:lstStyle/>
+          <a:p>
+            <a:endParaRPr lang="en-US"/>
+          </a:p>
+        </p:txBody>
       </p:sp>
       <p:sp>
         <p:nvSpPr>
@@ -2848,6 +2729,13 @@
             <a:prstDash val="solid"/>
           </a:ln>
         </p:spPr>
+        <p:txBody>
+          <a:bodyPr/>
+          <a:lstStyle/>
+          <a:p>
+            <a:endParaRPr lang="en-US"/>
+          </a:p>
+        </p:txBody>
       </p:sp>
       <p:sp>
         <p:nvSpPr>
@@ -2870,7 +2758,7 @@
           <a:bodyPr wrap="square" lIns="0" tIns="0" rIns="0" bIns="0" rtlCol="0" anchor="ctr"/>
           <a:lstStyle/>
           <a:p>
-            <a:pPr algn="ctr" indent="0" marL="0">
+            <a:pPr marL="0" indent="0" algn="ctr">
               <a:buNone/>
             </a:pPr>
             <a:r>
@@ -2909,7 +2797,7 @@
           <a:bodyPr wrap="square" lIns="0" tIns="0" rIns="0" bIns="0" rtlCol="0" anchor="ctr"/>
           <a:lstStyle/>
           <a:p>
-            <a:pPr indent="0" marL="0">
+            <a:pPr marL="0" indent="0">
               <a:buNone/>
             </a:pPr>
             <a:r>
@@ -2951,6 +2839,13 @@
             <a:prstDash val="solid"/>
           </a:ln>
         </p:spPr>
+        <p:txBody>
+          <a:bodyPr/>
+          <a:lstStyle/>
+          <a:p>
+            <a:endParaRPr lang="en-US"/>
+          </a:p>
+        </p:txBody>
       </p:sp>
       <p:sp>
         <p:nvSpPr>
@@ -2976,6 +2871,13 @@
             <a:prstDash val="solid"/>
           </a:ln>
         </p:spPr>
+        <p:txBody>
+          <a:bodyPr/>
+          <a:lstStyle/>
+          <a:p>
+            <a:endParaRPr lang="en-US"/>
+          </a:p>
+        </p:txBody>
       </p:sp>
       <p:sp>
         <p:nvSpPr>
@@ -2998,7 +2900,7 @@
           <a:bodyPr wrap="square" lIns="0" tIns="0" rIns="0" bIns="0" rtlCol="0" anchor="ctr"/>
           <a:lstStyle/>
           <a:p>
-            <a:pPr indent="0" marL="0">
+            <a:pPr marL="0" indent="0">
               <a:buNone/>
             </a:pPr>
             <a:r>
@@ -3032,6 +2934,7 @@
         <a:solidFill>
           <a:srgbClr val="FFFDF7"/>
         </a:solidFill>
+        <a:effectLst/>
       </p:bgPr>
     </p:bg>
     <p:spTree>
@@ -3070,6 +2973,13 @@
             <a:prstDash val="solid"/>
           </a:ln>
         </p:spPr>
+        <p:txBody>
+          <a:bodyPr/>
+          <a:lstStyle/>
+          <a:p>
+            <a:endParaRPr lang="en-US"/>
+          </a:p>
+        </p:txBody>
       </p:sp>
       <p:sp>
         <p:nvSpPr>
@@ -3092,11 +3002,11 @@
           <a:bodyPr wrap="square" lIns="0" tIns="0" rIns="0" bIns="0" rtlCol="0" anchor="ctr"/>
           <a:lstStyle/>
           <a:p>
-            <a:pPr indent="0" marL="0">
-              <a:buNone/>
-            </a:pPr>
-            <a:r>
-              <a:rPr lang="en-US" sz="3300" b="1" spc="-60" kern="0" dirty="0">
+            <a:pPr marL="0" indent="0">
+              <a:buNone/>
+            </a:pPr>
+            <a:r>
+              <a:rPr lang="en-US" sz="3300" b="1" kern="0" spc="-60" dirty="0">
                 <a:solidFill>
                   <a:srgbClr val="000000"/>
                 </a:solidFill>
@@ -3134,6 +3044,13 @@
             <a:prstDash val="solid"/>
           </a:ln>
         </p:spPr>
+        <p:txBody>
+          <a:bodyPr/>
+          <a:lstStyle/>
+          <a:p>
+            <a:endParaRPr lang="en-US"/>
+          </a:p>
+        </p:txBody>
       </p:sp>
       <p:sp>
         <p:nvSpPr>
@@ -3159,6 +3076,13 @@
             <a:prstDash val="solid"/>
           </a:ln>
         </p:spPr>
+        <p:txBody>
+          <a:bodyPr/>
+          <a:lstStyle/>
+          <a:p>
+            <a:endParaRPr lang="en-US"/>
+          </a:p>
+        </p:txBody>
       </p:sp>
       <p:sp>
         <p:nvSpPr>
@@ -3181,11 +3105,11 @@
           <a:bodyPr wrap="square" lIns="0" tIns="0" rIns="0" bIns="0" rtlCol="0" anchor="ctr"/>
           <a:lstStyle/>
           <a:p>
-            <a:pPr algn="ctr" indent="0" marL="0">
-              <a:buNone/>
-            </a:pPr>
-            <a:r>
-              <a:rPr lang="en-US" sz="1400" b="1" spc="80" kern="0" dirty="0">
+            <a:pPr marL="0" indent="0" algn="ctr">
+              <a:buNone/>
+            </a:pPr>
+            <a:r>
+              <a:rPr lang="en-US" sz="1400" b="1" kern="0" spc="80" dirty="0">
                 <a:solidFill>
                   <a:srgbClr val="000000"/>
                 </a:solidFill>
@@ -3220,7 +3144,7 @@
           <a:bodyPr wrap="square" lIns="0" tIns="0" rIns="0" bIns="0" rtlCol="0" anchor="ctr"/>
           <a:lstStyle/>
           <a:p>
-            <a:pPr indent="0" marL="0">
+            <a:pPr marL="0" indent="0">
               <a:lnSpc>
                 <a:spcPts val="1900"/>
               </a:lnSpc>
@@ -3265,6 +3189,13 @@
             <a:prstDash val="solid"/>
           </a:ln>
         </p:spPr>
+        <p:txBody>
+          <a:bodyPr/>
+          <a:lstStyle/>
+          <a:p>
+            <a:endParaRPr lang="en-US"/>
+          </a:p>
+        </p:txBody>
       </p:sp>
       <p:sp>
         <p:nvSpPr>
@@ -3290,6 +3221,13 @@
             <a:prstDash val="solid"/>
           </a:ln>
         </p:spPr>
+        <p:txBody>
+          <a:bodyPr/>
+          <a:lstStyle/>
+          <a:p>
+            <a:endParaRPr lang="en-US"/>
+          </a:p>
+        </p:txBody>
       </p:sp>
       <p:sp>
         <p:nvSpPr>
@@ -3312,11 +3250,11 @@
           <a:bodyPr wrap="square" lIns="0" tIns="0" rIns="0" bIns="0" rtlCol="0" anchor="ctr"/>
           <a:lstStyle/>
           <a:p>
-            <a:pPr algn="ctr" indent="0" marL="0">
-              <a:buNone/>
-            </a:pPr>
-            <a:r>
-              <a:rPr lang="en-US" sz="1400" b="1" spc="80" kern="0" dirty="0">
+            <a:pPr marL="0" indent="0" algn="ctr">
+              <a:buNone/>
+            </a:pPr>
+            <a:r>
+              <a:rPr lang="en-US" sz="1400" b="1" kern="0" spc="80" dirty="0">
                 <a:solidFill>
                   <a:srgbClr val="000000"/>
                 </a:solidFill>
@@ -3351,7 +3289,7 @@
           <a:bodyPr wrap="square" lIns="0" tIns="0" rIns="0" bIns="0" rtlCol="0" anchor="ctr"/>
           <a:lstStyle/>
           <a:p>
-            <a:pPr indent="0" marL="0">
+            <a:pPr marL="0" indent="0">
               <a:lnSpc>
                 <a:spcPts val="1900"/>
               </a:lnSpc>
@@ -3396,6 +3334,13 @@
             <a:prstDash val="solid"/>
           </a:ln>
         </p:spPr>
+        <p:txBody>
+          <a:bodyPr/>
+          <a:lstStyle/>
+          <a:p>
+            <a:endParaRPr lang="en-US"/>
+          </a:p>
+        </p:txBody>
       </p:sp>
       <p:sp>
         <p:nvSpPr>
@@ -3421,6 +3366,13 @@
             <a:prstDash val="solid"/>
           </a:ln>
         </p:spPr>
+        <p:txBody>
+          <a:bodyPr/>
+          <a:lstStyle/>
+          <a:p>
+            <a:endParaRPr lang="en-US"/>
+          </a:p>
+        </p:txBody>
       </p:sp>
       <p:sp>
         <p:nvSpPr>
@@ -3443,11 +3395,11 @@
           <a:bodyPr wrap="square" lIns="0" tIns="0" rIns="0" bIns="0" rtlCol="0" anchor="ctr"/>
           <a:lstStyle/>
           <a:p>
-            <a:pPr algn="ctr" indent="0" marL="0">
-              <a:buNone/>
-            </a:pPr>
-            <a:r>
-              <a:rPr lang="en-US" sz="1400" b="1" spc="80" kern="0" dirty="0">
+            <a:pPr marL="0" indent="0" algn="ctr">
+              <a:buNone/>
+            </a:pPr>
+            <a:r>
+              <a:rPr lang="en-US" sz="1400" b="1" kern="0" spc="80" dirty="0">
                 <a:solidFill>
                   <a:srgbClr val="000000"/>
                 </a:solidFill>
@@ -3482,7 +3434,7 @@
           <a:bodyPr wrap="square" lIns="0" tIns="0" rIns="0" bIns="0" rtlCol="0" anchor="ctr"/>
           <a:lstStyle/>
           <a:p>
-            <a:pPr indent="0" marL="0">
+            <a:pPr marL="0" indent="0">
               <a:lnSpc>
                 <a:spcPts val="1900"/>
               </a:lnSpc>
@@ -3527,6 +3479,13 @@
             <a:prstDash val="solid"/>
           </a:ln>
         </p:spPr>
+        <p:txBody>
+          <a:bodyPr/>
+          <a:lstStyle/>
+          <a:p>
+            <a:endParaRPr lang="en-US"/>
+          </a:p>
+        </p:txBody>
       </p:sp>
       <p:sp>
         <p:nvSpPr>
@@ -3552,6 +3511,13 @@
             <a:prstDash val="solid"/>
           </a:ln>
         </p:spPr>
+        <p:txBody>
+          <a:bodyPr/>
+          <a:lstStyle/>
+          <a:p>
+            <a:endParaRPr lang="en-US"/>
+          </a:p>
+        </p:txBody>
       </p:sp>
       <p:sp>
         <p:nvSpPr>
@@ -3574,11 +3540,11 @@
           <a:bodyPr wrap="square" lIns="0" tIns="0" rIns="0" bIns="0" rtlCol="0" anchor="ctr"/>
           <a:lstStyle/>
           <a:p>
-            <a:pPr algn="ctr" indent="0" marL="0">
-              <a:buNone/>
-            </a:pPr>
-            <a:r>
-              <a:rPr lang="en-US" sz="1400" b="1" spc="80" kern="0" dirty="0">
+            <a:pPr marL="0" indent="0" algn="ctr">
+              <a:buNone/>
+            </a:pPr>
+            <a:r>
+              <a:rPr lang="en-US" sz="1400" b="1" kern="0" spc="80" dirty="0">
                 <a:solidFill>
                   <a:srgbClr val="000000"/>
                 </a:solidFill>
@@ -3613,7 +3579,7 @@
           <a:bodyPr wrap="square" lIns="0" tIns="0" rIns="0" bIns="0" rtlCol="0" anchor="ctr"/>
           <a:lstStyle/>
           <a:p>
-            <a:pPr indent="0" marL="0">
+            <a:pPr marL="0" indent="0">
               <a:lnSpc>
                 <a:spcPts val="1900"/>
               </a:lnSpc>
@@ -3650,6 +3616,7 @@
         <a:solidFill>
           <a:srgbClr val="FFE500"/>
         </a:solidFill>
+        <a:effectLst/>
       </p:bgPr>
     </p:bg>
     <p:spTree>
@@ -3690,6 +3657,13 @@
             <a:prstDash val="solid"/>
           </a:ln>
         </p:spPr>
+        <p:txBody>
+          <a:bodyPr/>
+          <a:lstStyle/>
+          <a:p>
+            <a:endParaRPr lang="en-US"/>
+          </a:p>
+        </p:txBody>
       </p:sp>
       <p:sp>
         <p:nvSpPr>
@@ -3715,6 +3689,13 @@
             <a:prstDash val="solid"/>
           </a:ln>
         </p:spPr>
+        <p:txBody>
+          <a:bodyPr/>
+          <a:lstStyle/>
+          <a:p>
+            <a:endParaRPr lang="en-US"/>
+          </a:p>
+        </p:txBody>
       </p:sp>
       <p:sp>
         <p:nvSpPr>
@@ -3737,11 +3718,11 @@
           <a:bodyPr wrap="square" lIns="0" tIns="0" rIns="0" bIns="0" rtlCol="0" anchor="ctr"/>
           <a:lstStyle/>
           <a:p>
-            <a:pPr indent="0" marL="0">
-              <a:buNone/>
-            </a:pPr>
-            <a:r>
-              <a:rPr lang="en-US" sz="3000" b="1" spc="-60" kern="0" dirty="0">
+            <a:pPr marL="0" indent="0">
+              <a:buNone/>
+            </a:pPr>
+            <a:r>
+              <a:rPr lang="en-US" sz="3000" b="1" kern="0" spc="-60" dirty="0">
                 <a:solidFill>
                   <a:srgbClr val="000000"/>
                 </a:solidFill>
@@ -3779,6 +3760,13 @@
             <a:prstDash val="solid"/>
           </a:ln>
         </p:spPr>
+        <p:txBody>
+          <a:bodyPr/>
+          <a:lstStyle/>
+          <a:p>
+            <a:endParaRPr lang="en-US"/>
+          </a:p>
+        </p:txBody>
       </p:sp>
       <p:sp>
         <p:nvSpPr>
@@ -3801,7 +3789,7 @@
           <a:bodyPr wrap="square" lIns="0" tIns="0" rIns="0" bIns="0" rtlCol="0" anchor="ctr"/>
           <a:lstStyle/>
           <a:p>
-            <a:pPr indent="0" marL="0">
+            <a:pPr marL="0" indent="0">
               <a:lnSpc>
                 <a:spcPts val="1800"/>
               </a:lnSpc>
@@ -3846,6 +3834,13 @@
             <a:prstDash val="solid"/>
           </a:ln>
         </p:spPr>
+        <p:txBody>
+          <a:bodyPr/>
+          <a:lstStyle/>
+          <a:p>
+            <a:endParaRPr lang="en-US"/>
+          </a:p>
+        </p:txBody>
       </p:sp>
       <p:sp>
         <p:nvSpPr>
@@ -3871,6 +3866,13 @@
             <a:prstDash val="solid"/>
           </a:ln>
         </p:spPr>
+        <p:txBody>
+          <a:bodyPr/>
+          <a:lstStyle/>
+          <a:p>
+            <a:endParaRPr lang="en-US"/>
+          </a:p>
+        </p:txBody>
       </p:sp>
       <p:sp>
         <p:nvSpPr>
@@ -3893,11 +3895,11 @@
           <a:bodyPr wrap="square" lIns="0" tIns="0" rIns="0" bIns="0" rtlCol="0" anchor="ctr"/>
           <a:lstStyle/>
           <a:p>
-            <a:pPr indent="0" marL="0">
-              <a:buNone/>
-            </a:pPr>
-            <a:r>
-              <a:rPr lang="en-US" sz="3000" b="1" spc="-60" kern="0" dirty="0">
+            <a:pPr marL="0" indent="0">
+              <a:buNone/>
+            </a:pPr>
+            <a:r>
+              <a:rPr lang="en-US" sz="3000" b="1" kern="0" spc="-60" dirty="0">
                 <a:solidFill>
                   <a:srgbClr val="000000"/>
                 </a:solidFill>
@@ -3935,6 +3937,13 @@
             <a:prstDash val="solid"/>
           </a:ln>
         </p:spPr>
+        <p:txBody>
+          <a:bodyPr/>
+          <a:lstStyle/>
+          <a:p>
+            <a:endParaRPr lang="en-US"/>
+          </a:p>
+        </p:txBody>
       </p:sp>
       <p:sp>
         <p:nvSpPr>
@@ -3957,7 +3966,7 @@
           <a:bodyPr wrap="square" lIns="0" tIns="0" rIns="0" bIns="0" rtlCol="0" anchor="ctr"/>
           <a:lstStyle/>
           <a:p>
-            <a:pPr indent="0" marL="0">
+            <a:pPr marL="0" indent="0">
               <a:lnSpc>
                 <a:spcPts val="1800"/>
               </a:lnSpc>
@@ -4002,6 +4011,13 @@
             <a:prstDash val="solid"/>
           </a:ln>
         </p:spPr>
+        <p:txBody>
+          <a:bodyPr/>
+          <a:lstStyle/>
+          <a:p>
+            <a:endParaRPr lang="en-US"/>
+          </a:p>
+        </p:txBody>
       </p:sp>
       <p:sp>
         <p:nvSpPr>
@@ -4027,6 +4043,13 @@
             <a:prstDash val="solid"/>
           </a:ln>
         </p:spPr>
+        <p:txBody>
+          <a:bodyPr/>
+          <a:lstStyle/>
+          <a:p>
+            <a:endParaRPr lang="en-US"/>
+          </a:p>
+        </p:txBody>
       </p:sp>
       <p:sp>
         <p:nvSpPr>
@@ -4049,11 +4072,11 @@
           <a:bodyPr wrap="square" lIns="0" tIns="0" rIns="0" bIns="0" rtlCol="0" anchor="ctr"/>
           <a:lstStyle/>
           <a:p>
-            <a:pPr indent="0" marL="0">
-              <a:buNone/>
-            </a:pPr>
-            <a:r>
-              <a:rPr lang="en-US" sz="3000" b="1" spc="-60" kern="0" dirty="0">
+            <a:pPr marL="0" indent="0">
+              <a:buNone/>
+            </a:pPr>
+            <a:r>
+              <a:rPr lang="en-US" sz="3000" b="1" kern="0" spc="-60" dirty="0">
                 <a:solidFill>
                   <a:srgbClr val="000000"/>
                 </a:solidFill>
@@ -4088,7 +4111,7 @@
           <a:bodyPr wrap="square" lIns="0" tIns="0" rIns="0" bIns="0" rtlCol="0" anchor="ctr"/>
           <a:lstStyle/>
           <a:p>
-            <a:pPr indent="0" marL="0">
+            <a:pPr marL="0" indent="0">
               <a:lnSpc>
                 <a:spcPts val="1800"/>
               </a:lnSpc>
@@ -4108,7 +4131,7 @@
             <a:endParaRPr lang="en-US" sz="1300" dirty="0"/>
           </a:p>
           <a:p>
-            <a:pPr indent="0" marL="0">
+            <a:pPr marL="0" indent="0">
               <a:lnSpc>
                 <a:spcPts val="1800"/>
               </a:lnSpc>
@@ -4153,6 +4176,13 @@
             <a:prstDash val="solid"/>
           </a:ln>
         </p:spPr>
+        <p:txBody>
+          <a:bodyPr/>
+          <a:lstStyle/>
+          <a:p>
+            <a:endParaRPr lang="en-US"/>
+          </a:p>
+        </p:txBody>
       </p:sp>
       <p:sp>
         <p:nvSpPr>
@@ -4178,6 +4208,13 @@
             <a:prstDash val="solid"/>
           </a:ln>
         </p:spPr>
+        <p:txBody>
+          <a:bodyPr/>
+          <a:lstStyle/>
+          <a:p>
+            <a:endParaRPr lang="en-US"/>
+          </a:p>
+        </p:txBody>
       </p:sp>
       <p:sp>
         <p:nvSpPr>
@@ -4200,11 +4237,11 @@
           <a:bodyPr wrap="square" lIns="0" tIns="0" rIns="0" bIns="0" rtlCol="0" anchor="ctr"/>
           <a:lstStyle/>
           <a:p>
-            <a:pPr algn="ctr" indent="0" marL="0">
-              <a:buNone/>
-            </a:pPr>
-            <a:r>
-              <a:rPr lang="en-US" sz="2200" b="1" spc="50" kern="0" dirty="0">
+            <a:pPr marL="0" indent="0" algn="ctr">
+              <a:buNone/>
+            </a:pPr>
+            <a:r>
+              <a:rPr lang="en-US" sz="2200" b="1" kern="0" spc="50" dirty="0">
                 <a:solidFill>
                   <a:srgbClr val="FFE500"/>
                 </a:solidFill>
@@ -4234,6 +4271,7 @@
         <a:solidFill>
           <a:srgbClr val="000000"/>
         </a:solidFill>
+        <a:effectLst/>
       </p:bgPr>
     </p:bg>
     <p:spTree>
@@ -4274,6 +4312,13 @@
             <a:prstDash val="solid"/>
           </a:ln>
         </p:spPr>
+        <p:txBody>
+          <a:bodyPr/>
+          <a:lstStyle/>
+          <a:p>
+            <a:endParaRPr lang="en-US"/>
+          </a:p>
+        </p:txBody>
       </p:sp>
       <p:sp>
         <p:nvSpPr>
@@ -4299,6 +4344,13 @@
             <a:prstDash val="solid"/>
           </a:ln>
         </p:spPr>
+        <p:txBody>
+          <a:bodyPr/>
+          <a:lstStyle/>
+          <a:p>
+            <a:endParaRPr lang="en-US"/>
+          </a:p>
+        </p:txBody>
       </p:sp>
       <p:sp>
         <p:nvSpPr>
@@ -4321,14 +4373,14 @@
           <a:bodyPr wrap="square" lIns="0" tIns="0" rIns="0" bIns="0" rtlCol="0" anchor="ctr"/>
           <a:lstStyle/>
           <a:p>
-            <a:pPr indent="0" marL="0">
+            <a:pPr marL="0" indent="0">
               <a:lnSpc>
                 <a:spcPts val="3600"/>
               </a:lnSpc>
               <a:buNone/>
             </a:pPr>
             <a:r>
-              <a:rPr lang="en-US" sz="2600" b="1" spc="-40" kern="0" dirty="0">
+              <a:rPr lang="en-US" sz="2600" b="1" kern="0" spc="-40" dirty="0">
                 <a:solidFill>
                   <a:srgbClr val="000000"/>
                 </a:solidFill>
@@ -4366,6 +4418,13 @@
             <a:prstDash val="solid"/>
           </a:ln>
         </p:spPr>
+        <p:txBody>
+          <a:bodyPr/>
+          <a:lstStyle/>
+          <a:p>
+            <a:endParaRPr lang="en-US"/>
+          </a:p>
+        </p:txBody>
       </p:sp>
       <p:sp>
         <p:nvSpPr>
@@ -4391,6 +4450,13 @@
             <a:prstDash val="solid"/>
           </a:ln>
         </p:spPr>
+        <p:txBody>
+          <a:bodyPr/>
+          <a:lstStyle/>
+          <a:p>
+            <a:endParaRPr lang="en-US"/>
+          </a:p>
+        </p:txBody>
       </p:sp>
       <p:sp>
         <p:nvSpPr>
@@ -4413,7 +4479,7 @@
           <a:bodyPr wrap="square" lIns="0" tIns="0" rIns="0" bIns="0" rtlCol="0" anchor="ctr"/>
           <a:lstStyle/>
           <a:p>
-            <a:pPr indent="0" marL="0">
+            <a:pPr marL="0" indent="0">
               <a:buNone/>
             </a:pPr>
             <a:r>
@@ -4447,6 +4513,7 @@
         <a:solidFill>
           <a:srgbClr val="FFFDF7"/>
         </a:solidFill>
+        <a:effectLst/>
       </p:bgPr>
     </p:bg>
     <p:spTree>
@@ -4485,6 +4552,13 @@
             <a:prstDash val="solid"/>
           </a:ln>
         </p:spPr>
+        <p:txBody>
+          <a:bodyPr/>
+          <a:lstStyle/>
+          <a:p>
+            <a:endParaRPr lang="en-US"/>
+          </a:p>
+        </p:txBody>
       </p:sp>
       <p:sp>
         <p:nvSpPr>
@@ -4507,11 +4581,11 @@
           <a:bodyPr wrap="square" lIns="0" tIns="0" rIns="0" bIns="0" rtlCol="0" anchor="ctr"/>
           <a:lstStyle/>
           <a:p>
-            <a:pPr indent="0" marL="0">
-              <a:buNone/>
-            </a:pPr>
-            <a:r>
-              <a:rPr lang="en-US" sz="3300" b="1" spc="-60" kern="0" dirty="0">
+            <a:pPr marL="0" indent="0">
+              <a:buNone/>
+            </a:pPr>
+            <a:r>
+              <a:rPr lang="en-US" sz="3300" b="1" kern="0" spc="-60" dirty="0">
                 <a:solidFill>
                   <a:srgbClr val="000000"/>
                 </a:solidFill>
@@ -4546,7 +4620,7 @@
           <a:bodyPr wrap="square" lIns="0" tIns="0" rIns="0" bIns="0" rtlCol="0" anchor="ctr"/>
           <a:lstStyle/>
           <a:p>
-            <a:pPr indent="0" marL="0">
+            <a:pPr marL="0" indent="0">
               <a:buNone/>
             </a:pPr>
             <a:r>
@@ -4588,6 +4662,13 @@
             <a:prstDash val="solid"/>
           </a:ln>
         </p:spPr>
+        <p:txBody>
+          <a:bodyPr/>
+          <a:lstStyle/>
+          <a:p>
+            <a:endParaRPr lang="en-US"/>
+          </a:p>
+        </p:txBody>
       </p:sp>
       <p:sp>
         <p:nvSpPr>
@@ -4613,6 +4694,13 @@
             <a:prstDash val="solid"/>
           </a:ln>
         </p:spPr>
+        <p:txBody>
+          <a:bodyPr/>
+          <a:lstStyle/>
+          <a:p>
+            <a:endParaRPr lang="en-US"/>
+          </a:p>
+        </p:txBody>
       </p:sp>
       <p:sp>
         <p:nvSpPr>
@@ -4635,11 +4723,11 @@
           <a:bodyPr wrap="square" lIns="0" tIns="0" rIns="0" bIns="0" rtlCol="0" anchor="ctr"/>
           <a:lstStyle/>
           <a:p>
-            <a:pPr indent="0" marL="0">
-              <a:buNone/>
-            </a:pPr>
-            <a:r>
-              <a:rPr lang="en-US" sz="2000" b="1" spc="-30" kern="0" dirty="0">
+            <a:pPr marL="0" indent="0">
+              <a:buNone/>
+            </a:pPr>
+            <a:r>
+              <a:rPr lang="en-US" sz="2000" b="1" kern="0" spc="-30" dirty="0">
                 <a:solidFill>
                   <a:srgbClr val="000000"/>
                 </a:solidFill>
@@ -4675,6 +4763,13 @@
             <a:prstDash val="solid"/>
           </a:ln>
         </p:spPr>
+        <p:txBody>
+          <a:bodyPr/>
+          <a:lstStyle/>
+          <a:p>
+            <a:endParaRPr lang="en-US"/>
+          </a:p>
+        </p:txBody>
       </p:sp>
       <p:sp>
         <p:nvSpPr>
@@ -4697,7 +4792,7 @@
           <a:bodyPr wrap="square" lIns="0" tIns="0" rIns="0" bIns="0" rtlCol="0" anchor="ctr"/>
           <a:lstStyle/>
           <a:p>
-            <a:pPr indent="0" marL="0">
+            <a:pPr marL="0" indent="0">
               <a:lnSpc>
                 <a:spcPts val="2100"/>
               </a:lnSpc>
@@ -4717,7 +4812,7 @@
             <a:endParaRPr lang="en-US" sz="1400" dirty="0"/>
           </a:p>
           <a:p>
-            <a:pPr indent="0" marL="0">
+            <a:pPr marL="0" indent="0">
               <a:lnSpc>
                 <a:spcPts val="2100"/>
               </a:lnSpc>
@@ -4737,7 +4832,7 @@
             <a:endParaRPr lang="en-US" sz="1400" dirty="0"/>
           </a:p>
           <a:p>
-            <a:pPr indent="0" marL="0">
+            <a:pPr marL="0" indent="0">
               <a:lnSpc>
                 <a:spcPts val="2100"/>
               </a:lnSpc>
@@ -4782,6 +4877,13 @@
             <a:prstDash val="solid"/>
           </a:ln>
         </p:spPr>
+        <p:txBody>
+          <a:bodyPr/>
+          <a:lstStyle/>
+          <a:p>
+            <a:endParaRPr lang="en-US"/>
+          </a:p>
+        </p:txBody>
       </p:sp>
       <p:sp>
         <p:nvSpPr>
@@ -4807,6 +4909,13 @@
             <a:prstDash val="solid"/>
           </a:ln>
         </p:spPr>
+        <p:txBody>
+          <a:bodyPr/>
+          <a:lstStyle/>
+          <a:p>
+            <a:endParaRPr lang="en-US"/>
+          </a:p>
+        </p:txBody>
       </p:sp>
       <p:sp>
         <p:nvSpPr>
@@ -4832,6 +4941,13 @@
             <a:prstDash val="solid"/>
           </a:ln>
         </p:spPr>
+        <p:txBody>
+          <a:bodyPr/>
+          <a:lstStyle/>
+          <a:p>
+            <a:endParaRPr lang="en-US"/>
+          </a:p>
+        </p:txBody>
       </p:sp>
       <p:sp>
         <p:nvSpPr>
@@ -4854,11 +4970,11 @@
           <a:bodyPr wrap="square" lIns="0" tIns="0" rIns="0" bIns="0" rtlCol="0" anchor="ctr"/>
           <a:lstStyle/>
           <a:p>
-            <a:pPr indent="0" marL="0">
-              <a:buNone/>
-            </a:pPr>
-            <a:r>
-              <a:rPr lang="en-US" sz="2000" b="1" spc="-30" kern="0" dirty="0">
+            <a:pPr marL="0" indent="0">
+              <a:buNone/>
+            </a:pPr>
+            <a:r>
+              <a:rPr lang="en-US" sz="2000" b="1" kern="0" spc="-30" dirty="0">
                 <a:solidFill>
                   <a:srgbClr val="000000"/>
                 </a:solidFill>
@@ -4894,6 +5010,13 @@
             <a:prstDash val="solid"/>
           </a:ln>
         </p:spPr>
+        <p:txBody>
+          <a:bodyPr/>
+          <a:lstStyle/>
+          <a:p>
+            <a:endParaRPr lang="en-US"/>
+          </a:p>
+        </p:txBody>
       </p:sp>
       <p:sp>
         <p:nvSpPr>
@@ -4916,7 +5039,7 @@
           <a:bodyPr wrap="square" lIns="0" tIns="0" rIns="0" bIns="0" rtlCol="0" anchor="ctr"/>
           <a:lstStyle/>
           <a:p>
-            <a:pPr indent="0" marL="0">
+            <a:pPr marL="0" indent="0">
               <a:lnSpc>
                 <a:spcPts val="2100"/>
               </a:lnSpc>
@@ -4936,7 +5059,7 @@
             <a:endParaRPr lang="en-US" sz="1400" dirty="0"/>
           </a:p>
           <a:p>
-            <a:pPr indent="0" marL="0">
+            <a:pPr marL="0" indent="0">
               <a:lnSpc>
                 <a:spcPts val="2100"/>
               </a:lnSpc>
@@ -4956,7 +5079,7 @@
             <a:endParaRPr lang="en-US" sz="1400" dirty="0"/>
           </a:p>
           <a:p>
-            <a:pPr indent="0" marL="0">
+            <a:pPr marL="0" indent="0">
               <a:lnSpc>
                 <a:spcPts val="2100"/>
               </a:lnSpc>
@@ -5001,6 +5124,13 @@
             <a:prstDash val="solid"/>
           </a:ln>
         </p:spPr>
+        <p:txBody>
+          <a:bodyPr/>
+          <a:lstStyle/>
+          <a:p>
+            <a:endParaRPr lang="en-US"/>
+          </a:p>
+        </p:txBody>
       </p:sp>
       <p:sp>
         <p:nvSpPr>
@@ -5026,6 +5156,13 @@
             <a:prstDash val="solid"/>
           </a:ln>
         </p:spPr>
+        <p:txBody>
+          <a:bodyPr/>
+          <a:lstStyle/>
+          <a:p>
+            <a:endParaRPr lang="en-US"/>
+          </a:p>
+        </p:txBody>
       </p:sp>
       <p:sp>
         <p:nvSpPr>
@@ -5051,6 +5188,13 @@
             <a:prstDash val="solid"/>
           </a:ln>
         </p:spPr>
+        <p:txBody>
+          <a:bodyPr/>
+          <a:lstStyle/>
+          <a:p>
+            <a:endParaRPr lang="en-US"/>
+          </a:p>
+        </p:txBody>
       </p:sp>
       <p:sp>
         <p:nvSpPr>
@@ -5073,11 +5217,11 @@
           <a:bodyPr wrap="square" lIns="0" tIns="0" rIns="0" bIns="0" rtlCol="0" anchor="ctr"/>
           <a:lstStyle/>
           <a:p>
-            <a:pPr indent="0" marL="0">
-              <a:buNone/>
-            </a:pPr>
-            <a:r>
-              <a:rPr lang="en-US" sz="2000" b="1" spc="-30" kern="0" dirty="0">
+            <a:pPr marL="0" indent="0">
+              <a:buNone/>
+            </a:pPr>
+            <a:r>
+              <a:rPr lang="en-US" sz="2000" b="1" kern="0" spc="-30" dirty="0">
                 <a:solidFill>
                   <a:srgbClr val="000000"/>
                 </a:solidFill>
@@ -5113,6 +5257,13 @@
             <a:prstDash val="solid"/>
           </a:ln>
         </p:spPr>
+        <p:txBody>
+          <a:bodyPr/>
+          <a:lstStyle/>
+          <a:p>
+            <a:endParaRPr lang="en-US"/>
+          </a:p>
+        </p:txBody>
       </p:sp>
       <p:sp>
         <p:nvSpPr>
@@ -5135,7 +5286,7 @@
           <a:bodyPr wrap="square" lIns="0" tIns="0" rIns="0" bIns="0" rtlCol="0" anchor="ctr"/>
           <a:lstStyle/>
           <a:p>
-            <a:pPr indent="0" marL="0">
+            <a:pPr marL="0" indent="0">
               <a:lnSpc>
                 <a:spcPts val="2100"/>
               </a:lnSpc>
@@ -5172,6 +5323,7 @@
         <a:solidFill>
           <a:srgbClr val="FFFDF7"/>
         </a:solidFill>
+        <a:effectLst/>
       </p:bgPr>
     </p:bg>
     <p:spTree>
@@ -5210,6 +5362,13 @@
             <a:prstDash val="solid"/>
           </a:ln>
         </p:spPr>
+        <p:txBody>
+          <a:bodyPr/>
+          <a:lstStyle/>
+          <a:p>
+            <a:endParaRPr lang="en-US"/>
+          </a:p>
+        </p:txBody>
       </p:sp>
       <p:sp>
         <p:nvSpPr>
@@ -5232,11 +5391,11 @@
           <a:bodyPr wrap="square" lIns="0" tIns="0" rIns="0" bIns="0" rtlCol="0" anchor="ctr"/>
           <a:lstStyle/>
           <a:p>
-            <a:pPr indent="0" marL="0">
-              <a:buNone/>
-            </a:pPr>
-            <a:r>
-              <a:rPr lang="en-US" sz="3300" b="1" spc="-60" kern="0" dirty="0">
+            <a:pPr marL="0" indent="0">
+              <a:buNone/>
+            </a:pPr>
+            <a:r>
+              <a:rPr lang="en-US" sz="3300" b="1" kern="0" spc="-60" dirty="0">
                 <a:solidFill>
                   <a:srgbClr val="000000"/>
                 </a:solidFill>
@@ -5271,7 +5430,7 @@
           <a:bodyPr wrap="square" lIns="0" tIns="0" rIns="0" bIns="0" rtlCol="0" anchor="ctr"/>
           <a:lstStyle/>
           <a:p>
-            <a:pPr indent="0" marL="0">
+            <a:pPr marL="0" indent="0">
               <a:buNone/>
             </a:pPr>
             <a:r>
@@ -5313,6 +5472,13 @@
             <a:prstDash val="solid"/>
           </a:ln>
         </p:spPr>
+        <p:txBody>
+          <a:bodyPr/>
+          <a:lstStyle/>
+          <a:p>
+            <a:endParaRPr lang="en-US"/>
+          </a:p>
+        </p:txBody>
       </p:sp>
       <p:sp>
         <p:nvSpPr>
@@ -5338,6 +5504,13 @@
             <a:prstDash val="solid"/>
           </a:ln>
         </p:spPr>
+        <p:txBody>
+          <a:bodyPr/>
+          <a:lstStyle/>
+          <a:p>
+            <a:endParaRPr lang="en-US"/>
+          </a:p>
+        </p:txBody>
       </p:sp>
       <p:sp>
         <p:nvSpPr>
@@ -5363,6 +5536,13 @@
             <a:prstDash val="solid"/>
           </a:ln>
         </p:spPr>
+        <p:txBody>
+          <a:bodyPr/>
+          <a:lstStyle/>
+          <a:p>
+            <a:endParaRPr lang="en-US"/>
+          </a:p>
+        </p:txBody>
       </p:sp>
       <p:sp>
         <p:nvSpPr>
@@ -5385,7 +5565,7 @@
           <a:bodyPr wrap="square" lIns="0" tIns="0" rIns="0" bIns="0" rtlCol="0" anchor="ctr"/>
           <a:lstStyle/>
           <a:p>
-            <a:pPr indent="0" marL="0">
+            <a:pPr marL="0" indent="0">
               <a:buNone/>
             </a:pPr>
             <a:r>
@@ -5424,11 +5604,11 @@
           <a:bodyPr wrap="square" lIns="0" tIns="0" rIns="0" bIns="0" rtlCol="0" anchor="ctr"/>
           <a:lstStyle/>
           <a:p>
-            <a:pPr indent="0" marL="0">
-              <a:buNone/>
-            </a:pPr>
-            <a:r>
-              <a:rPr lang="en-US" sz="1350" b="1" spc="40" kern="0" dirty="0">
+            <a:pPr marL="0" indent="0">
+              <a:buNone/>
+            </a:pPr>
+            <a:r>
+              <a:rPr lang="en-US" sz="1350" b="1" kern="0" spc="40" dirty="0">
                 <a:solidFill>
                   <a:srgbClr val="000000"/>
                 </a:solidFill>
@@ -5463,11 +5643,11 @@
           <a:bodyPr wrap="square" lIns="0" tIns="0" rIns="0" bIns="0" rtlCol="0" anchor="ctr"/>
           <a:lstStyle/>
           <a:p>
-            <a:pPr indent="0" marL="0">
-              <a:buNone/>
-            </a:pPr>
-            <a:r>
-              <a:rPr lang="en-US" sz="850" b="1" spc="120" kern="0" dirty="0">
+            <a:pPr marL="0" indent="0">
+              <a:buNone/>
+            </a:pPr>
+            <a:r>
+              <a:rPr lang="en-US" sz="850" b="1" kern="0" spc="120" dirty="0">
                 <a:solidFill>
                   <a:srgbClr val="6B6B6B"/>
                 </a:solidFill>
@@ -5502,7 +5682,7 @@
           <a:bodyPr wrap="square" lIns="0" tIns="0" rIns="0" bIns="0" rtlCol="0" anchor="ctr"/>
           <a:lstStyle/>
           <a:p>
-            <a:pPr indent="0" marL="0">
+            <a:pPr marL="0" indent="0">
               <a:lnSpc>
                 <a:spcPts val="1700"/>
               </a:lnSpc>
@@ -5522,7 +5702,7 @@
             <a:endParaRPr lang="en-US" sz="1250" dirty="0"/>
           </a:p>
           <a:p>
-            <a:pPr indent="0" marL="0">
+            <a:pPr marL="0" indent="0">
               <a:lnSpc>
                 <a:spcPts val="1700"/>
               </a:lnSpc>
@@ -5564,11 +5744,11 @@
           <a:bodyPr wrap="square" lIns="0" tIns="0" rIns="0" bIns="0" rtlCol="0" anchor="ctr"/>
           <a:lstStyle/>
           <a:p>
-            <a:pPr indent="0" marL="0">
-              <a:buNone/>
-            </a:pPr>
-            <a:r>
-              <a:rPr lang="en-US" sz="850" b="1" spc="120" kern="0" dirty="0">
+            <a:pPr marL="0" indent="0">
+              <a:buNone/>
+            </a:pPr>
+            <a:r>
+              <a:rPr lang="en-US" sz="850" b="1" kern="0" spc="120" dirty="0">
                 <a:solidFill>
                   <a:srgbClr val="6B6B6B"/>
                 </a:solidFill>
@@ -5603,14 +5783,14 @@
           <a:bodyPr wrap="square" lIns="0" tIns="0" rIns="0" bIns="0" rtlCol="0" anchor="ctr"/>
           <a:lstStyle/>
           <a:p>
-            <a:pPr indent="0" marL="0">
+            <a:pPr marL="0" indent="0">
               <a:lnSpc>
                 <a:spcPts val="1700"/>
               </a:lnSpc>
               <a:buNone/>
             </a:pPr>
             <a:r>
-              <a:rPr lang="en-US" sz="1300" b="1" spc="-20" kern="0" dirty="0">
+              <a:rPr lang="en-US" sz="1300" b="1" kern="0" spc="-20" dirty="0">
                 <a:solidFill>
                   <a:srgbClr val="000000"/>
                 </a:solidFill>
@@ -5646,6 +5826,13 @@
             <a:prstDash val="solid"/>
           </a:ln>
         </p:spPr>
+        <p:txBody>
+          <a:bodyPr/>
+          <a:lstStyle/>
+          <a:p>
+            <a:endParaRPr lang="en-US"/>
+          </a:p>
+        </p:txBody>
       </p:sp>
       <p:sp>
         <p:nvSpPr>
@@ -5668,11 +5855,11 @@
           <a:bodyPr wrap="square" lIns="0" tIns="0" rIns="0" bIns="0" rtlCol="0" anchor="ctr"/>
           <a:lstStyle/>
           <a:p>
-            <a:pPr indent="0" marL="0">
-              <a:buNone/>
-            </a:pPr>
-            <a:r>
-              <a:rPr lang="en-US" sz="850" b="1" spc="120" kern="0" dirty="0">
+            <a:pPr marL="0" indent="0">
+              <a:buNone/>
+            </a:pPr>
+            <a:r>
+              <a:rPr lang="en-US" sz="850" b="1" kern="0" spc="120" dirty="0">
                 <a:solidFill>
                   <a:srgbClr val="6B6B6B"/>
                 </a:solidFill>
@@ -5707,14 +5894,14 @@
           <a:bodyPr wrap="square" lIns="0" tIns="0" rIns="0" bIns="0" rtlCol="0" anchor="ctr"/>
           <a:lstStyle/>
           <a:p>
-            <a:pPr indent="0" marL="0">
+            <a:pPr marL="0" indent="0">
               <a:lnSpc>
                 <a:spcPts val="1700"/>
               </a:lnSpc>
               <a:buNone/>
             </a:pPr>
             <a:r>
-              <a:rPr lang="en-US" sz="1300" b="1" spc="-20" kern="0" dirty="0">
+              <a:rPr lang="en-US" sz="1300" b="1" kern="0" spc="-20" dirty="0">
                 <a:solidFill>
                   <a:srgbClr val="000000"/>
                 </a:solidFill>
@@ -5727,14 +5914,14 @@
             <a:endParaRPr lang="en-US" sz="1300" dirty="0"/>
           </a:p>
           <a:p>
-            <a:pPr indent="0" marL="0">
+            <a:pPr marL="0" indent="0">
               <a:lnSpc>
                 <a:spcPts val="1700"/>
               </a:lnSpc>
               <a:buNone/>
             </a:pPr>
             <a:r>
-              <a:rPr lang="en-US" sz="1300" b="1" spc="-20" kern="0" dirty="0">
+              <a:rPr lang="en-US" sz="1300" b="1" kern="0" spc="-20" dirty="0">
                 <a:solidFill>
                   <a:srgbClr val="000000"/>
                 </a:solidFill>
@@ -5769,7 +5956,7 @@
           <a:bodyPr wrap="square" lIns="0" tIns="0" rIns="0" bIns="0" rtlCol="0" anchor="ctr"/>
           <a:lstStyle/>
           <a:p>
-            <a:pPr indent="0" marL="0">
+            <a:pPr marL="0" indent="0">
               <a:lnSpc>
                 <a:spcPts val="1400"/>
               </a:lnSpc>
@@ -5814,6 +6001,13 @@
             <a:prstDash val="solid"/>
           </a:ln>
         </p:spPr>
+        <p:txBody>
+          <a:bodyPr/>
+          <a:lstStyle/>
+          <a:p>
+            <a:endParaRPr lang="en-US"/>
+          </a:p>
+        </p:txBody>
       </p:sp>
       <p:sp>
         <p:nvSpPr>
@@ -5839,6 +6033,13 @@
             <a:prstDash val="solid"/>
           </a:ln>
         </p:spPr>
+        <p:txBody>
+          <a:bodyPr/>
+          <a:lstStyle/>
+          <a:p>
+            <a:endParaRPr lang="en-US"/>
+          </a:p>
+        </p:txBody>
       </p:sp>
       <p:sp>
         <p:nvSpPr>
@@ -5861,11 +6062,11 @@
           <a:bodyPr wrap="square" lIns="0" tIns="0" rIns="0" bIns="0" rtlCol="0" anchor="ctr"/>
           <a:lstStyle/>
           <a:p>
-            <a:pPr algn="ctr" indent="0" marL="0">
-              <a:buNone/>
-            </a:pPr>
-            <a:r>
-              <a:rPr lang="en-US" sz="1100" b="1" spc="100" kern="0" dirty="0">
+            <a:pPr marL="0" indent="0" algn="ctr">
+              <a:buNone/>
+            </a:pPr>
+            <a:r>
+              <a:rPr lang="en-US" sz="1100" b="1" kern="0" spc="100" dirty="0">
                 <a:solidFill>
                   <a:srgbClr val="000000"/>
                 </a:solidFill>
@@ -5903,6 +6104,13 @@
             <a:prstDash val="solid"/>
           </a:ln>
         </p:spPr>
+        <p:txBody>
+          <a:bodyPr/>
+          <a:lstStyle/>
+          <a:p>
+            <a:endParaRPr lang="en-US"/>
+          </a:p>
+        </p:txBody>
       </p:sp>
       <p:sp>
         <p:nvSpPr>
@@ -5928,6 +6136,13 @@
             <a:prstDash val="solid"/>
           </a:ln>
         </p:spPr>
+        <p:txBody>
+          <a:bodyPr/>
+          <a:lstStyle/>
+          <a:p>
+            <a:endParaRPr lang="en-US"/>
+          </a:p>
+        </p:txBody>
       </p:sp>
       <p:sp>
         <p:nvSpPr>
@@ -5953,6 +6168,13 @@
             <a:prstDash val="solid"/>
           </a:ln>
         </p:spPr>
+        <p:txBody>
+          <a:bodyPr/>
+          <a:lstStyle/>
+          <a:p>
+            <a:endParaRPr lang="en-US"/>
+          </a:p>
+        </p:txBody>
       </p:sp>
       <p:sp>
         <p:nvSpPr>
@@ -5975,7 +6197,7 @@
           <a:bodyPr wrap="square" lIns="0" tIns="0" rIns="0" bIns="0" rtlCol="0" anchor="ctr"/>
           <a:lstStyle/>
           <a:p>
-            <a:pPr indent="0" marL="0">
+            <a:pPr marL="0" indent="0">
               <a:buNone/>
             </a:pPr>
             <a:r>
@@ -6014,11 +6236,11 @@
           <a:bodyPr wrap="square" lIns="0" tIns="0" rIns="0" bIns="0" rtlCol="0" anchor="ctr"/>
           <a:lstStyle/>
           <a:p>
-            <a:pPr indent="0" marL="0">
-              <a:buNone/>
-            </a:pPr>
-            <a:r>
-              <a:rPr lang="en-US" sz="1350" b="1" spc="40" kern="0" dirty="0">
+            <a:pPr marL="0" indent="0">
+              <a:buNone/>
+            </a:pPr>
+            <a:r>
+              <a:rPr lang="en-US" sz="1350" b="1" kern="0" spc="40" dirty="0">
                 <a:solidFill>
                   <a:srgbClr val="000000"/>
                 </a:solidFill>
@@ -6053,11 +6275,11 @@
           <a:bodyPr wrap="square" lIns="0" tIns="0" rIns="0" bIns="0" rtlCol="0" anchor="ctr"/>
           <a:lstStyle/>
           <a:p>
-            <a:pPr indent="0" marL="0">
-              <a:buNone/>
-            </a:pPr>
-            <a:r>
-              <a:rPr lang="en-US" sz="850" b="1" spc="120" kern="0" dirty="0">
+            <a:pPr marL="0" indent="0">
+              <a:buNone/>
+            </a:pPr>
+            <a:r>
+              <a:rPr lang="en-US" sz="850" b="1" kern="0" spc="120" dirty="0">
                 <a:solidFill>
                   <a:srgbClr val="6B6B6B"/>
                 </a:solidFill>
@@ -6092,7 +6314,7 @@
           <a:bodyPr wrap="square" lIns="0" tIns="0" rIns="0" bIns="0" rtlCol="0" anchor="ctr"/>
           <a:lstStyle/>
           <a:p>
-            <a:pPr indent="0" marL="0">
+            <a:pPr marL="0" indent="0">
               <a:lnSpc>
                 <a:spcPts val="1700"/>
               </a:lnSpc>
@@ -6112,7 +6334,7 @@
             <a:endParaRPr lang="en-US" sz="1250" dirty="0"/>
           </a:p>
           <a:p>
-            <a:pPr indent="0" marL="0">
+            <a:pPr marL="0" indent="0">
               <a:lnSpc>
                 <a:spcPts val="1700"/>
               </a:lnSpc>
@@ -6154,11 +6376,11 @@
           <a:bodyPr wrap="square" lIns="0" tIns="0" rIns="0" bIns="0" rtlCol="0" anchor="ctr"/>
           <a:lstStyle/>
           <a:p>
-            <a:pPr indent="0" marL="0">
-              <a:buNone/>
-            </a:pPr>
-            <a:r>
-              <a:rPr lang="en-US" sz="850" b="1" spc="120" kern="0" dirty="0">
+            <a:pPr marL="0" indent="0">
+              <a:buNone/>
+            </a:pPr>
+            <a:r>
+              <a:rPr lang="en-US" sz="850" b="1" kern="0" spc="120" dirty="0">
                 <a:solidFill>
                   <a:srgbClr val="6B6B6B"/>
                 </a:solidFill>
@@ -6193,14 +6415,14 @@
           <a:bodyPr wrap="square" lIns="0" tIns="0" rIns="0" bIns="0" rtlCol="0" anchor="ctr"/>
           <a:lstStyle/>
           <a:p>
-            <a:pPr indent="0" marL="0">
+            <a:pPr marL="0" indent="0">
               <a:lnSpc>
                 <a:spcPts val="1700"/>
               </a:lnSpc>
               <a:buNone/>
             </a:pPr>
             <a:r>
-              <a:rPr lang="en-US" sz="1300" b="1" spc="-20" kern="0" dirty="0">
+              <a:rPr lang="en-US" sz="1300" b="1" kern="0" spc="-20" dirty="0">
                 <a:solidFill>
                   <a:srgbClr val="000000"/>
                 </a:solidFill>
@@ -6213,14 +6435,14 @@
             <a:endParaRPr lang="en-US" sz="1300" dirty="0"/>
           </a:p>
           <a:p>
-            <a:pPr indent="0" marL="0">
+            <a:pPr marL="0" indent="0">
               <a:lnSpc>
                 <a:spcPts val="1700"/>
               </a:lnSpc>
               <a:buNone/>
             </a:pPr>
             <a:r>
-              <a:rPr lang="en-US" sz="1300" b="1" spc="-20" kern="0" dirty="0">
+              <a:rPr lang="en-US" sz="1300" b="1" kern="0" spc="-20" dirty="0">
                 <a:solidFill>
                   <a:srgbClr val="000000"/>
                 </a:solidFill>
@@ -6256,6 +6478,13 @@
             <a:prstDash val="solid"/>
           </a:ln>
         </p:spPr>
+        <p:txBody>
+          <a:bodyPr/>
+          <a:lstStyle/>
+          <a:p>
+            <a:endParaRPr lang="en-US"/>
+          </a:p>
+        </p:txBody>
       </p:sp>
       <p:sp>
         <p:nvSpPr>
@@ -6278,11 +6507,11 @@
           <a:bodyPr wrap="square" lIns="0" tIns="0" rIns="0" bIns="0" rtlCol="0" anchor="ctr"/>
           <a:lstStyle/>
           <a:p>
-            <a:pPr indent="0" marL="0">
-              <a:buNone/>
-            </a:pPr>
-            <a:r>
-              <a:rPr lang="en-US" sz="850" b="1" spc="120" kern="0" dirty="0">
+            <a:pPr marL="0" indent="0">
+              <a:buNone/>
+            </a:pPr>
+            <a:r>
+              <a:rPr lang="en-US" sz="850" b="1" kern="0" spc="120" dirty="0">
                 <a:solidFill>
                   <a:srgbClr val="6B6B6B"/>
                 </a:solidFill>
@@ -6317,14 +6546,14 @@
           <a:bodyPr wrap="square" lIns="0" tIns="0" rIns="0" bIns="0" rtlCol="0" anchor="ctr"/>
           <a:lstStyle/>
           <a:p>
-            <a:pPr indent="0" marL="0">
+            <a:pPr marL="0" indent="0">
               <a:lnSpc>
                 <a:spcPts val="1700"/>
               </a:lnSpc>
               <a:buNone/>
             </a:pPr>
             <a:r>
-              <a:rPr lang="en-US" sz="1300" b="1" spc="-20" kern="0" dirty="0">
+              <a:rPr lang="en-US" sz="1300" b="1" kern="0" spc="-20" dirty="0">
                 <a:solidFill>
                   <a:srgbClr val="000000"/>
                 </a:solidFill>
@@ -6337,14 +6566,14 @@
             <a:endParaRPr lang="en-US" sz="1300" dirty="0"/>
           </a:p>
           <a:p>
-            <a:pPr indent="0" marL="0">
+            <a:pPr marL="0" indent="0">
               <a:lnSpc>
                 <a:spcPts val="1700"/>
               </a:lnSpc>
               <a:buNone/>
             </a:pPr>
             <a:r>
-              <a:rPr lang="en-US" sz="1300" b="1" spc="-20" kern="0" dirty="0">
+              <a:rPr lang="en-US" sz="1300" b="1" kern="0" spc="-20" dirty="0">
                 <a:solidFill>
                   <a:srgbClr val="000000"/>
                 </a:solidFill>
@@ -6357,14 +6586,14 @@
             <a:endParaRPr lang="en-US" sz="1300" dirty="0"/>
           </a:p>
           <a:p>
-            <a:pPr indent="0" marL="0">
+            <a:pPr marL="0" indent="0">
               <a:lnSpc>
                 <a:spcPts val="1700"/>
               </a:lnSpc>
               <a:buNone/>
             </a:pPr>
             <a:r>
-              <a:rPr lang="en-US" sz="1300" b="1" spc="-20" kern="0" dirty="0">
+              <a:rPr lang="en-US" sz="1300" b="1" kern="0" spc="-20" dirty="0">
                 <a:solidFill>
                   <a:srgbClr val="000000"/>
                 </a:solidFill>
@@ -6399,7 +6628,7 @@
           <a:bodyPr wrap="square" lIns="0" tIns="0" rIns="0" bIns="0" rtlCol="0" anchor="ctr"/>
           <a:lstStyle/>
           <a:p>
-            <a:pPr indent="0" marL="0">
+            <a:pPr marL="0" indent="0">
               <a:lnSpc>
                 <a:spcPts val="1400"/>
               </a:lnSpc>
@@ -6444,6 +6673,13 @@
             <a:prstDash val="solid"/>
           </a:ln>
         </p:spPr>
+        <p:txBody>
+          <a:bodyPr/>
+          <a:lstStyle/>
+          <a:p>
+            <a:endParaRPr lang="en-US"/>
+          </a:p>
+        </p:txBody>
       </p:sp>
       <p:sp>
         <p:nvSpPr>
@@ -6469,6 +6705,13 @@
             <a:prstDash val="solid"/>
           </a:ln>
         </p:spPr>
+        <p:txBody>
+          <a:bodyPr/>
+          <a:lstStyle/>
+          <a:p>
+            <a:endParaRPr lang="en-US"/>
+          </a:p>
+        </p:txBody>
       </p:sp>
       <p:sp>
         <p:nvSpPr>
@@ -6491,11 +6734,11 @@
           <a:bodyPr wrap="square" lIns="0" tIns="0" rIns="0" bIns="0" rtlCol="0" anchor="ctr"/>
           <a:lstStyle/>
           <a:p>
-            <a:pPr algn="ctr" indent="0" marL="0">
-              <a:buNone/>
-            </a:pPr>
-            <a:r>
-              <a:rPr lang="en-US" sz="1100" b="1" spc="100" kern="0" dirty="0">
+            <a:pPr marL="0" indent="0" algn="ctr">
+              <a:buNone/>
+            </a:pPr>
+            <a:r>
+              <a:rPr lang="en-US" sz="1100" b="1" kern="0" spc="100" dirty="0">
                 <a:solidFill>
                   <a:srgbClr val="000000"/>
                 </a:solidFill>
@@ -6533,6 +6776,13 @@
             <a:prstDash val="solid"/>
           </a:ln>
         </p:spPr>
+        <p:txBody>
+          <a:bodyPr/>
+          <a:lstStyle/>
+          <a:p>
+            <a:endParaRPr lang="en-US"/>
+          </a:p>
+        </p:txBody>
       </p:sp>
       <p:sp>
         <p:nvSpPr>
@@ -6558,6 +6808,13 @@
             <a:prstDash val="solid"/>
           </a:ln>
         </p:spPr>
+        <p:txBody>
+          <a:bodyPr/>
+          <a:lstStyle/>
+          <a:p>
+            <a:endParaRPr lang="en-US"/>
+          </a:p>
+        </p:txBody>
       </p:sp>
       <p:sp>
         <p:nvSpPr>
@@ -6583,6 +6840,13 @@
             <a:prstDash val="solid"/>
           </a:ln>
         </p:spPr>
+        <p:txBody>
+          <a:bodyPr/>
+          <a:lstStyle/>
+          <a:p>
+            <a:endParaRPr lang="en-US"/>
+          </a:p>
+        </p:txBody>
       </p:sp>
       <p:sp>
         <p:nvSpPr>
@@ -6605,7 +6869,7 @@
           <a:bodyPr wrap="square" lIns="0" tIns="0" rIns="0" bIns="0" rtlCol="0" anchor="ctr"/>
           <a:lstStyle/>
           <a:p>
-            <a:pPr indent="0" marL="0">
+            <a:pPr marL="0" indent="0">
               <a:buNone/>
             </a:pPr>
             <a:r>
@@ -6644,11 +6908,11 @@
           <a:bodyPr wrap="square" lIns="0" tIns="0" rIns="0" bIns="0" rtlCol="0" anchor="ctr"/>
           <a:lstStyle/>
           <a:p>
-            <a:pPr indent="0" marL="0">
-              <a:buNone/>
-            </a:pPr>
-            <a:r>
-              <a:rPr lang="en-US" sz="1350" b="1" spc="40" kern="0" dirty="0">
+            <a:pPr marL="0" indent="0">
+              <a:buNone/>
+            </a:pPr>
+            <a:r>
+              <a:rPr lang="en-US" sz="1350" b="1" kern="0" spc="40" dirty="0">
                 <a:solidFill>
                   <a:srgbClr val="000000"/>
                 </a:solidFill>
@@ -6683,11 +6947,11 @@
           <a:bodyPr wrap="square" lIns="0" tIns="0" rIns="0" bIns="0" rtlCol="0" anchor="ctr"/>
           <a:lstStyle/>
           <a:p>
-            <a:pPr indent="0" marL="0">
-              <a:buNone/>
-            </a:pPr>
-            <a:r>
-              <a:rPr lang="en-US" sz="850" b="1" spc="120" kern="0" dirty="0">
+            <a:pPr marL="0" indent="0">
+              <a:buNone/>
+            </a:pPr>
+            <a:r>
+              <a:rPr lang="en-US" sz="850" b="1" kern="0" spc="120" dirty="0">
                 <a:solidFill>
                   <a:srgbClr val="6B6B6B"/>
                 </a:solidFill>
@@ -6722,7 +6986,7 @@
           <a:bodyPr wrap="square" lIns="0" tIns="0" rIns="0" bIns="0" rtlCol="0" anchor="ctr"/>
           <a:lstStyle/>
           <a:p>
-            <a:pPr indent="0" marL="0">
+            <a:pPr marL="0" indent="0">
               <a:lnSpc>
                 <a:spcPts val="1700"/>
               </a:lnSpc>
@@ -6742,7 +7006,7 @@
             <a:endParaRPr lang="en-US" sz="1250" dirty="0"/>
           </a:p>
           <a:p>
-            <a:pPr indent="0" marL="0">
+            <a:pPr marL="0" indent="0">
               <a:lnSpc>
                 <a:spcPts val="1700"/>
               </a:lnSpc>
@@ -6784,11 +7048,11 @@
           <a:bodyPr wrap="square" lIns="0" tIns="0" rIns="0" bIns="0" rtlCol="0" anchor="ctr"/>
           <a:lstStyle/>
           <a:p>
-            <a:pPr indent="0" marL="0">
-              <a:buNone/>
-            </a:pPr>
-            <a:r>
-              <a:rPr lang="en-US" sz="850" b="1" spc="120" kern="0" dirty="0">
+            <a:pPr marL="0" indent="0">
+              <a:buNone/>
+            </a:pPr>
+            <a:r>
+              <a:rPr lang="en-US" sz="850" b="1" kern="0" spc="120" dirty="0">
                 <a:solidFill>
                   <a:srgbClr val="6B6B6B"/>
                 </a:solidFill>
@@ -6823,14 +7087,14 @@
           <a:bodyPr wrap="square" lIns="0" tIns="0" rIns="0" bIns="0" rtlCol="0" anchor="ctr"/>
           <a:lstStyle/>
           <a:p>
-            <a:pPr indent="0" marL="0">
+            <a:pPr marL="0" indent="0">
               <a:lnSpc>
                 <a:spcPts val="1700"/>
               </a:lnSpc>
               <a:buNone/>
             </a:pPr>
             <a:r>
-              <a:rPr lang="en-US" sz="1300" b="1" spc="-20" kern="0" dirty="0">
+              <a:rPr lang="en-US" sz="1300" b="1" kern="0" spc="-20" dirty="0">
                 <a:solidFill>
                   <a:srgbClr val="000000"/>
                 </a:solidFill>
@@ -6843,14 +7107,14 @@
             <a:endParaRPr lang="en-US" sz="1300" dirty="0"/>
           </a:p>
           <a:p>
-            <a:pPr indent="0" marL="0">
+            <a:pPr marL="0" indent="0">
               <a:lnSpc>
                 <a:spcPts val="1700"/>
               </a:lnSpc>
               <a:buNone/>
             </a:pPr>
             <a:r>
-              <a:rPr lang="en-US" sz="1300" b="1" spc="-20" kern="0" dirty="0">
+              <a:rPr lang="en-US" sz="1300" b="1" kern="0" spc="-20" dirty="0">
                 <a:solidFill>
                   <a:srgbClr val="000000"/>
                 </a:solidFill>
@@ -6886,6 +7150,13 @@
             <a:prstDash val="solid"/>
           </a:ln>
         </p:spPr>
+        <p:txBody>
+          <a:bodyPr/>
+          <a:lstStyle/>
+          <a:p>
+            <a:endParaRPr lang="en-US"/>
+          </a:p>
+        </p:txBody>
       </p:sp>
       <p:sp>
         <p:nvSpPr>
@@ -6908,11 +7179,11 @@
           <a:bodyPr wrap="square" lIns="0" tIns="0" rIns="0" bIns="0" rtlCol="0" anchor="ctr"/>
           <a:lstStyle/>
           <a:p>
-            <a:pPr indent="0" marL="0">
-              <a:buNone/>
-            </a:pPr>
-            <a:r>
-              <a:rPr lang="en-US" sz="850" b="1" spc="120" kern="0" dirty="0">
+            <a:pPr marL="0" indent="0">
+              <a:buNone/>
+            </a:pPr>
+            <a:r>
+              <a:rPr lang="en-US" sz="850" b="1" kern="0" spc="120" dirty="0">
                 <a:solidFill>
                   <a:srgbClr val="6B6B6B"/>
                 </a:solidFill>
@@ -6947,14 +7218,14 @@
           <a:bodyPr wrap="square" lIns="0" tIns="0" rIns="0" bIns="0" rtlCol="0" anchor="ctr"/>
           <a:lstStyle/>
           <a:p>
-            <a:pPr indent="0" marL="0">
+            <a:pPr marL="0" indent="0">
               <a:lnSpc>
                 <a:spcPts val="1700"/>
               </a:lnSpc>
               <a:buNone/>
             </a:pPr>
             <a:r>
-              <a:rPr lang="en-US" sz="1300" b="1" spc="-20" kern="0" dirty="0">
+              <a:rPr lang="en-US" sz="1300" b="1" kern="0" spc="-20" dirty="0">
                 <a:solidFill>
                   <a:srgbClr val="000000"/>
                 </a:solidFill>
@@ -6967,14 +7238,14 @@
             <a:endParaRPr lang="en-US" sz="1300" dirty="0"/>
           </a:p>
           <a:p>
-            <a:pPr indent="0" marL="0">
+            <a:pPr marL="0" indent="0">
               <a:lnSpc>
                 <a:spcPts val="1700"/>
               </a:lnSpc>
               <a:buNone/>
             </a:pPr>
             <a:r>
-              <a:rPr lang="en-US" sz="1300" b="1" spc="-20" kern="0" dirty="0">
+              <a:rPr lang="en-US" sz="1300" b="1" kern="0" spc="-20" dirty="0">
                 <a:solidFill>
                   <a:srgbClr val="000000"/>
                 </a:solidFill>
@@ -7009,7 +7280,7 @@
           <a:bodyPr wrap="square" lIns="0" tIns="0" rIns="0" bIns="0" rtlCol="0" anchor="ctr"/>
           <a:lstStyle/>
           <a:p>
-            <a:pPr indent="0" marL="0">
+            <a:pPr marL="0" indent="0">
               <a:lnSpc>
                 <a:spcPts val="1400"/>
               </a:lnSpc>
@@ -7054,6 +7325,13 @@
             <a:prstDash val="solid"/>
           </a:ln>
         </p:spPr>
+        <p:txBody>
+          <a:bodyPr/>
+          <a:lstStyle/>
+          <a:p>
+            <a:endParaRPr lang="en-US"/>
+          </a:p>
+        </p:txBody>
       </p:sp>
       <p:sp>
         <p:nvSpPr>
@@ -7079,6 +7357,13 @@
             <a:prstDash val="solid"/>
           </a:ln>
         </p:spPr>
+        <p:txBody>
+          <a:bodyPr/>
+          <a:lstStyle/>
+          <a:p>
+            <a:endParaRPr lang="en-US"/>
+          </a:p>
+        </p:txBody>
       </p:sp>
       <p:sp>
         <p:nvSpPr>
@@ -7101,11 +7386,11 @@
           <a:bodyPr wrap="square" lIns="0" tIns="0" rIns="0" bIns="0" rtlCol="0" anchor="ctr"/>
           <a:lstStyle/>
           <a:p>
-            <a:pPr algn="ctr" indent="0" marL="0">
-              <a:buNone/>
-            </a:pPr>
-            <a:r>
-              <a:rPr lang="en-US" sz="1100" b="1" spc="100" kern="0" dirty="0">
+            <a:pPr marL="0" indent="0" algn="ctr">
+              <a:buNone/>
+            </a:pPr>
+            <a:r>
+              <a:rPr lang="en-US" sz="1100" b="1" kern="0" spc="100" dirty="0">
                 <a:solidFill>
                   <a:srgbClr val="000000"/>
                 </a:solidFill>
@@ -7135,6 +7420,7 @@
         <a:solidFill>
           <a:srgbClr val="000000"/>
         </a:solidFill>
+        <a:effectLst/>
       </p:bgPr>
     </p:bg>
     <p:spTree>
@@ -7173,6 +7459,13 @@
             <a:prstDash val="solid"/>
           </a:ln>
         </p:spPr>
+        <p:txBody>
+          <a:bodyPr/>
+          <a:lstStyle/>
+          <a:p>
+            <a:endParaRPr lang="en-US"/>
+          </a:p>
+        </p:txBody>
       </p:sp>
       <p:sp>
         <p:nvSpPr>
@@ -7195,11 +7488,11 @@
           <a:bodyPr wrap="square" lIns="0" tIns="0" rIns="0" bIns="0" rtlCol="0" anchor="ctr"/>
           <a:lstStyle/>
           <a:p>
-            <a:pPr indent="0" marL="0">
-              <a:buNone/>
-            </a:pPr>
-            <a:r>
-              <a:rPr lang="en-US" sz="3300" b="1" spc="-60" kern="0" dirty="0">
+            <a:pPr marL="0" indent="0">
+              <a:buNone/>
+            </a:pPr>
+            <a:r>
+              <a:rPr lang="en-US" sz="3300" b="1" kern="0" spc="-60" dirty="0">
                 <a:solidFill>
                   <a:srgbClr val="FFFDF7"/>
                 </a:solidFill>
@@ -7234,7 +7527,7 @@
           <a:bodyPr wrap="square" lIns="0" tIns="0" rIns="0" bIns="0" rtlCol="0" anchor="ctr"/>
           <a:lstStyle/>
           <a:p>
-            <a:pPr indent="0" marL="0">
+            <a:pPr marL="0" indent="0">
               <a:buNone/>
             </a:pPr>
             <a:r>
@@ -7276,6 +7569,13 @@
             <a:prstDash val="solid"/>
           </a:ln>
         </p:spPr>
+        <p:txBody>
+          <a:bodyPr/>
+          <a:lstStyle/>
+          <a:p>
+            <a:endParaRPr lang="en-US"/>
+          </a:p>
+        </p:txBody>
       </p:sp>
       <p:sp>
         <p:nvSpPr>
@@ -7301,6 +7601,13 @@
             <a:prstDash val="solid"/>
           </a:ln>
         </p:spPr>
+        <p:txBody>
+          <a:bodyPr/>
+          <a:lstStyle/>
+          <a:p>
+            <a:endParaRPr lang="en-US"/>
+          </a:p>
+        </p:txBody>
       </p:sp>
       <p:sp>
         <p:nvSpPr>
@@ -7324,6 +7631,13 @@
             <a:prstDash val="solid"/>
           </a:ln>
         </p:spPr>
+        <p:txBody>
+          <a:bodyPr/>
+          <a:lstStyle/>
+          <a:p>
+            <a:endParaRPr lang="en-US"/>
+          </a:p>
+        </p:txBody>
       </p:sp>
       <p:sp>
         <p:nvSpPr>
@@ -7334,7 +7648,7 @@
         <p:spPr>
           <a:xfrm>
             <a:off x="594360" y="4343400"/>
-            <a:ext cx="5029200" cy="-2514600"/>
+            <a:ext cx="5029200" cy="0"/>
           </a:xfrm>
           <a:prstGeom prst="line">
             <a:avLst/>
@@ -7347,6 +7661,13 @@
             <a:prstDash val="solid"/>
           </a:ln>
         </p:spPr>
+        <p:txBody>
+          <a:bodyPr/>
+          <a:lstStyle/>
+          <a:p>
+            <a:endParaRPr lang="en-US"/>
+          </a:p>
+        </p:txBody>
       </p:sp>
       <p:sp>
         <p:nvSpPr>
@@ -7372,6 +7693,13 @@
             <a:prstDash val="solid"/>
           </a:ln>
         </p:spPr>
+        <p:txBody>
+          <a:bodyPr/>
+          <a:lstStyle/>
+          <a:p>
+            <a:endParaRPr lang="en-US"/>
+          </a:p>
+        </p:txBody>
       </p:sp>
       <p:sp>
         <p:nvSpPr>
@@ -7394,11 +7722,11 @@
           <a:bodyPr wrap="square" lIns="0" tIns="0" rIns="0" bIns="0" rtlCol="0" anchor="ctr"/>
           <a:lstStyle/>
           <a:p>
-            <a:pPr algn="ctr" indent="0" marL="0">
-              <a:buNone/>
-            </a:pPr>
-            <a:r>
-              <a:rPr lang="en-US" sz="1000" b="1" spc="80" kern="0" dirty="0">
+            <a:pPr marL="0" indent="0" algn="ctr">
+              <a:buNone/>
+            </a:pPr>
+            <a:r>
+              <a:rPr lang="en-US" sz="1000" b="1" kern="0" spc="80" dirty="0">
                 <a:solidFill>
                   <a:srgbClr val="000000"/>
                 </a:solidFill>
@@ -7433,7 +7761,7 @@
           <a:bodyPr wrap="square" lIns="0" tIns="0" rIns="0" bIns="0" rtlCol="0" anchor="ctr"/>
           <a:lstStyle/>
           <a:p>
-            <a:pPr indent="0" marL="0">
+            <a:pPr marL="0" indent="0">
               <a:buNone/>
             </a:pPr>
             <a:r>
@@ -7475,6 +7803,13 @@
             <a:prstDash val="solid"/>
           </a:ln>
         </p:spPr>
+        <p:txBody>
+          <a:bodyPr/>
+          <a:lstStyle/>
+          <a:p>
+            <a:endParaRPr lang="en-US"/>
+          </a:p>
+        </p:txBody>
       </p:sp>
       <p:sp>
         <p:nvSpPr>
@@ -7500,6 +7835,13 @@
             <a:prstDash val="solid"/>
           </a:ln>
         </p:spPr>
+        <p:txBody>
+          <a:bodyPr/>
+          <a:lstStyle/>
+          <a:p>
+            <a:endParaRPr lang="en-US"/>
+          </a:p>
+        </p:txBody>
       </p:sp>
       <p:sp>
         <p:nvSpPr>
@@ -7522,7 +7864,7 @@
           <a:bodyPr wrap="square" lIns="0" tIns="0" rIns="0" bIns="0" rtlCol="0" anchor="ctr"/>
           <a:lstStyle/>
           <a:p>
-            <a:pPr indent="0" marL="0">
+            <a:pPr marL="0" indent="0">
               <a:lnSpc>
                 <a:spcPts val="1900"/>
               </a:lnSpc>
@@ -7567,6 +7909,13 @@
             <a:prstDash val="solid"/>
           </a:ln>
         </p:spPr>
+        <p:txBody>
+          <a:bodyPr/>
+          <a:lstStyle/>
+          <a:p>
+            <a:endParaRPr lang="en-US"/>
+          </a:p>
+        </p:txBody>
       </p:sp>
       <p:sp>
         <p:nvSpPr>
@@ -7592,6 +7941,13 @@
             <a:prstDash val="solid"/>
           </a:ln>
         </p:spPr>
+        <p:txBody>
+          <a:bodyPr/>
+          <a:lstStyle/>
+          <a:p>
+            <a:endParaRPr lang="en-US"/>
+          </a:p>
+        </p:txBody>
       </p:sp>
       <p:sp>
         <p:nvSpPr>
@@ -7617,6 +7973,13 @@
             <a:prstDash val="solid"/>
           </a:ln>
         </p:spPr>
+        <p:txBody>
+          <a:bodyPr/>
+          <a:lstStyle/>
+          <a:p>
+            <a:endParaRPr lang="en-US"/>
+          </a:p>
+        </p:txBody>
       </p:sp>
       <p:sp>
         <p:nvSpPr>
@@ -7639,11 +8002,11 @@
           <a:bodyPr wrap="square" lIns="0" tIns="0" rIns="0" bIns="0" rtlCol="0" anchor="ctr"/>
           <a:lstStyle/>
           <a:p>
-            <a:pPr indent="0" marL="0">
-              <a:buNone/>
-            </a:pPr>
-            <a:r>
-              <a:rPr lang="en-US" sz="1100" b="1" spc="120" kern="0" dirty="0">
+            <a:pPr marL="0" indent="0">
+              <a:buNone/>
+            </a:pPr>
+            <a:r>
+              <a:rPr lang="en-US" sz="1100" b="1" kern="0" spc="120" dirty="0">
                 <a:solidFill>
                   <a:srgbClr val="000000"/>
                 </a:solidFill>
@@ -7678,7 +8041,7 @@
           <a:bodyPr wrap="square" lIns="0" tIns="0" rIns="0" bIns="0" rtlCol="0" anchor="ctr"/>
           <a:lstStyle/>
           <a:p>
-            <a:pPr indent="0" marL="0">
+            <a:pPr marL="0" indent="0">
               <a:lnSpc>
                 <a:spcPts val="2000"/>
               </a:lnSpc>
@@ -7698,7 +8061,7 @@
             <a:endParaRPr lang="en-US" sz="1250" dirty="0"/>
           </a:p>
           <a:p>
-            <a:pPr indent="0" marL="0">
+            <a:pPr marL="0" indent="0">
               <a:lnSpc>
                 <a:spcPts val="2000"/>
               </a:lnSpc>
@@ -7718,7 +8081,7 @@
             <a:endParaRPr lang="en-US" sz="1250" dirty="0"/>
           </a:p>
           <a:p>
-            <a:pPr indent="0" marL="0">
+            <a:pPr marL="0" indent="0">
               <a:lnSpc>
                 <a:spcPts val="2000"/>
               </a:lnSpc>
@@ -7738,7 +8101,7 @@
             <a:endParaRPr lang="en-US" sz="1250" dirty="0"/>
           </a:p>
           <a:p>
-            <a:pPr indent="0" marL="0">
+            <a:pPr marL="0" indent="0">
               <a:lnSpc>
                 <a:spcPts val="2000"/>
               </a:lnSpc>
@@ -7758,7 +8121,7 @@
             <a:endParaRPr lang="en-US" sz="1250" dirty="0"/>
           </a:p>
           <a:p>
-            <a:pPr indent="0" marL="0">
+            <a:pPr marL="0" indent="0">
               <a:lnSpc>
                 <a:spcPts val="2000"/>
               </a:lnSpc>
@@ -7803,6 +8166,13 @@
             <a:prstDash val="solid"/>
           </a:ln>
         </p:spPr>
+        <p:txBody>
+          <a:bodyPr/>
+          <a:lstStyle/>
+          <a:p>
+            <a:endParaRPr lang="en-US"/>
+          </a:p>
+        </p:txBody>
       </p:sp>
       <p:sp>
         <p:nvSpPr>
@@ -7828,6 +8198,13 @@
             <a:prstDash val="solid"/>
           </a:ln>
         </p:spPr>
+        <p:txBody>
+          <a:bodyPr/>
+          <a:lstStyle/>
+          <a:p>
+            <a:endParaRPr lang="en-US"/>
+          </a:p>
+        </p:txBody>
       </p:sp>
       <p:sp>
         <p:nvSpPr>
@@ -7853,6 +8230,13 @@
             <a:prstDash val="solid"/>
           </a:ln>
         </p:spPr>
+        <p:txBody>
+          <a:bodyPr/>
+          <a:lstStyle/>
+          <a:p>
+            <a:endParaRPr lang="en-US"/>
+          </a:p>
+        </p:txBody>
       </p:sp>
       <p:sp>
         <p:nvSpPr>
@@ -7878,6 +8262,13 @@
             <a:prstDash val="solid"/>
           </a:ln>
         </p:spPr>
+        <p:txBody>
+          <a:bodyPr/>
+          <a:lstStyle/>
+          <a:p>
+            <a:endParaRPr lang="en-US"/>
+          </a:p>
+        </p:txBody>
       </p:sp>
       <p:sp>
         <p:nvSpPr>
@@ -7903,6 +8294,13 @@
             <a:prstDash val="solid"/>
           </a:ln>
         </p:spPr>
+        <p:txBody>
+          <a:bodyPr/>
+          <a:lstStyle/>
+          <a:p>
+            <a:endParaRPr lang="en-US"/>
+          </a:p>
+        </p:txBody>
       </p:sp>
       <p:sp>
         <p:nvSpPr>
@@ -7928,6 +8326,13 @@
             <a:prstDash val="solid"/>
           </a:ln>
         </p:spPr>
+        <p:txBody>
+          <a:bodyPr/>
+          <a:lstStyle/>
+          <a:p>
+            <a:endParaRPr lang="en-US"/>
+          </a:p>
+        </p:txBody>
       </p:sp>
       <p:sp>
         <p:nvSpPr>
@@ -7953,6 +8358,13 @@
             <a:prstDash val="solid"/>
           </a:ln>
         </p:spPr>
+        <p:txBody>
+          <a:bodyPr/>
+          <a:lstStyle/>
+          <a:p>
+            <a:endParaRPr lang="en-US"/>
+          </a:p>
+        </p:txBody>
       </p:sp>
       <p:sp>
         <p:nvSpPr>
@@ -7978,6 +8390,13 @@
             <a:prstDash val="solid"/>
           </a:ln>
         </p:spPr>
+        <p:txBody>
+          <a:bodyPr/>
+          <a:lstStyle/>
+          <a:p>
+            <a:endParaRPr lang="en-US"/>
+          </a:p>
+        </p:txBody>
       </p:sp>
       <p:sp>
         <p:nvSpPr>
@@ -8003,6 +8422,13 @@
             <a:prstDash val="solid"/>
           </a:ln>
         </p:spPr>
+        <p:txBody>
+          <a:bodyPr/>
+          <a:lstStyle/>
+          <a:p>
+            <a:endParaRPr lang="en-US"/>
+          </a:p>
+        </p:txBody>
       </p:sp>
       <p:sp>
         <p:nvSpPr>
@@ -8028,6 +8454,13 @@
             <a:prstDash val="solid"/>
           </a:ln>
         </p:spPr>
+        <p:txBody>
+          <a:bodyPr/>
+          <a:lstStyle/>
+          <a:p>
+            <a:endParaRPr lang="en-US"/>
+          </a:p>
+        </p:txBody>
       </p:sp>
       <p:sp>
         <p:nvSpPr>
@@ -8053,6 +8486,13 @@
             <a:prstDash val="solid"/>
           </a:ln>
         </p:spPr>
+        <p:txBody>
+          <a:bodyPr/>
+          <a:lstStyle/>
+          <a:p>
+            <a:endParaRPr lang="en-US"/>
+          </a:p>
+        </p:txBody>
       </p:sp>
       <p:sp>
         <p:nvSpPr>
@@ -8078,6 +8518,13 @@
             <a:prstDash val="solid"/>
           </a:ln>
         </p:spPr>
+        <p:txBody>
+          <a:bodyPr/>
+          <a:lstStyle/>
+          <a:p>
+            <a:endParaRPr lang="en-US"/>
+          </a:p>
+        </p:txBody>
       </p:sp>
       <p:sp>
         <p:nvSpPr>
@@ -8103,6 +8550,13 @@
             <a:prstDash val="solid"/>
           </a:ln>
         </p:spPr>
+        <p:txBody>
+          <a:bodyPr/>
+          <a:lstStyle/>
+          <a:p>
+            <a:endParaRPr lang="en-US"/>
+          </a:p>
+        </p:txBody>
       </p:sp>
       <p:sp>
         <p:nvSpPr>
@@ -8128,6 +8582,13 @@
             <a:prstDash val="solid"/>
           </a:ln>
         </p:spPr>
+        <p:txBody>
+          <a:bodyPr/>
+          <a:lstStyle/>
+          <a:p>
+            <a:endParaRPr lang="en-US"/>
+          </a:p>
+        </p:txBody>
       </p:sp>
       <p:sp>
         <p:nvSpPr>
@@ -8153,6 +8614,13 @@
             <a:prstDash val="solid"/>
           </a:ln>
         </p:spPr>
+        <p:txBody>
+          <a:bodyPr/>
+          <a:lstStyle/>
+          <a:p>
+            <a:endParaRPr lang="en-US"/>
+          </a:p>
+        </p:txBody>
       </p:sp>
       <p:sp>
         <p:nvSpPr>
@@ -8175,11 +8643,11 @@
           <a:bodyPr wrap="square" lIns="0" tIns="0" rIns="0" bIns="0" rtlCol="0" anchor="ctr"/>
           <a:lstStyle/>
           <a:p>
-            <a:pPr algn="ctr" indent="0" marL="0">
-              <a:buNone/>
-            </a:pPr>
-            <a:r>
-              <a:rPr lang="en-US" sz="900" b="1" spc="50" kern="0" dirty="0">
+            <a:pPr marL="0" indent="0" algn="ctr">
+              <a:buNone/>
+            </a:pPr>
+            <a:r>
+              <a:rPr lang="en-US" sz="900" b="1" kern="0" spc="50" dirty="0">
                 <a:solidFill>
                   <a:srgbClr val="000000"/>
                 </a:solidFill>
@@ -8217,6 +8685,13 @@
             <a:prstDash val="solid"/>
           </a:ln>
         </p:spPr>
+        <p:txBody>
+          <a:bodyPr/>
+          <a:lstStyle/>
+          <a:p>
+            <a:endParaRPr lang="en-US"/>
+          </a:p>
+        </p:txBody>
       </p:sp>
       <p:sp>
         <p:nvSpPr>
@@ -8240,6 +8715,13 @@
             <a:prstDash val="solid"/>
           </a:ln>
         </p:spPr>
+        <p:txBody>
+          <a:bodyPr/>
+          <a:lstStyle/>
+          <a:p>
+            <a:endParaRPr lang="en-US"/>
+          </a:p>
+        </p:txBody>
       </p:sp>
       <p:sp>
         <p:nvSpPr>
@@ -8250,7 +8732,7 @@
         <p:spPr>
           <a:xfrm>
             <a:off x="9497690" y="4307556"/>
-            <a:ext cx="465247" cy="-114666"/>
+            <a:ext cx="465247" cy="0"/>
           </a:xfrm>
           <a:prstGeom prst="line">
             <a:avLst/>
@@ -8263,6 +8745,13 @@
             <a:prstDash val="solid"/>
           </a:ln>
         </p:spPr>
+        <p:txBody>
+          <a:bodyPr/>
+          <a:lstStyle/>
+          <a:p>
+            <a:endParaRPr lang="en-US"/>
+          </a:p>
+        </p:txBody>
       </p:sp>
       <p:sp>
         <p:nvSpPr>
@@ -8273,7 +8762,7 @@
         <p:spPr>
           <a:xfrm>
             <a:off x="9962937" y="4192890"/>
-            <a:ext cx="-465247" cy="114666"/>
+            <a:ext cx="0" cy="114666"/>
           </a:xfrm>
           <a:prstGeom prst="line">
             <a:avLst/>
@@ -8286,6 +8775,13 @@
             <a:prstDash val="solid"/>
           </a:ln>
         </p:spPr>
+        <p:txBody>
+          <a:bodyPr/>
+          <a:lstStyle/>
+          <a:p>
+            <a:endParaRPr lang="en-US"/>
+          </a:p>
+        </p:txBody>
       </p:sp>
       <p:sp>
         <p:nvSpPr>
@@ -8309,6 +8805,13 @@
             <a:prstDash val="solid"/>
           </a:ln>
         </p:spPr>
+        <p:txBody>
+          <a:bodyPr/>
+          <a:lstStyle/>
+          <a:p>
+            <a:endParaRPr lang="en-US"/>
+          </a:p>
+        </p:txBody>
       </p:sp>
       <p:sp>
         <p:nvSpPr>
@@ -8319,7 +8822,7 @@
         <p:spPr>
           <a:xfrm>
             <a:off x="10447569" y="4328404"/>
-            <a:ext cx="-271394" cy="177211"/>
+            <a:ext cx="0" cy="177211"/>
           </a:xfrm>
           <a:prstGeom prst="line">
             <a:avLst/>
@@ -8332,6 +8835,13 @@
             <a:prstDash val="solid"/>
           </a:ln>
         </p:spPr>
+        <p:txBody>
+          <a:bodyPr/>
+          <a:lstStyle/>
+          <a:p>
+            <a:endParaRPr lang="en-US"/>
+          </a:p>
+        </p:txBody>
       </p:sp>
       <p:sp>
         <p:nvSpPr>
@@ -8342,7 +8852,7 @@
         <p:spPr>
           <a:xfrm>
             <a:off x="10447569" y="4328404"/>
-            <a:ext cx="445861" cy="-93817"/>
+            <a:ext cx="445861" cy="0"/>
           </a:xfrm>
           <a:prstGeom prst="line">
             <a:avLst/>
@@ -8355,6 +8865,13 @@
             <a:prstDash val="solid"/>
           </a:ln>
         </p:spPr>
+        <p:txBody>
+          <a:bodyPr/>
+          <a:lstStyle/>
+          <a:p>
+            <a:endParaRPr lang="en-US"/>
+          </a:p>
+        </p:txBody>
       </p:sp>
       <p:sp>
         <p:nvSpPr>
@@ -8365,7 +8882,7 @@
         <p:spPr>
           <a:xfrm>
             <a:off x="10893430" y="4234586"/>
-            <a:ext cx="-445861" cy="93817"/>
+            <a:ext cx="0" cy="93817"/>
           </a:xfrm>
           <a:prstGeom prst="line">
             <a:avLst/>
@@ -8378,6 +8895,13 @@
             <a:prstDash val="solid"/>
           </a:ln>
         </p:spPr>
+        <p:txBody>
+          <a:bodyPr/>
+          <a:lstStyle/>
+          <a:p>
+            <a:endParaRPr lang="en-US"/>
+          </a:p>
+        </p:txBody>
       </p:sp>
       <p:sp>
         <p:nvSpPr>
@@ -8401,6 +8925,13 @@
             <a:prstDash val="solid"/>
           </a:ln>
         </p:spPr>
+        <p:txBody>
+          <a:bodyPr/>
+          <a:lstStyle/>
+          <a:p>
+            <a:endParaRPr lang="en-US"/>
+          </a:p>
+        </p:txBody>
       </p:sp>
       <p:sp>
         <p:nvSpPr>
@@ -8424,6 +8955,13 @@
             <a:prstDash val="solid"/>
           </a:ln>
         </p:spPr>
+        <p:txBody>
+          <a:bodyPr/>
+          <a:lstStyle/>
+          <a:p>
+            <a:endParaRPr lang="en-US"/>
+          </a:p>
+        </p:txBody>
       </p:sp>
       <p:sp>
         <p:nvSpPr>
@@ -8434,7 +8972,7 @@
         <p:spPr>
           <a:xfrm>
             <a:off x="9652772" y="4568160"/>
-            <a:ext cx="-155082" cy="-260604"/>
+            <a:ext cx="0" cy="0"/>
           </a:xfrm>
           <a:prstGeom prst="line">
             <a:avLst/>
@@ -8447,6 +8985,13 @@
             <a:prstDash val="solid"/>
           </a:ln>
         </p:spPr>
+        <p:txBody>
+          <a:bodyPr/>
+          <a:lstStyle/>
+          <a:p>
+            <a:endParaRPr lang="en-US"/>
+          </a:p>
+        </p:txBody>
       </p:sp>
       <p:sp>
         <p:nvSpPr>
@@ -8457,7 +9002,7 @@
         <p:spPr>
           <a:xfrm>
             <a:off x="10176175" y="4505615"/>
-            <a:ext cx="271394" cy="-177211"/>
+            <a:ext cx="271394" cy="0"/>
           </a:xfrm>
           <a:prstGeom prst="line">
             <a:avLst/>
@@ -8470,6 +9015,13 @@
             <a:prstDash val="solid"/>
           </a:ln>
         </p:spPr>
+        <p:txBody>
+          <a:bodyPr/>
+          <a:lstStyle/>
+          <a:p>
+            <a:endParaRPr lang="en-US"/>
+          </a:p>
+        </p:txBody>
       </p:sp>
       <p:sp>
         <p:nvSpPr>
@@ -8480,7 +9032,7 @@
         <p:spPr>
           <a:xfrm>
             <a:off x="10176175" y="4505615"/>
-            <a:ext cx="-523403" cy="62545"/>
+            <a:ext cx="0" cy="62545"/>
           </a:xfrm>
           <a:prstGeom prst="line">
             <a:avLst/>
@@ -8493,6 +9045,13 @@
             <a:prstDash val="solid"/>
           </a:ln>
         </p:spPr>
+        <p:txBody>
+          <a:bodyPr/>
+          <a:lstStyle/>
+          <a:p>
+            <a:endParaRPr lang="en-US"/>
+          </a:p>
+        </p:txBody>
       </p:sp>
       <p:sp>
         <p:nvSpPr>
@@ -8516,6 +9075,13 @@
             <a:prstDash val="solid"/>
           </a:ln>
         </p:spPr>
+        <p:txBody>
+          <a:bodyPr/>
+          <a:lstStyle/>
+          <a:p>
+            <a:endParaRPr lang="en-US"/>
+          </a:p>
+        </p:txBody>
       </p:sp>
       <p:sp>
         <p:nvSpPr>
@@ -8526,7 +9092,7 @@
         <p:spPr>
           <a:xfrm>
             <a:off x="10680192" y="4620280"/>
-            <a:ext cx="348935" cy="-104242"/>
+            <a:ext cx="348935" cy="0"/>
           </a:xfrm>
           <a:prstGeom prst="line">
             <a:avLst/>
@@ -8539,6 +9105,13 @@
             <a:prstDash val="solid"/>
           </a:ln>
         </p:spPr>
+        <p:txBody>
+          <a:bodyPr/>
+          <a:lstStyle/>
+          <a:p>
+            <a:endParaRPr lang="en-US"/>
+          </a:p>
+        </p:txBody>
       </p:sp>
       <p:sp>
         <p:nvSpPr>
@@ -8549,7 +9122,7 @@
         <p:spPr>
           <a:xfrm>
             <a:off x="11029127" y="4516039"/>
-            <a:ext cx="-348935" cy="104242"/>
+            <a:ext cx="0" cy="104242"/>
           </a:xfrm>
           <a:prstGeom prst="line">
             <a:avLst/>
@@ -8562,6 +9135,13 @@
             <a:prstDash val="solid"/>
           </a:ln>
         </p:spPr>
+        <p:txBody>
+          <a:bodyPr/>
+          <a:lstStyle/>
+          <a:p>
+            <a:endParaRPr lang="en-US"/>
+          </a:p>
+        </p:txBody>
       </p:sp>
       <p:sp>
         <p:nvSpPr>
@@ -8572,7 +9152,7 @@
         <p:spPr>
           <a:xfrm>
             <a:off x="11029127" y="4516039"/>
-            <a:ext cx="-135697" cy="-281452"/>
+            <a:ext cx="0" cy="0"/>
           </a:xfrm>
           <a:prstGeom prst="line">
             <a:avLst/>
@@ -8585,6 +9165,13 @@
             <a:prstDash val="solid"/>
           </a:ln>
         </p:spPr>
+        <p:txBody>
+          <a:bodyPr/>
+          <a:lstStyle/>
+          <a:p>
+            <a:endParaRPr lang="en-US"/>
+          </a:p>
+        </p:txBody>
       </p:sp>
       <p:sp>
         <p:nvSpPr>
@@ -8608,6 +9195,13 @@
             <a:prstDash val="solid"/>
           </a:ln>
         </p:spPr>
+        <p:txBody>
+          <a:bodyPr/>
+          <a:lstStyle/>
+          <a:p>
+            <a:endParaRPr lang="en-US"/>
+          </a:p>
+        </p:txBody>
       </p:sp>
       <p:sp>
         <p:nvSpPr>
@@ -8618,7 +9212,7 @@
         <p:spPr>
           <a:xfrm>
             <a:off x="9439534" y="4849612"/>
-            <a:ext cx="445861" cy="-62545"/>
+            <a:ext cx="445861" cy="0"/>
           </a:xfrm>
           <a:prstGeom prst="line">
             <a:avLst/>
@@ -8631,6 +9225,13 @@
             <a:prstDash val="solid"/>
           </a:ln>
         </p:spPr>
+        <p:txBody>
+          <a:bodyPr/>
+          <a:lstStyle/>
+          <a:p>
+            <a:endParaRPr lang="en-US"/>
+          </a:p>
+        </p:txBody>
       </p:sp>
       <p:sp>
         <p:nvSpPr>
@@ -8641,7 +9242,7 @@
         <p:spPr>
           <a:xfrm>
             <a:off x="9885396" y="4787067"/>
-            <a:ext cx="-116312" cy="229332"/>
+            <a:ext cx="0" cy="229332"/>
           </a:xfrm>
           <a:prstGeom prst="line">
             <a:avLst/>
@@ -8654,6 +9255,13 @@
             <a:prstDash val="solid"/>
           </a:ln>
         </p:spPr>
+        <p:txBody>
+          <a:bodyPr/>
+          <a:lstStyle/>
+          <a:p>
+            <a:endParaRPr lang="en-US"/>
+          </a:p>
+        </p:txBody>
       </p:sp>
       <p:sp>
         <p:nvSpPr>
@@ -8664,7 +9272,7 @@
         <p:spPr>
           <a:xfrm>
             <a:off x="9885396" y="4787067"/>
-            <a:ext cx="-445861" cy="62545"/>
+            <a:ext cx="0" cy="62545"/>
           </a:xfrm>
           <a:prstGeom prst="line">
             <a:avLst/>
@@ -8677,6 +9285,13 @@
             <a:prstDash val="solid"/>
           </a:ln>
         </p:spPr>
+        <p:txBody>
+          <a:bodyPr/>
+          <a:lstStyle/>
+          <a:p>
+            <a:endParaRPr lang="en-US"/>
+          </a:p>
+        </p:txBody>
       </p:sp>
       <p:sp>
         <p:nvSpPr>
@@ -8700,6 +9315,13 @@
             <a:prstDash val="solid"/>
           </a:ln>
         </p:spPr>
+        <p:txBody>
+          <a:bodyPr/>
+          <a:lstStyle/>
+          <a:p>
+            <a:endParaRPr lang="en-US"/>
+          </a:p>
+        </p:txBody>
       </p:sp>
       <p:sp>
         <p:nvSpPr>
@@ -8710,7 +9332,7 @@
         <p:spPr>
           <a:xfrm>
             <a:off x="10350642" y="4901733"/>
-            <a:ext cx="426476" cy="-83393"/>
+            <a:ext cx="426476" cy="0"/>
           </a:xfrm>
           <a:prstGeom prst="line">
             <a:avLst/>
@@ -8723,6 +9345,13 @@
             <a:prstDash val="solid"/>
           </a:ln>
         </p:spPr>
+        <p:txBody>
+          <a:bodyPr/>
+          <a:lstStyle/>
+          <a:p>
+            <a:endParaRPr lang="en-US"/>
+          </a:p>
+        </p:txBody>
       </p:sp>
       <p:sp>
         <p:nvSpPr>
@@ -8733,7 +9362,7 @@
         <p:spPr>
           <a:xfrm>
             <a:off x="10777118" y="4818339"/>
-            <a:ext cx="-96926" cy="-198059"/>
+            <a:ext cx="0" cy="0"/>
           </a:xfrm>
           <a:prstGeom prst="line">
             <a:avLst/>
@@ -8746,6 +9375,13 @@
             <a:prstDash val="solid"/>
           </a:ln>
         </p:spPr>
+        <p:txBody>
+          <a:bodyPr/>
+          <a:lstStyle/>
+          <a:p>
+            <a:endParaRPr lang="en-US"/>
+          </a:p>
+        </p:txBody>
       </p:sp>
       <p:sp>
         <p:nvSpPr>
@@ -8756,7 +9392,7 @@
         <p:spPr>
           <a:xfrm>
             <a:off x="10777118" y="4818339"/>
-            <a:ext cx="-426476" cy="83393"/>
+            <a:ext cx="0" cy="83393"/>
           </a:xfrm>
           <a:prstGeom prst="line">
             <a:avLst/>
@@ -8769,6 +9405,13 @@
             <a:prstDash val="solid"/>
           </a:ln>
         </p:spPr>
+        <p:txBody>
+          <a:bodyPr/>
+          <a:lstStyle/>
+          <a:p>
+            <a:endParaRPr lang="en-US"/>
+          </a:p>
+        </p:txBody>
       </p:sp>
       <p:sp>
         <p:nvSpPr>
@@ -8779,7 +9422,7 @@
         <p:spPr>
           <a:xfrm>
             <a:off x="9769084" y="5016398"/>
-            <a:ext cx="116312" cy="-229332"/>
+            <a:ext cx="116312" cy="0"/>
           </a:xfrm>
           <a:prstGeom prst="line">
             <a:avLst/>
@@ -8792,6 +9435,13 @@
             <a:prstDash val="solid"/>
           </a:ln>
         </p:spPr>
+        <p:txBody>
+          <a:bodyPr/>
+          <a:lstStyle/>
+          <a:p>
+            <a:endParaRPr lang="en-US"/>
+          </a:p>
+        </p:txBody>
       </p:sp>
       <p:sp>
         <p:nvSpPr>
@@ -8802,7 +9452,7 @@
         <p:spPr>
           <a:xfrm>
             <a:off x="9769084" y="5016398"/>
-            <a:ext cx="-329550" cy="-166787"/>
+            <a:ext cx="0" cy="0"/>
           </a:xfrm>
           <a:prstGeom prst="line">
             <a:avLst/>
@@ -8815,6 +9465,13 @@
             <a:prstDash val="solid"/>
           </a:ln>
         </p:spPr>
+        <p:txBody>
+          <a:bodyPr/>
+          <a:lstStyle/>
+          <a:p>
+            <a:endParaRPr lang="en-US"/>
+          </a:p>
+        </p:txBody>
       </p:sp>
       <p:sp>
         <p:nvSpPr>
@@ -8825,7 +9482,7 @@
         <p:spPr>
           <a:xfrm>
             <a:off x="10505724" y="5058095"/>
-            <a:ext cx="-155082" cy="-156362"/>
+            <a:ext cx="0" cy="0"/>
           </a:xfrm>
           <a:prstGeom prst="line">
             <a:avLst/>
@@ -8838,6 +9495,13 @@
             <a:prstDash val="solid"/>
           </a:ln>
         </p:spPr>
+        <p:txBody>
+          <a:bodyPr/>
+          <a:lstStyle/>
+          <a:p>
+            <a:endParaRPr lang="en-US"/>
+          </a:p>
+        </p:txBody>
       </p:sp>
       <p:sp>
         <p:nvSpPr>
@@ -8848,7 +9512,7 @@
         <p:spPr>
           <a:xfrm>
             <a:off x="10505724" y="5058095"/>
-            <a:ext cx="271394" cy="-239756"/>
+            <a:ext cx="271394" cy="0"/>
           </a:xfrm>
           <a:prstGeom prst="line">
             <a:avLst/>
@@ -8861,6 +9525,13 @@
             <a:prstDash val="solid"/>
           </a:ln>
         </p:spPr>
+        <p:txBody>
+          <a:bodyPr/>
+          <a:lstStyle/>
+          <a:p>
+            <a:endParaRPr lang="en-US"/>
+          </a:p>
+        </p:txBody>
       </p:sp>
       <p:sp>
         <p:nvSpPr>
@@ -8886,6 +9557,13 @@
             <a:prstDash val="solid"/>
           </a:ln>
         </p:spPr>
+        <p:txBody>
+          <a:bodyPr/>
+          <a:lstStyle/>
+          <a:p>
+            <a:endParaRPr lang="en-US"/>
+          </a:p>
+        </p:txBody>
       </p:sp>
       <p:sp>
         <p:nvSpPr>
@@ -8911,6 +9589,13 @@
             <a:prstDash val="solid"/>
           </a:ln>
         </p:spPr>
+        <p:txBody>
+          <a:bodyPr/>
+          <a:lstStyle/>
+          <a:p>
+            <a:endParaRPr lang="en-US"/>
+          </a:p>
+        </p:txBody>
       </p:sp>
       <p:sp>
         <p:nvSpPr>
@@ -8936,6 +9621,13 @@
             <a:prstDash val="solid"/>
           </a:ln>
         </p:spPr>
+        <p:txBody>
+          <a:bodyPr/>
+          <a:lstStyle/>
+          <a:p>
+            <a:endParaRPr lang="en-US"/>
+          </a:p>
+        </p:txBody>
       </p:sp>
       <p:sp>
         <p:nvSpPr>
@@ -8961,6 +9653,13 @@
             <a:prstDash val="solid"/>
           </a:ln>
         </p:spPr>
+        <p:txBody>
+          <a:bodyPr/>
+          <a:lstStyle/>
+          <a:p>
+            <a:endParaRPr lang="en-US"/>
+          </a:p>
+        </p:txBody>
       </p:sp>
       <p:sp>
         <p:nvSpPr>
@@ -8986,6 +9685,13 @@
             <a:prstDash val="solid"/>
           </a:ln>
         </p:spPr>
+        <p:txBody>
+          <a:bodyPr/>
+          <a:lstStyle/>
+          <a:p>
+            <a:endParaRPr lang="en-US"/>
+          </a:p>
+        </p:txBody>
       </p:sp>
       <p:sp>
         <p:nvSpPr>
@@ -9011,6 +9717,13 @@
             <a:prstDash val="solid"/>
           </a:ln>
         </p:spPr>
+        <p:txBody>
+          <a:bodyPr/>
+          <a:lstStyle/>
+          <a:p>
+            <a:endParaRPr lang="en-US"/>
+          </a:p>
+        </p:txBody>
       </p:sp>
       <p:sp>
         <p:nvSpPr>
@@ -9036,6 +9749,13 @@
             <a:prstDash val="solid"/>
           </a:ln>
         </p:spPr>
+        <p:txBody>
+          <a:bodyPr/>
+          <a:lstStyle/>
+          <a:p>
+            <a:endParaRPr lang="en-US"/>
+          </a:p>
+        </p:txBody>
       </p:sp>
       <p:sp>
         <p:nvSpPr>
@@ -9061,6 +9781,13 @@
             <a:prstDash val="solid"/>
           </a:ln>
         </p:spPr>
+        <p:txBody>
+          <a:bodyPr/>
+          <a:lstStyle/>
+          <a:p>
+            <a:endParaRPr lang="en-US"/>
+          </a:p>
+        </p:txBody>
       </p:sp>
       <p:sp>
         <p:nvSpPr>
@@ -9086,6 +9813,13 @@
             <a:prstDash val="solid"/>
           </a:ln>
         </p:spPr>
+        <p:txBody>
+          <a:bodyPr/>
+          <a:lstStyle/>
+          <a:p>
+            <a:endParaRPr lang="en-US"/>
+          </a:p>
+        </p:txBody>
       </p:sp>
       <p:sp>
         <p:nvSpPr>
@@ -9111,6 +9845,13 @@
             <a:prstDash val="solid"/>
           </a:ln>
         </p:spPr>
+        <p:txBody>
+          <a:bodyPr/>
+          <a:lstStyle/>
+          <a:p>
+            <a:endParaRPr lang="en-US"/>
+          </a:p>
+        </p:txBody>
       </p:sp>
       <p:sp>
         <p:nvSpPr>
@@ -9136,6 +9877,13 @@
             <a:prstDash val="solid"/>
           </a:ln>
         </p:spPr>
+        <p:txBody>
+          <a:bodyPr/>
+          <a:lstStyle/>
+          <a:p>
+            <a:endParaRPr lang="en-US"/>
+          </a:p>
+        </p:txBody>
       </p:sp>
       <p:sp>
         <p:nvSpPr>
@@ -9161,6 +9909,13 @@
             <a:prstDash val="solid"/>
           </a:ln>
         </p:spPr>
+        <p:txBody>
+          <a:bodyPr/>
+          <a:lstStyle/>
+          <a:p>
+            <a:endParaRPr lang="en-US"/>
+          </a:p>
+        </p:txBody>
       </p:sp>
       <p:sp>
         <p:nvSpPr>
@@ -9186,6 +9941,13 @@
             <a:prstDash val="solid"/>
           </a:ln>
         </p:spPr>
+        <p:txBody>
+          <a:bodyPr/>
+          <a:lstStyle/>
+          <a:p>
+            <a:endParaRPr lang="en-US"/>
+          </a:p>
+        </p:txBody>
       </p:sp>
       <p:sp>
         <p:nvSpPr>
@@ -9211,6 +9973,13 @@
             <a:prstDash val="solid"/>
           </a:ln>
         </p:spPr>
+        <p:txBody>
+          <a:bodyPr/>
+          <a:lstStyle/>
+          <a:p>
+            <a:endParaRPr lang="en-US"/>
+          </a:p>
+        </p:txBody>
       </p:sp>
       <p:sp>
         <p:nvSpPr>
@@ -9233,11 +10002,11 @@
           <a:bodyPr wrap="square" lIns="0" tIns="0" rIns="0" bIns="0" rtlCol="0" anchor="ctr"/>
           <a:lstStyle/>
           <a:p>
-            <a:pPr algn="ctr" indent="0" marL="0">
-              <a:buNone/>
-            </a:pPr>
-            <a:r>
-              <a:rPr lang="en-US" sz="900" b="1" spc="50" kern="0" dirty="0">
+            <a:pPr marL="0" indent="0" algn="ctr">
+              <a:buNone/>
+            </a:pPr>
+            <a:r>
+              <a:rPr lang="en-US" sz="900" b="1" kern="0" spc="50" dirty="0">
                 <a:solidFill>
                   <a:srgbClr val="000000"/>
                 </a:solidFill>
@@ -9251,11 +10020,179 @@
           </a:p>
         </p:txBody>
       </p:sp>
+      <p:pic>
+        <p:nvPicPr>
+          <p:cNvPr id="80" name="Online Media 79" title="Sol Lewitt Wall Drawing Time Lapse">
+            <a:hlinkClick r:id="" action="ppaction://media"/>
+            <a:extLst>
+              <a:ext uri="{FF2B5EF4-FFF2-40B4-BE49-F238E27FC236}">
+                <a16:creationId xmlns:a16="http://schemas.microsoft.com/office/drawing/2014/main" id="{7D93BC3B-ECBA-1FC6-F75B-61A2E40704E9}"/>
+              </a:ext>
+            </a:extLst>
+          </p:cNvPr>
+          <p:cNvPicPr>
+            <a:picLocks noRot="1" noChangeAspect="1"/>
+          </p:cNvPicPr>
+          <p:nvPr>
+            <a:videoFile r:link="rId1"/>
+          </p:nvPr>
+        </p:nvPicPr>
+        <p:blipFill>
+          <a:blip r:embed="rId4"/>
+          <a:stretch>
+            <a:fillRect/>
+          </a:stretch>
+        </p:blipFill>
+        <p:spPr>
+          <a:xfrm>
+            <a:off x="662940" y="1828799"/>
+            <a:ext cx="4960620" cy="2513750"/>
+          </a:xfrm>
+          <a:prstGeom prst="rect">
+            <a:avLst/>
+          </a:prstGeom>
+        </p:spPr>
+      </p:pic>
     </p:spTree>
   </p:cSld>
   <p:clrMapOvr>
     <a:masterClrMapping/>
   </p:clrMapOvr>
+  <p:timing>
+    <p:tnLst>
+      <p:par>
+        <p:cTn id="1" dur="indefinite" restart="never" nodeType="tmRoot">
+          <p:childTnLst>
+            <p:seq concurrent="1" nextAc="seek">
+              <p:cTn id="2" dur="indefinite" nodeType="mainSeq">
+                <p:childTnLst>
+                  <p:par>
+                    <p:cTn id="3" fill="hold">
+                      <p:stCondLst>
+                        <p:cond delay="indefinite"/>
+                      </p:stCondLst>
+                      <p:childTnLst>
+                        <p:par>
+                          <p:cTn id="4" fill="hold">
+                            <p:stCondLst>
+                              <p:cond delay="0"/>
+                            </p:stCondLst>
+                            <p:childTnLst>
+                              <p:par>
+                                <p:cTn id="5" presetID="1" presetClass="mediacall" presetSubtype="0" fill="hold" nodeType="clickEffect">
+                                  <p:stCondLst>
+                                    <p:cond delay="0"/>
+                                  </p:stCondLst>
+                                  <p:childTnLst>
+                                    <p:cmd type="call" cmd="playFrom(0.0)">
+                                      <p:cBhvr>
+                                        <p:cTn id="6" dur="1" fill="hold"/>
+                                        <p:tgtEl>
+                                          <p:spTgt spid="80"/>
+                                        </p:tgtEl>
+                                      </p:cBhvr>
+                                    </p:cmd>
+                                  </p:childTnLst>
+                                </p:cTn>
+                              </p:par>
+                            </p:childTnLst>
+                          </p:cTn>
+                        </p:par>
+                      </p:childTnLst>
+                    </p:cTn>
+                  </p:par>
+                </p:childTnLst>
+              </p:cTn>
+              <p:prevCondLst>
+                <p:cond evt="onPrev" delay="0">
+                  <p:tgtEl>
+                    <p:sldTgt/>
+                  </p:tgtEl>
+                </p:cond>
+              </p:prevCondLst>
+              <p:nextCondLst>
+                <p:cond evt="onNext" delay="0">
+                  <p:tgtEl>
+                    <p:sldTgt/>
+                  </p:tgtEl>
+                </p:cond>
+              </p:nextCondLst>
+            </p:seq>
+            <p:video>
+              <p:cMediaNode vol="80000">
+                <p:cTn id="7" fill="hold" display="0">
+                  <p:stCondLst>
+                    <p:cond delay="indefinite"/>
+                  </p:stCondLst>
+                </p:cTn>
+                <p:tgtEl>
+                  <p:spTgt spid="80"/>
+                </p:tgtEl>
+              </p:cMediaNode>
+            </p:video>
+            <p:seq concurrent="1" nextAc="seek">
+              <p:cTn id="8" restart="whenNotActive" fill="hold" evtFilter="cancelBubble" nodeType="interactiveSeq">
+                <p:stCondLst>
+                  <p:cond evt="onClick" delay="0">
+                    <p:tgtEl>
+                      <p:spTgt spid="80"/>
+                    </p:tgtEl>
+                  </p:cond>
+                </p:stCondLst>
+                <p:endSync evt="end" delay="0">
+                  <p:rtn val="all"/>
+                </p:endSync>
+                <p:childTnLst>
+                  <p:par>
+                    <p:cTn id="9" fill="hold">
+                      <p:stCondLst>
+                        <p:cond delay="0"/>
+                      </p:stCondLst>
+                      <p:childTnLst>
+                        <p:par>
+                          <p:cTn id="10" fill="hold">
+                            <p:stCondLst>
+                              <p:cond delay="0"/>
+                            </p:stCondLst>
+                            <p:childTnLst>
+                              <p:par>
+                                <p:cTn id="11" presetID="2" presetClass="mediacall" presetSubtype="0" fill="hold" nodeType="clickEffect">
+                                  <p:stCondLst>
+                                    <p:cond delay="0"/>
+                                  </p:stCondLst>
+                                  <p:childTnLst>
+                                    <p:cmd type="call" cmd="togglePause">
+                                      <p:cBhvr>
+                                        <p:cTn id="12" dur="1" fill="hold"/>
+                                        <p:tgtEl>
+                                          <p:spTgt spid="80"/>
+                                        </p:tgtEl>
+                                      </p:cBhvr>
+                                    </p:cmd>
+                                  </p:childTnLst>
+                                </p:cTn>
+                              </p:par>
+                            </p:childTnLst>
+                          </p:cTn>
+                        </p:par>
+                      </p:childTnLst>
+                    </p:cTn>
+                  </p:par>
+                </p:childTnLst>
+              </p:cTn>
+              <p:nextCondLst>
+                <p:cond evt="onClick" delay="0">
+                  <p:tgtEl>
+                    <p:spTgt spid="80"/>
+                  </p:tgtEl>
+                </p:cond>
+              </p:nextCondLst>
+            </p:seq>
+          </p:childTnLst>
+        </p:cTn>
+      </p:par>
+    </p:tnLst>
+  </p:timing>
 </p:sld>
 </file>
 
@@ -9267,6 +10204,7 @@
         <a:solidFill>
           <a:srgbClr val="000000"/>
         </a:solidFill>
+        <a:effectLst/>
       </p:bgPr>
     </p:bg>
     <p:spTree>
@@ -9305,6 +10243,13 @@
             <a:prstDash val="solid"/>
           </a:ln>
         </p:spPr>
+        <p:txBody>
+          <a:bodyPr/>
+          <a:lstStyle/>
+          <a:p>
+            <a:endParaRPr lang="en-US"/>
+          </a:p>
+        </p:txBody>
       </p:sp>
       <p:sp>
         <p:nvSpPr>
@@ -9327,11 +10272,11 @@
           <a:bodyPr wrap="square" lIns="0" tIns="0" rIns="0" bIns="0" rtlCol="0" anchor="ctr"/>
           <a:lstStyle/>
           <a:p>
-            <a:pPr indent="0" marL="0">
-              <a:buNone/>
-            </a:pPr>
-            <a:r>
-              <a:rPr lang="en-US" sz="3300" b="1" spc="-60" kern="0" dirty="0">
+            <a:pPr marL="0" indent="0">
+              <a:buNone/>
+            </a:pPr>
+            <a:r>
+              <a:rPr lang="en-US" sz="3300" b="1" kern="0" spc="-60" dirty="0">
                 <a:solidFill>
                   <a:srgbClr val="FFFDF7"/>
                 </a:solidFill>
@@ -9366,7 +10311,7 @@
           <a:bodyPr wrap="square" lIns="0" tIns="0" rIns="0" bIns="0" rtlCol="0" anchor="ctr"/>
           <a:lstStyle/>
           <a:p>
-            <a:pPr indent="0" marL="0">
+            <a:pPr marL="0" indent="0">
               <a:buNone/>
             </a:pPr>
             <a:r>
@@ -9408,6 +10353,13 @@
             <a:prstDash val="solid"/>
           </a:ln>
         </p:spPr>
+        <p:txBody>
+          <a:bodyPr/>
+          <a:lstStyle/>
+          <a:p>
+            <a:endParaRPr lang="en-US"/>
+          </a:p>
+        </p:txBody>
       </p:sp>
       <p:sp>
         <p:nvSpPr>
@@ -9433,6 +10385,13 @@
             <a:prstDash val="solid"/>
           </a:ln>
         </p:spPr>
+        <p:txBody>
+          <a:bodyPr/>
+          <a:lstStyle/>
+          <a:p>
+            <a:endParaRPr lang="en-US"/>
+          </a:p>
+        </p:txBody>
       </p:sp>
       <p:sp>
         <p:nvSpPr>
@@ -9455,11 +10414,11 @@
           <a:bodyPr wrap="square" lIns="0" tIns="0" rIns="0" bIns="0" rtlCol="0" anchor="ctr"/>
           <a:lstStyle/>
           <a:p>
-            <a:pPr indent="0" marL="0">
-              <a:buNone/>
-            </a:pPr>
-            <a:r>
-              <a:rPr lang="en-US" sz="1700" b="1" spc="-20" kern="0" dirty="0">
+            <a:pPr marL="0" indent="0">
+              <a:buNone/>
+            </a:pPr>
+            <a:r>
+              <a:rPr lang="en-US" sz="1700" b="1" kern="0" spc="-20" dirty="0">
                 <a:solidFill>
                   <a:srgbClr val="000000"/>
                 </a:solidFill>
@@ -9467,7 +10426,7 @@
                 <a:ea typeface="Arial" pitchFamily="34" charset="-122"/>
                 <a:cs typeface="Arial" pitchFamily="34" charset="-120"/>
               </a:rPr>
-              <a:t>THE AUTHOR DEFINES THE PROCESS AND ITS FLEXIBILITY.</a:t>
+              <a:t>DECOMPOSE A FORM INTO VARIABLES</a:t>
             </a:r>
             <a:endParaRPr lang="en-US" sz="1700" dirty="0"/>
           </a:p>
@@ -9497,6 +10456,13 @@
             <a:prstDash val="solid"/>
           </a:ln>
         </p:spPr>
+        <p:txBody>
+          <a:bodyPr/>
+          <a:lstStyle/>
+          <a:p>
+            <a:endParaRPr lang="en-US"/>
+          </a:p>
+        </p:txBody>
       </p:sp>
       <p:sp>
         <p:nvSpPr>
@@ -9522,6 +10488,13 @@
             <a:prstDash val="solid"/>
           </a:ln>
         </p:spPr>
+        <p:txBody>
+          <a:bodyPr/>
+          <a:lstStyle/>
+          <a:p>
+            <a:endParaRPr lang="en-US"/>
+          </a:p>
+        </p:txBody>
       </p:sp>
       <p:sp>
         <p:nvSpPr>
@@ -9544,7 +10517,7 @@
           <a:bodyPr wrap="square" lIns="0" tIns="0" rIns="0" bIns="0" rtlCol="0" anchor="ctr"/>
           <a:lstStyle/>
           <a:p>
-            <a:pPr indent="0" marL="0">
+            <a:pPr marL="0" indent="0">
               <a:buNone/>
             </a:pPr>
             <a:r>
@@ -9586,6 +10559,13 @@
             <a:prstDash val="solid"/>
           </a:ln>
         </p:spPr>
+        <p:txBody>
+          <a:bodyPr/>
+          <a:lstStyle/>
+          <a:p>
+            <a:endParaRPr lang="en-US"/>
+          </a:p>
+        </p:txBody>
       </p:sp>
       <p:sp>
         <p:nvSpPr>
@@ -9608,7 +10588,7 @@
           <a:bodyPr wrap="square" lIns="0" tIns="0" rIns="0" bIns="0" rtlCol="0" anchor="ctr"/>
           <a:lstStyle/>
           <a:p>
-            <a:pPr indent="0" marL="0">
+            <a:pPr marL="0" indent="0">
               <a:buNone/>
             </a:pPr>
             <a:r>
@@ -9650,6 +10630,13 @@
             <a:prstDash val="solid"/>
           </a:ln>
         </p:spPr>
+        <p:txBody>
+          <a:bodyPr/>
+          <a:lstStyle/>
+          <a:p>
+            <a:endParaRPr lang="en-US"/>
+          </a:p>
+        </p:txBody>
       </p:sp>
       <p:sp>
         <p:nvSpPr>
@@ -9675,6 +10662,13 @@
             <a:prstDash val="solid"/>
           </a:ln>
         </p:spPr>
+        <p:txBody>
+          <a:bodyPr/>
+          <a:lstStyle/>
+          <a:p>
+            <a:endParaRPr lang="en-US"/>
+          </a:p>
+        </p:txBody>
       </p:sp>
       <p:sp>
         <p:nvSpPr>
@@ -9697,7 +10691,7 @@
           <a:bodyPr wrap="square" lIns="0" tIns="0" rIns="0" bIns="0" rtlCol="0" anchor="ctr"/>
           <a:lstStyle/>
           <a:p>
-            <a:pPr indent="0" marL="0">
+            <a:pPr marL="0" indent="0">
               <a:buNone/>
             </a:pPr>
             <a:r>
@@ -9739,6 +10733,13 @@
             <a:prstDash val="solid"/>
           </a:ln>
         </p:spPr>
+        <p:txBody>
+          <a:bodyPr/>
+          <a:lstStyle/>
+          <a:p>
+            <a:endParaRPr lang="en-US"/>
+          </a:p>
+        </p:txBody>
       </p:sp>
       <p:sp>
         <p:nvSpPr>
@@ -9761,7 +10762,7 @@
           <a:bodyPr wrap="square" lIns="0" tIns="0" rIns="0" bIns="0" rtlCol="0" anchor="ctr"/>
           <a:lstStyle/>
           <a:p>
-            <a:pPr indent="0" marL="0">
+            <a:pPr marL="0" indent="0">
               <a:buNone/>
             </a:pPr>
             <a:r>
@@ -9803,6 +10804,13 @@
             <a:prstDash val="solid"/>
           </a:ln>
         </p:spPr>
+        <p:txBody>
+          <a:bodyPr/>
+          <a:lstStyle/>
+          <a:p>
+            <a:endParaRPr lang="en-US"/>
+          </a:p>
+        </p:txBody>
       </p:sp>
       <p:sp>
         <p:nvSpPr>
@@ -9828,6 +10836,13 @@
             <a:prstDash val="solid"/>
           </a:ln>
         </p:spPr>
+        <p:txBody>
+          <a:bodyPr/>
+          <a:lstStyle/>
+          <a:p>
+            <a:endParaRPr lang="en-US"/>
+          </a:p>
+        </p:txBody>
       </p:sp>
       <p:sp>
         <p:nvSpPr>
@@ -9850,7 +10865,7 @@
           <a:bodyPr wrap="square" lIns="0" tIns="0" rIns="0" bIns="0" rtlCol="0" anchor="ctr"/>
           <a:lstStyle/>
           <a:p>
-            <a:pPr indent="0" marL="0">
+            <a:pPr marL="0" indent="0">
               <a:buNone/>
             </a:pPr>
             <a:r>
@@ -9892,6 +10907,13 @@
             <a:prstDash val="solid"/>
           </a:ln>
         </p:spPr>
+        <p:txBody>
+          <a:bodyPr/>
+          <a:lstStyle/>
+          <a:p>
+            <a:endParaRPr lang="en-US"/>
+          </a:p>
+        </p:txBody>
       </p:sp>
       <p:sp>
         <p:nvSpPr>
@@ -9914,7 +10936,7 @@
           <a:bodyPr wrap="square" lIns="0" tIns="0" rIns="0" bIns="0" rtlCol="0" anchor="ctr"/>
           <a:lstStyle/>
           <a:p>
-            <a:pPr indent="0" marL="0">
+            <a:pPr marL="0" indent="0">
               <a:buNone/>
             </a:pPr>
             <a:r>
@@ -9956,6 +10978,13 @@
             <a:prstDash val="solid"/>
           </a:ln>
         </p:spPr>
+        <p:txBody>
+          <a:bodyPr/>
+          <a:lstStyle/>
+          <a:p>
+            <a:endParaRPr lang="en-US"/>
+          </a:p>
+        </p:txBody>
       </p:sp>
       <p:sp>
         <p:nvSpPr>
@@ -9981,6 +11010,13 @@
             <a:prstDash val="solid"/>
           </a:ln>
         </p:spPr>
+        <p:txBody>
+          <a:bodyPr/>
+          <a:lstStyle/>
+          <a:p>
+            <a:endParaRPr lang="en-US" dirty="0"/>
+          </a:p>
+        </p:txBody>
       </p:sp>
       <p:sp>
         <p:nvSpPr>
@@ -10004,6 +11040,13 @@
             <a:prstDash val="solid"/>
           </a:ln>
         </p:spPr>
+        <p:txBody>
+          <a:bodyPr/>
+          <a:lstStyle/>
+          <a:p>
+            <a:endParaRPr lang="en-US"/>
+          </a:p>
+        </p:txBody>
       </p:sp>
       <p:sp>
         <p:nvSpPr>
@@ -10014,7 +11057,7 @@
         <p:spPr>
           <a:xfrm>
             <a:off x="6949440" y="5111496"/>
-            <a:ext cx="4617720" cy="-2322576"/>
+            <a:ext cx="4617720" cy="0"/>
           </a:xfrm>
           <a:prstGeom prst="line">
             <a:avLst/>
@@ -10027,6 +11070,13 @@
             <a:prstDash val="solid"/>
           </a:ln>
         </p:spPr>
+        <p:txBody>
+          <a:bodyPr/>
+          <a:lstStyle/>
+          <a:p>
+            <a:endParaRPr lang="en-US"/>
+          </a:p>
+        </p:txBody>
       </p:sp>
       <p:sp>
         <p:nvSpPr>
@@ -10052,6 +11102,13 @@
             <a:prstDash val="solid"/>
           </a:ln>
         </p:spPr>
+        <p:txBody>
+          <a:bodyPr/>
+          <a:lstStyle/>
+          <a:p>
+            <a:endParaRPr lang="en-US"/>
+          </a:p>
+        </p:txBody>
       </p:sp>
       <p:sp>
         <p:nvSpPr>
@@ -10074,11 +11131,11 @@
           <a:bodyPr wrap="square" lIns="0" tIns="0" rIns="0" bIns="0" rtlCol="0" anchor="ctr"/>
           <a:lstStyle/>
           <a:p>
-            <a:pPr algn="ctr" indent="0" marL="0">
-              <a:buNone/>
-            </a:pPr>
-            <a:r>
-              <a:rPr lang="en-US" sz="1000" b="1" spc="80" kern="0" dirty="0">
+            <a:pPr marL="0" indent="0" algn="ctr">
+              <a:buNone/>
+            </a:pPr>
+            <a:r>
+              <a:rPr lang="en-US" sz="1000" b="1" kern="0" spc="80" dirty="0">
                 <a:solidFill>
                   <a:srgbClr val="000000"/>
                 </a:solidFill>
@@ -10113,9 +11170,6 @@
           <a:bodyPr wrap="square" lIns="0" tIns="0" rIns="0" bIns="0" rtlCol="0" anchor="ctr"/>
           <a:lstStyle/>
           <a:p>
-            <a:pPr indent="0" marL="0">
-              <a:buNone/>
-            </a:pPr>
             <a:r>
               <a:rPr lang="en-US" sz="1000" i="1" dirty="0">
                 <a:solidFill>
@@ -10125,7 +11179,7 @@
                 <a:ea typeface="Calibri" pitchFamily="34" charset="-122"/>
                 <a:cs typeface="Calibri" pitchFamily="34" charset="-120"/>
               </a:rPr>
-              <a:t>Add: a project whose form is driven by parameters.</a:t>
+              <a:t>https://formandcode.com/code-examples/parameterize-chair</a:t>
             </a:r>
             <a:endParaRPr lang="en-US" sz="1000" dirty="0"/>
           </a:p>
@@ -10152,11 +11206,11 @@
           <a:bodyPr wrap="square" lIns="0" tIns="0" rIns="0" bIns="0" rtlCol="0" anchor="ctr"/>
           <a:lstStyle/>
           <a:p>
-            <a:pPr indent="0" marL="0">
-              <a:buNone/>
-            </a:pPr>
-            <a:r>
-              <a:rPr lang="en-US" sz="1050" b="1" spc="50" kern="0" dirty="0">
+            <a:pPr marL="0" indent="0">
+              <a:buNone/>
+            </a:pPr>
+            <a:r>
+              <a:rPr lang="en-US" sz="1050" b="1" kern="0" spc="50" dirty="0">
                 <a:solidFill>
                   <a:srgbClr val="C6F035"/>
                 </a:solidFill>
@@ -10170,6 +11224,36 @@
           </a:p>
         </p:txBody>
       </p:sp>
+      <p:pic>
+        <p:nvPicPr>
+          <p:cNvPr id="34" name="Picture 33">
+            <a:extLst>
+              <a:ext uri="{FF2B5EF4-FFF2-40B4-BE49-F238E27FC236}">
+                <a16:creationId xmlns:a16="http://schemas.microsoft.com/office/drawing/2014/main" id="{8CDFE007-53F7-A634-5493-B8C6D8894942}"/>
+              </a:ext>
+            </a:extLst>
+          </p:cNvPr>
+          <p:cNvPicPr>
+            <a:picLocks noChangeAspect="1"/>
+          </p:cNvPicPr>
+          <p:nvPr/>
+        </p:nvPicPr>
+        <p:blipFill>
+          <a:blip r:embed="rId3"/>
+          <a:stretch>
+            <a:fillRect/>
+          </a:stretch>
+        </p:blipFill>
+        <p:spPr>
+          <a:xfrm>
+            <a:off x="7517153" y="2816500"/>
+            <a:ext cx="3482293" cy="2230988"/>
+          </a:xfrm>
+          <a:prstGeom prst="rect">
+            <a:avLst/>
+          </a:prstGeom>
+        </p:spPr>
+      </p:pic>
     </p:spTree>
   </p:cSld>
   <p:clrMapOvr>
@@ -10186,6 +11270,7 @@
         <a:solidFill>
           <a:srgbClr val="000000"/>
         </a:solidFill>
+        <a:effectLst/>
       </p:bgPr>
     </p:bg>
     <p:spTree>
@@ -10224,6 +11309,13 @@
             <a:prstDash val="solid"/>
           </a:ln>
         </p:spPr>
+        <p:txBody>
+          <a:bodyPr/>
+          <a:lstStyle/>
+          <a:p>
+            <a:endParaRPr lang="en-US"/>
+          </a:p>
+        </p:txBody>
       </p:sp>
       <p:sp>
         <p:nvSpPr>
@@ -10246,11 +11338,11 @@
           <a:bodyPr wrap="square" lIns="0" tIns="0" rIns="0" bIns="0" rtlCol="0" anchor="ctr"/>
           <a:lstStyle/>
           <a:p>
-            <a:pPr indent="0" marL="0">
-              <a:buNone/>
-            </a:pPr>
-            <a:r>
-              <a:rPr lang="en-US" sz="3300" b="1" spc="-60" kern="0" dirty="0">
+            <a:pPr marL="0" indent="0">
+              <a:buNone/>
+            </a:pPr>
+            <a:r>
+              <a:rPr lang="en-US" sz="3300" b="1" kern="0" spc="-60" dirty="0">
                 <a:solidFill>
                   <a:srgbClr val="FFFDF7"/>
                 </a:solidFill>
@@ -10285,7 +11377,7 @@
           <a:bodyPr wrap="square" lIns="0" tIns="0" rIns="0" bIns="0" rtlCol="0" anchor="ctr"/>
           <a:lstStyle/>
           <a:p>
-            <a:pPr indent="0" marL="0">
+            <a:pPr marL="0" indent="0">
               <a:buNone/>
             </a:pPr>
             <a:r>
@@ -10324,7 +11416,7 @@
           <a:bodyPr wrap="square" lIns="0" tIns="0" rIns="0" bIns="0" rtlCol="0" anchor="ctr"/>
           <a:lstStyle/>
           <a:p>
-            <a:pPr indent="0" marL="0">
+            <a:pPr marL="0" indent="0">
               <a:buNone/>
             </a:pPr>
             <a:r>
@@ -10366,6 +11458,13 @@
             <a:prstDash val="solid"/>
           </a:ln>
         </p:spPr>
+        <p:txBody>
+          <a:bodyPr/>
+          <a:lstStyle/>
+          <a:p>
+            <a:endParaRPr lang="en-US"/>
+          </a:p>
+        </p:txBody>
       </p:sp>
       <p:sp>
         <p:nvSpPr>
@@ -10391,6 +11490,13 @@
             <a:prstDash val="solid"/>
           </a:ln>
         </p:spPr>
+        <p:txBody>
+          <a:bodyPr/>
+          <a:lstStyle/>
+          <a:p>
+            <a:endParaRPr lang="en-US"/>
+          </a:p>
+        </p:txBody>
       </p:sp>
       <p:sp>
         <p:nvSpPr>
@@ -10413,11 +11519,11 @@
           <a:bodyPr wrap="square" lIns="0" tIns="0" rIns="0" bIns="0" rtlCol="0" anchor="ctr"/>
           <a:lstStyle/>
           <a:p>
-            <a:pPr algn="ctr" indent="0" marL="0">
-              <a:buNone/>
-            </a:pPr>
-            <a:r>
-              <a:rPr lang="en-US" sz="1200" b="1" spc="20" kern="0" dirty="0">
+            <a:pPr marL="0" indent="0" algn="ctr">
+              <a:buNone/>
+            </a:pPr>
+            <a:r>
+              <a:rPr lang="en-US" sz="1200" b="1" kern="0" spc="20" dirty="0">
                 <a:solidFill>
                   <a:srgbClr val="000000"/>
                 </a:solidFill>
@@ -10455,6 +11561,13 @@
             <a:prstDash val="solid"/>
           </a:ln>
         </p:spPr>
+        <p:txBody>
+          <a:bodyPr/>
+          <a:lstStyle/>
+          <a:p>
+            <a:endParaRPr lang="en-US"/>
+          </a:p>
+        </p:txBody>
       </p:sp>
       <p:sp>
         <p:nvSpPr>
@@ -10480,6 +11593,13 @@
             <a:prstDash val="solid"/>
           </a:ln>
         </p:spPr>
+        <p:txBody>
+          <a:bodyPr/>
+          <a:lstStyle/>
+          <a:p>
+            <a:endParaRPr lang="en-US"/>
+          </a:p>
+        </p:txBody>
       </p:sp>
       <p:sp>
         <p:nvSpPr>
@@ -10505,6 +11625,13 @@
             <a:prstDash val="solid"/>
           </a:ln>
         </p:spPr>
+        <p:txBody>
+          <a:bodyPr/>
+          <a:lstStyle/>
+          <a:p>
+            <a:endParaRPr lang="en-US"/>
+          </a:p>
+        </p:txBody>
       </p:sp>
       <p:sp>
         <p:nvSpPr>
@@ -10527,11 +11654,11 @@
           <a:bodyPr wrap="square" lIns="0" tIns="0" rIns="0" bIns="0" rtlCol="0" anchor="ctr"/>
           <a:lstStyle/>
           <a:p>
-            <a:pPr algn="ctr" indent="0" marL="0">
-              <a:buNone/>
-            </a:pPr>
-            <a:r>
-              <a:rPr lang="en-US" sz="1200" b="1" spc="20" kern="0" dirty="0">
+            <a:pPr marL="0" indent="0" algn="ctr">
+              <a:buNone/>
+            </a:pPr>
+            <a:r>
+              <a:rPr lang="en-US" sz="1200" b="1" kern="0" spc="20" dirty="0">
                 <a:solidFill>
                   <a:srgbClr val="000000"/>
                 </a:solidFill>
@@ -10569,6 +11696,13 @@
             <a:prstDash val="solid"/>
           </a:ln>
         </p:spPr>
+        <p:txBody>
+          <a:bodyPr/>
+          <a:lstStyle/>
+          <a:p>
+            <a:endParaRPr lang="en-US"/>
+          </a:p>
+        </p:txBody>
       </p:sp>
       <p:sp>
         <p:nvSpPr>
@@ -10594,6 +11728,13 @@
             <a:prstDash val="solid"/>
           </a:ln>
         </p:spPr>
+        <p:txBody>
+          <a:bodyPr/>
+          <a:lstStyle/>
+          <a:p>
+            <a:endParaRPr lang="en-US"/>
+          </a:p>
+        </p:txBody>
       </p:sp>
       <p:sp>
         <p:nvSpPr>
@@ -10619,6 +11760,13 @@
             <a:prstDash val="solid"/>
           </a:ln>
         </p:spPr>
+        <p:txBody>
+          <a:bodyPr/>
+          <a:lstStyle/>
+          <a:p>
+            <a:endParaRPr lang="en-US"/>
+          </a:p>
+        </p:txBody>
       </p:sp>
       <p:sp>
         <p:nvSpPr>
@@ -10641,11 +11789,11 @@
           <a:bodyPr wrap="square" lIns="0" tIns="0" rIns="0" bIns="0" rtlCol="0" anchor="ctr"/>
           <a:lstStyle/>
           <a:p>
-            <a:pPr algn="ctr" indent="0" marL="0">
-              <a:buNone/>
-            </a:pPr>
-            <a:r>
-              <a:rPr lang="en-US" sz="1200" b="1" spc="20" kern="0" dirty="0">
+            <a:pPr marL="0" indent="0" algn="ctr">
+              <a:buNone/>
+            </a:pPr>
+            <a:r>
+              <a:rPr lang="en-US" sz="1200" b="1" kern="0" spc="20" dirty="0">
                 <a:solidFill>
                   <a:srgbClr val="000000"/>
                 </a:solidFill>
@@ -10681,6 +11829,13 @@
             <a:prstDash val="solid"/>
           </a:ln>
         </p:spPr>
+        <p:txBody>
+          <a:bodyPr/>
+          <a:lstStyle/>
+          <a:p>
+            <a:endParaRPr lang="en-US"/>
+          </a:p>
+        </p:txBody>
       </p:sp>
       <p:sp>
         <p:nvSpPr>
@@ -10704,6 +11859,13 @@
             <a:prstDash val="solid"/>
           </a:ln>
         </p:spPr>
+        <p:txBody>
+          <a:bodyPr/>
+          <a:lstStyle/>
+          <a:p>
+            <a:endParaRPr lang="en-US"/>
+          </a:p>
+        </p:txBody>
       </p:sp>
       <p:sp>
         <p:nvSpPr>
@@ -10727,6 +11889,13 @@
             <a:prstDash val="solid"/>
           </a:ln>
         </p:spPr>
+        <p:txBody>
+          <a:bodyPr/>
+          <a:lstStyle/>
+          <a:p>
+            <a:endParaRPr lang="en-US"/>
+          </a:p>
+        </p:txBody>
       </p:sp>
       <p:sp>
         <p:nvSpPr>
@@ -10749,11 +11918,11 @@
           <a:bodyPr wrap="square" lIns="0" tIns="0" rIns="0" bIns="0" rtlCol="0" anchor="ctr"/>
           <a:lstStyle/>
           <a:p>
-            <a:pPr algn="ctr" indent="0" marL="0">
-              <a:buNone/>
-            </a:pPr>
-            <a:r>
-              <a:rPr lang="en-US" sz="1050" b="1" spc="60" kern="0" dirty="0">
+            <a:pPr marL="0" indent="0" algn="ctr">
+              <a:buNone/>
+            </a:pPr>
+            <a:r>
+              <a:rPr lang="en-US" sz="1050" b="1" kern="0" spc="60" dirty="0">
                 <a:solidFill>
                   <a:srgbClr val="FF4D8D"/>
                 </a:solidFill>
@@ -10791,6 +11960,13 @@
             <a:prstDash val="solid"/>
           </a:ln>
         </p:spPr>
+        <p:txBody>
+          <a:bodyPr/>
+          <a:lstStyle/>
+          <a:p>
+            <a:endParaRPr lang="en-US"/>
+          </a:p>
+        </p:txBody>
       </p:sp>
       <p:sp>
         <p:nvSpPr>
@@ -10816,6 +11992,13 @@
             <a:prstDash val="solid"/>
           </a:ln>
         </p:spPr>
+        <p:txBody>
+          <a:bodyPr/>
+          <a:lstStyle/>
+          <a:p>
+            <a:endParaRPr lang="en-US"/>
+          </a:p>
+        </p:txBody>
       </p:sp>
       <p:sp>
         <p:nvSpPr>
@@ -10839,6 +12022,13 @@
             <a:prstDash val="solid"/>
           </a:ln>
         </p:spPr>
+        <p:txBody>
+          <a:bodyPr/>
+          <a:lstStyle/>
+          <a:p>
+            <a:endParaRPr lang="en-US"/>
+          </a:p>
+        </p:txBody>
       </p:sp>
       <p:sp>
         <p:nvSpPr>
@@ -10849,7 +12039,7 @@
         <p:spPr>
           <a:xfrm>
             <a:off x="7452360" y="4572000"/>
-            <a:ext cx="4114800" cy="-2377440"/>
+            <a:ext cx="4114800" cy="0"/>
           </a:xfrm>
           <a:prstGeom prst="line">
             <a:avLst/>
@@ -10862,6 +12052,13 @@
             <a:prstDash val="solid"/>
           </a:ln>
         </p:spPr>
+        <p:txBody>
+          <a:bodyPr/>
+          <a:lstStyle/>
+          <a:p>
+            <a:endParaRPr lang="en-US"/>
+          </a:p>
+        </p:txBody>
       </p:sp>
       <p:sp>
         <p:nvSpPr>
@@ -10887,6 +12084,13 @@
             <a:prstDash val="solid"/>
           </a:ln>
         </p:spPr>
+        <p:txBody>
+          <a:bodyPr/>
+          <a:lstStyle/>
+          <a:p>
+            <a:endParaRPr lang="en-US"/>
+          </a:p>
+        </p:txBody>
       </p:sp>
       <p:sp>
         <p:nvSpPr>
@@ -10909,11 +12113,11 @@
           <a:bodyPr wrap="square" lIns="0" tIns="0" rIns="0" bIns="0" rtlCol="0" anchor="ctr"/>
           <a:lstStyle/>
           <a:p>
-            <a:pPr algn="ctr" indent="0" marL="0">
-              <a:buNone/>
-            </a:pPr>
-            <a:r>
-              <a:rPr lang="en-US" sz="1000" b="1" spc="80" kern="0" dirty="0">
+            <a:pPr marL="0" indent="0" algn="ctr">
+              <a:buNone/>
+            </a:pPr>
+            <a:r>
+              <a:rPr lang="en-US" sz="1000" b="1" kern="0" spc="80" dirty="0">
                 <a:solidFill>
                   <a:srgbClr val="000000"/>
                 </a:solidFill>
@@ -10948,7 +12152,7 @@
           <a:bodyPr wrap="square" lIns="0" tIns="0" rIns="0" bIns="0" rtlCol="0" anchor="ctr"/>
           <a:lstStyle/>
           <a:p>
-            <a:pPr indent="0" marL="0">
+            <a:pPr marL="0" indent="0">
               <a:buNone/>
             </a:pPr>
             <a:r>
@@ -10960,7 +12164,7 @@
                 <a:ea typeface="Calibri" pitchFamily="34" charset="-122"/>
                 <a:cs typeface="Calibri" pitchFamily="34" charset="-120"/>
               </a:rPr>
-              <a:t>Add: an agent trail, a CA, or a growth study.</a:t>
+              <a:t>Using FEA as a generative algorithm</a:t>
             </a:r>
             <a:endParaRPr lang="en-US" sz="1000" dirty="0"/>
           </a:p>
@@ -10990,6 +12194,13 @@
             <a:prstDash val="solid"/>
           </a:ln>
         </p:spPr>
+        <p:txBody>
+          <a:bodyPr/>
+          <a:lstStyle/>
+          <a:p>
+            <a:endParaRPr lang="en-US"/>
+          </a:p>
+        </p:txBody>
       </p:sp>
       <p:sp>
         <p:nvSpPr>
@@ -11015,6 +12226,13 @@
             <a:prstDash val="solid"/>
           </a:ln>
         </p:spPr>
+        <p:txBody>
+          <a:bodyPr/>
+          <a:lstStyle/>
+          <a:p>
+            <a:endParaRPr lang="en-US"/>
+          </a:p>
+        </p:txBody>
       </p:sp>
       <p:sp>
         <p:nvSpPr>
@@ -11037,11 +12255,11 @@
           <a:bodyPr wrap="square" lIns="0" tIns="0" rIns="0" bIns="0" rtlCol="0" anchor="ctr"/>
           <a:lstStyle/>
           <a:p>
-            <a:pPr indent="0" marL="0">
-              <a:buNone/>
-            </a:pPr>
-            <a:r>
-              <a:rPr lang="en-US" sz="1350" b="1" spc="30" kern="0" dirty="0">
+            <a:pPr marL="0" indent="0">
+              <a:buNone/>
+            </a:pPr>
+            <a:r>
+              <a:rPr lang="en-US" sz="1350" b="1" kern="0" spc="30" dirty="0">
                 <a:solidFill>
                   <a:srgbClr val="000000"/>
                 </a:solidFill>
@@ -11076,7 +12294,7 @@
           <a:bodyPr wrap="square" lIns="0" tIns="0" rIns="0" bIns="0" rtlCol="0" anchor="ctr"/>
           <a:lstStyle/>
           <a:p>
-            <a:pPr indent="0" marL="0">
+            <a:pPr marL="0" indent="0">
               <a:buNone/>
             </a:pPr>
             <a:r>
@@ -11094,6 +12312,36 @@
           </a:p>
         </p:txBody>
       </p:sp>
+      <p:pic>
+        <p:nvPicPr>
+          <p:cNvPr id="33" name="Picture 32">
+            <a:extLst>
+              <a:ext uri="{FF2B5EF4-FFF2-40B4-BE49-F238E27FC236}">
+                <a16:creationId xmlns:a16="http://schemas.microsoft.com/office/drawing/2014/main" id="{2AD7D7F3-CF13-E6D3-4784-BB42B6FE9C35}"/>
+              </a:ext>
+            </a:extLst>
+          </p:cNvPr>
+          <p:cNvPicPr>
+            <a:picLocks noChangeAspect="1"/>
+          </p:cNvPicPr>
+          <p:nvPr/>
+        </p:nvPicPr>
+        <p:blipFill>
+          <a:blip r:embed="rId3"/>
+          <a:stretch>
+            <a:fillRect/>
+          </a:stretch>
+        </p:blipFill>
+        <p:spPr>
+          <a:xfrm>
+            <a:off x="7808471" y="2452281"/>
+            <a:ext cx="3424942" cy="1929384"/>
+          </a:xfrm>
+          <a:prstGeom prst="rect">
+            <a:avLst/>
+          </a:prstGeom>
+        </p:spPr>
+      </p:pic>
     </p:spTree>
   </p:cSld>
   <p:clrMapOvr>
@@ -11110,6 +12358,7 @@
         <a:solidFill>
           <a:srgbClr val="FFFDF7"/>
         </a:solidFill>
+        <a:effectLst/>
       </p:bgPr>
     </p:bg>
     <p:spTree>
@@ -11148,6 +12397,13 @@
             <a:prstDash val="solid"/>
           </a:ln>
         </p:spPr>
+        <p:txBody>
+          <a:bodyPr/>
+          <a:lstStyle/>
+          <a:p>
+            <a:endParaRPr lang="en-US"/>
+          </a:p>
+        </p:txBody>
       </p:sp>
       <p:sp>
         <p:nvSpPr>
@@ -11170,11 +12426,11 @@
           <a:bodyPr wrap="square" lIns="0" tIns="0" rIns="0" bIns="0" rtlCol="0" anchor="ctr"/>
           <a:lstStyle/>
           <a:p>
-            <a:pPr indent="0" marL="0">
-              <a:buNone/>
-            </a:pPr>
-            <a:r>
-              <a:rPr lang="en-US" sz="3300" b="1" spc="-60" kern="0" dirty="0">
+            <a:pPr marL="0" indent="0">
+              <a:buNone/>
+            </a:pPr>
+            <a:r>
+              <a:rPr lang="en-US" sz="3300" b="1" kern="0" spc="-60" dirty="0">
                 <a:solidFill>
                   <a:srgbClr val="000000"/>
                 </a:solidFill>
@@ -11209,7 +12465,7 @@
           <a:bodyPr wrap="square" lIns="0" tIns="0" rIns="0" bIns="0" rtlCol="0" anchor="ctr"/>
           <a:lstStyle/>
           <a:p>
-            <a:pPr indent="0" marL="0">
+            <a:pPr marL="0" indent="0">
               <a:buNone/>
             </a:pPr>
             <a:r>
@@ -11251,6 +12507,13 @@
             <a:prstDash val="solid"/>
           </a:ln>
         </p:spPr>
+        <p:txBody>
+          <a:bodyPr/>
+          <a:lstStyle/>
+          <a:p>
+            <a:endParaRPr lang="en-US"/>
+          </a:p>
+        </p:txBody>
       </p:sp>
       <p:sp>
         <p:nvSpPr>
@@ -11276,6 +12539,13 @@
             <a:prstDash val="solid"/>
           </a:ln>
         </p:spPr>
+        <p:txBody>
+          <a:bodyPr/>
+          <a:lstStyle/>
+          <a:p>
+            <a:endParaRPr lang="en-US"/>
+          </a:p>
+        </p:txBody>
       </p:sp>
       <p:sp>
         <p:nvSpPr>
@@ -11298,7 +12568,7 @@
           <a:bodyPr wrap="square" lIns="0" tIns="0" rIns="0" bIns="0" rtlCol="0" anchor="ctr"/>
           <a:lstStyle/>
           <a:p>
-            <a:pPr algn="ctr" indent="0" marL="0">
+            <a:pPr marL="0" indent="0" algn="ctr">
               <a:buNone/>
             </a:pPr>
             <a:r>
@@ -11340,6 +12610,13 @@
             <a:prstDash val="solid"/>
           </a:ln>
         </p:spPr>
+        <p:txBody>
+          <a:bodyPr/>
+          <a:lstStyle/>
+          <a:p>
+            <a:endParaRPr lang="en-US"/>
+          </a:p>
+        </p:txBody>
       </p:sp>
       <p:sp>
         <p:nvSpPr>
@@ -11365,6 +12642,13 @@
             <a:prstDash val="solid"/>
           </a:ln>
         </p:spPr>
+        <p:txBody>
+          <a:bodyPr/>
+          <a:lstStyle/>
+          <a:p>
+            <a:endParaRPr lang="en-US"/>
+          </a:p>
+        </p:txBody>
       </p:sp>
       <p:sp>
         <p:nvSpPr>
@@ -11387,11 +12671,11 @@
           <a:bodyPr wrap="square" lIns="0" tIns="0" rIns="0" bIns="0" rtlCol="0" anchor="ctr"/>
           <a:lstStyle/>
           <a:p>
-            <a:pPr indent="0" marL="0">
-              <a:buNone/>
-            </a:pPr>
-            <a:r>
-              <a:rPr lang="en-US" sz="1350" b="1" spc="30" kern="0" dirty="0">
+            <a:pPr marL="0" indent="0">
+              <a:buNone/>
+            </a:pPr>
+            <a:r>
+              <a:rPr lang="en-US" sz="1350" b="1" kern="0" spc="30" dirty="0">
                 <a:solidFill>
                   <a:srgbClr val="000000"/>
                 </a:solidFill>
@@ -11426,7 +12710,7 @@
           <a:bodyPr wrap="square" lIns="0" tIns="0" rIns="0" bIns="0" rtlCol="0" anchor="ctr"/>
           <a:lstStyle/>
           <a:p>
-            <a:pPr indent="0" marL="0">
+            <a:pPr marL="0" indent="0">
               <a:buNone/>
             </a:pPr>
             <a:r>
@@ -11468,6 +12752,13 @@
             <a:prstDash val="solid"/>
           </a:ln>
         </p:spPr>
+        <p:txBody>
+          <a:bodyPr/>
+          <a:lstStyle/>
+          <a:p>
+            <a:endParaRPr lang="en-US"/>
+          </a:p>
+        </p:txBody>
       </p:sp>
       <p:sp>
         <p:nvSpPr>
@@ -11493,6 +12784,13 @@
             <a:prstDash val="solid"/>
           </a:ln>
         </p:spPr>
+        <p:txBody>
+          <a:bodyPr/>
+          <a:lstStyle/>
+          <a:p>
+            <a:endParaRPr lang="en-US"/>
+          </a:p>
+        </p:txBody>
       </p:sp>
       <p:sp>
         <p:nvSpPr>
@@ -11515,7 +12813,7 @@
           <a:bodyPr wrap="square" lIns="0" tIns="0" rIns="0" bIns="0" rtlCol="0" anchor="ctr"/>
           <a:lstStyle/>
           <a:p>
-            <a:pPr algn="ctr" indent="0" marL="0">
+            <a:pPr marL="0" indent="0" algn="ctr">
               <a:buNone/>
             </a:pPr>
             <a:r>
@@ -11557,6 +12855,13 @@
             <a:prstDash val="solid"/>
           </a:ln>
         </p:spPr>
+        <p:txBody>
+          <a:bodyPr/>
+          <a:lstStyle/>
+          <a:p>
+            <a:endParaRPr lang="en-US"/>
+          </a:p>
+        </p:txBody>
       </p:sp>
       <p:sp>
         <p:nvSpPr>
@@ -11582,6 +12887,13 @@
             <a:prstDash val="solid"/>
           </a:ln>
         </p:spPr>
+        <p:txBody>
+          <a:bodyPr/>
+          <a:lstStyle/>
+          <a:p>
+            <a:endParaRPr lang="en-US"/>
+          </a:p>
+        </p:txBody>
       </p:sp>
       <p:sp>
         <p:nvSpPr>
@@ -11604,11 +12916,11 @@
           <a:bodyPr wrap="square" lIns="0" tIns="0" rIns="0" bIns="0" rtlCol="0" anchor="ctr"/>
           <a:lstStyle/>
           <a:p>
-            <a:pPr indent="0" marL="0">
-              <a:buNone/>
-            </a:pPr>
-            <a:r>
-              <a:rPr lang="en-US" sz="1350" b="1" spc="30" kern="0" dirty="0">
+            <a:pPr marL="0" indent="0">
+              <a:buNone/>
+            </a:pPr>
+            <a:r>
+              <a:rPr lang="en-US" sz="1350" b="1" kern="0" spc="30" dirty="0">
                 <a:solidFill>
                   <a:srgbClr val="000000"/>
                 </a:solidFill>
@@ -11643,7 +12955,7 @@
           <a:bodyPr wrap="square" lIns="0" tIns="0" rIns="0" bIns="0" rtlCol="0" anchor="ctr"/>
           <a:lstStyle/>
           <a:p>
-            <a:pPr indent="0" marL="0">
+            <a:pPr marL="0" indent="0">
               <a:buNone/>
             </a:pPr>
             <a:r>
@@ -11685,6 +12997,13 @@
             <a:prstDash val="solid"/>
           </a:ln>
         </p:spPr>
+        <p:txBody>
+          <a:bodyPr/>
+          <a:lstStyle/>
+          <a:p>
+            <a:endParaRPr lang="en-US"/>
+          </a:p>
+        </p:txBody>
       </p:sp>
       <p:sp>
         <p:nvSpPr>
@@ -11710,6 +13029,13 @@
             <a:prstDash val="solid"/>
           </a:ln>
         </p:spPr>
+        <p:txBody>
+          <a:bodyPr/>
+          <a:lstStyle/>
+          <a:p>
+            <a:endParaRPr lang="en-US"/>
+          </a:p>
+        </p:txBody>
       </p:sp>
       <p:sp>
         <p:nvSpPr>
@@ -11732,7 +13058,7 @@
           <a:bodyPr wrap="square" lIns="0" tIns="0" rIns="0" bIns="0" rtlCol="0" anchor="ctr"/>
           <a:lstStyle/>
           <a:p>
-            <a:pPr algn="ctr" indent="0" marL="0">
+            <a:pPr marL="0" indent="0" algn="ctr">
               <a:buNone/>
             </a:pPr>
             <a:r>
@@ -11774,6 +13100,13 @@
             <a:prstDash val="solid"/>
           </a:ln>
         </p:spPr>
+        <p:txBody>
+          <a:bodyPr/>
+          <a:lstStyle/>
+          <a:p>
+            <a:endParaRPr lang="en-US"/>
+          </a:p>
+        </p:txBody>
       </p:sp>
       <p:sp>
         <p:nvSpPr>
@@ -11799,6 +13132,13 @@
             <a:prstDash val="solid"/>
           </a:ln>
         </p:spPr>
+        <p:txBody>
+          <a:bodyPr/>
+          <a:lstStyle/>
+          <a:p>
+            <a:endParaRPr lang="en-US"/>
+          </a:p>
+        </p:txBody>
       </p:sp>
       <p:sp>
         <p:nvSpPr>
@@ -11821,11 +13161,11 @@
           <a:bodyPr wrap="square" lIns="0" tIns="0" rIns="0" bIns="0" rtlCol="0" anchor="ctr"/>
           <a:lstStyle/>
           <a:p>
-            <a:pPr indent="0" marL="0">
-              <a:buNone/>
-            </a:pPr>
-            <a:r>
-              <a:rPr lang="en-US" sz="1350" b="1" spc="30" kern="0" dirty="0">
+            <a:pPr marL="0" indent="0">
+              <a:buNone/>
+            </a:pPr>
+            <a:r>
+              <a:rPr lang="en-US" sz="1350" b="1" kern="0" spc="30" dirty="0">
                 <a:solidFill>
                   <a:srgbClr val="000000"/>
                 </a:solidFill>
@@ -11860,7 +13200,7 @@
           <a:bodyPr wrap="square" lIns="0" tIns="0" rIns="0" bIns="0" rtlCol="0" anchor="ctr"/>
           <a:lstStyle/>
           <a:p>
-            <a:pPr indent="0" marL="0">
+            <a:pPr marL="0" indent="0">
               <a:buNone/>
             </a:pPr>
             <a:r>
@@ -11902,6 +13242,13 @@
             <a:prstDash val="solid"/>
           </a:ln>
         </p:spPr>
+        <p:txBody>
+          <a:bodyPr/>
+          <a:lstStyle/>
+          <a:p>
+            <a:endParaRPr lang="en-US"/>
+          </a:p>
+        </p:txBody>
       </p:sp>
       <p:sp>
         <p:nvSpPr>
@@ -11927,6 +13274,13 @@
             <a:prstDash val="solid"/>
           </a:ln>
         </p:spPr>
+        <p:txBody>
+          <a:bodyPr/>
+          <a:lstStyle/>
+          <a:p>
+            <a:endParaRPr lang="en-US"/>
+          </a:p>
+        </p:txBody>
       </p:sp>
       <p:sp>
         <p:nvSpPr>
@@ -11949,7 +13303,7 @@
           <a:bodyPr wrap="square" lIns="0" tIns="0" rIns="0" bIns="0" rtlCol="0" anchor="ctr"/>
           <a:lstStyle/>
           <a:p>
-            <a:pPr algn="ctr" indent="0" marL="0">
+            <a:pPr marL="0" indent="0" algn="ctr">
               <a:buNone/>
             </a:pPr>
             <a:r>
@@ -11991,6 +13345,13 @@
             <a:prstDash val="solid"/>
           </a:ln>
         </p:spPr>
+        <p:txBody>
+          <a:bodyPr/>
+          <a:lstStyle/>
+          <a:p>
+            <a:endParaRPr lang="en-US"/>
+          </a:p>
+        </p:txBody>
       </p:sp>
       <p:sp>
         <p:nvSpPr>
@@ -12016,6 +13377,13 @@
             <a:prstDash val="solid"/>
           </a:ln>
         </p:spPr>
+        <p:txBody>
+          <a:bodyPr/>
+          <a:lstStyle/>
+          <a:p>
+            <a:endParaRPr lang="en-US"/>
+          </a:p>
+        </p:txBody>
       </p:sp>
       <p:sp>
         <p:nvSpPr>
@@ -12038,11 +13406,11 @@
           <a:bodyPr wrap="square" lIns="0" tIns="0" rIns="0" bIns="0" rtlCol="0" anchor="ctr"/>
           <a:lstStyle/>
           <a:p>
-            <a:pPr indent="0" marL="0">
-              <a:buNone/>
-            </a:pPr>
-            <a:r>
-              <a:rPr lang="en-US" sz="1350" b="1" spc="30" kern="0" dirty="0">
+            <a:pPr marL="0" indent="0">
+              <a:buNone/>
+            </a:pPr>
+            <a:r>
+              <a:rPr lang="en-US" sz="1350" b="1" kern="0" spc="30" dirty="0">
                 <a:solidFill>
                   <a:srgbClr val="000000"/>
                 </a:solidFill>
@@ -12077,7 +13445,7 @@
           <a:bodyPr wrap="square" lIns="0" tIns="0" rIns="0" bIns="0" rtlCol="0" anchor="ctr"/>
           <a:lstStyle/>
           <a:p>
-            <a:pPr indent="0" marL="0">
+            <a:pPr marL="0" indent="0">
               <a:buNone/>
             </a:pPr>
             <a:r>
@@ -12111,6 +13479,7 @@
         <a:solidFill>
           <a:srgbClr val="FFFDF7"/>
         </a:solidFill>
+        <a:effectLst/>
       </p:bgPr>
     </p:bg>
     <p:spTree>
@@ -12149,6 +13518,13 @@
             <a:prstDash val="solid"/>
           </a:ln>
         </p:spPr>
+        <p:txBody>
+          <a:bodyPr/>
+          <a:lstStyle/>
+          <a:p>
+            <a:endParaRPr lang="en-US"/>
+          </a:p>
+        </p:txBody>
       </p:sp>
       <p:sp>
         <p:nvSpPr>
@@ -12171,11 +13547,11 @@
           <a:bodyPr wrap="square" lIns="0" tIns="0" rIns="0" bIns="0" rtlCol="0" anchor="ctr"/>
           <a:lstStyle/>
           <a:p>
-            <a:pPr indent="0" marL="0">
-              <a:buNone/>
-            </a:pPr>
-            <a:r>
-              <a:rPr lang="en-US" sz="3300" b="1" spc="-60" kern="0" dirty="0">
+            <a:pPr marL="0" indent="0">
+              <a:buNone/>
+            </a:pPr>
+            <a:r>
+              <a:rPr lang="en-US" sz="3300" b="1" kern="0" spc="-60" dirty="0">
                 <a:solidFill>
                   <a:srgbClr val="000000"/>
                 </a:solidFill>
@@ -12210,7 +13586,7 @@
           <a:bodyPr wrap="square" lIns="0" tIns="0" rIns="0" bIns="0" rtlCol="0" anchor="ctr"/>
           <a:lstStyle/>
           <a:p>
-            <a:pPr indent="0" marL="0">
+            <a:pPr marL="0" indent="0">
               <a:buNone/>
             </a:pPr>
             <a:r>
@@ -12252,6 +13628,13 @@
             <a:prstDash val="solid"/>
           </a:ln>
         </p:spPr>
+        <p:txBody>
+          <a:bodyPr/>
+          <a:lstStyle/>
+          <a:p>
+            <a:endParaRPr lang="en-US"/>
+          </a:p>
+        </p:txBody>
       </p:sp>
       <p:sp>
         <p:nvSpPr>
@@ -12277,6 +13660,13 @@
             <a:prstDash val="solid"/>
           </a:ln>
         </p:spPr>
+        <p:txBody>
+          <a:bodyPr/>
+          <a:lstStyle/>
+          <a:p>
+            <a:endParaRPr lang="en-US"/>
+          </a:p>
+        </p:txBody>
       </p:sp>
       <p:sp>
         <p:nvSpPr>
@@ -12302,6 +13692,13 @@
             <a:prstDash val="solid"/>
           </a:ln>
         </p:spPr>
+        <p:txBody>
+          <a:bodyPr/>
+          <a:lstStyle/>
+          <a:p>
+            <a:endParaRPr lang="en-US"/>
+          </a:p>
+        </p:txBody>
       </p:sp>
       <p:sp>
         <p:nvSpPr>
@@ -12324,11 +13721,11 @@
           <a:bodyPr wrap="square" lIns="0" tIns="0" rIns="0" bIns="0" rtlCol="0" anchor="ctr"/>
           <a:lstStyle/>
           <a:p>
-            <a:pPr algn="ctr" indent="0" marL="0">
-              <a:buNone/>
-            </a:pPr>
-            <a:r>
-              <a:rPr lang="en-US" sz="1050" b="1" spc="60" kern="0" dirty="0">
+            <a:pPr marL="0" indent="0" algn="ctr">
+              <a:buNone/>
+            </a:pPr>
+            <a:r>
+              <a:rPr lang="en-US" sz="1050" b="1" kern="0" spc="60" dirty="0">
                 <a:solidFill>
                   <a:srgbClr val="000000"/>
                 </a:solidFill>
@@ -12363,11 +13760,11 @@
           <a:bodyPr wrap="square" lIns="0" tIns="0" rIns="0" bIns="0" rtlCol="0" anchor="ctr"/>
           <a:lstStyle/>
           <a:p>
-            <a:pPr indent="0" marL="0">
-              <a:buNone/>
-            </a:pPr>
-            <a:r>
-              <a:rPr lang="en-US" sz="1500" b="1" spc="-20" kern="0" dirty="0">
+            <a:pPr marL="0" indent="0">
+              <a:buNone/>
+            </a:pPr>
+            <a:r>
+              <a:rPr lang="en-US" sz="1500" b="1" kern="0" spc="-20" dirty="0">
                 <a:solidFill>
                   <a:srgbClr val="000000"/>
                 </a:solidFill>
@@ -12402,7 +13799,7 @@
           <a:bodyPr wrap="square" lIns="0" tIns="0" rIns="0" bIns="0" rtlCol="0" anchor="ctr"/>
           <a:lstStyle/>
           <a:p>
-            <a:pPr indent="0" marL="0">
+            <a:pPr marL="0" indent="0">
               <a:buNone/>
             </a:pPr>
             <a:r>
@@ -12441,11 +13838,11 @@
           <a:bodyPr wrap="square" lIns="0" tIns="0" rIns="0" bIns="0" rtlCol="0" anchor="ctr"/>
           <a:lstStyle/>
           <a:p>
-            <a:pPr indent="0" marL="0">
-              <a:buNone/>
-            </a:pPr>
-            <a:r>
-              <a:rPr lang="en-US" sz="1050" b="1" spc="40" kern="0" dirty="0">
+            <a:pPr marL="0" indent="0">
+              <a:buNone/>
+            </a:pPr>
+            <a:r>
+              <a:rPr lang="en-US" sz="1050" b="1" kern="0" spc="40" dirty="0">
                 <a:solidFill>
                   <a:srgbClr val="000000"/>
                 </a:solidFill>
@@ -12483,6 +13880,13 @@
             <a:prstDash val="solid"/>
           </a:ln>
         </p:spPr>
+        <p:txBody>
+          <a:bodyPr/>
+          <a:lstStyle/>
+          <a:p>
+            <a:endParaRPr lang="en-US"/>
+          </a:p>
+        </p:txBody>
       </p:sp>
       <p:sp>
         <p:nvSpPr>
@@ -12508,6 +13912,13 @@
             <a:prstDash val="solid"/>
           </a:ln>
         </p:spPr>
+        <p:txBody>
+          <a:bodyPr/>
+          <a:lstStyle/>
+          <a:p>
+            <a:endParaRPr lang="en-US"/>
+          </a:p>
+        </p:txBody>
       </p:sp>
       <p:sp>
         <p:nvSpPr>
@@ -12533,6 +13944,13 @@
             <a:prstDash val="solid"/>
           </a:ln>
         </p:spPr>
+        <p:txBody>
+          <a:bodyPr/>
+          <a:lstStyle/>
+          <a:p>
+            <a:endParaRPr lang="en-US"/>
+          </a:p>
+        </p:txBody>
       </p:sp>
       <p:sp>
         <p:nvSpPr>
@@ -12555,11 +13973,11 @@
           <a:bodyPr wrap="square" lIns="0" tIns="0" rIns="0" bIns="0" rtlCol="0" anchor="ctr"/>
           <a:lstStyle/>
           <a:p>
-            <a:pPr algn="ctr" indent="0" marL="0">
-              <a:buNone/>
-            </a:pPr>
-            <a:r>
-              <a:rPr lang="en-US" sz="1050" b="1" spc="60" kern="0" dirty="0">
+            <a:pPr marL="0" indent="0" algn="ctr">
+              <a:buNone/>
+            </a:pPr>
+            <a:r>
+              <a:rPr lang="en-US" sz="1050" b="1" kern="0" spc="60" dirty="0">
                 <a:solidFill>
                   <a:srgbClr val="000000"/>
                 </a:solidFill>
@@ -12594,11 +14012,11 @@
           <a:bodyPr wrap="square" lIns="0" tIns="0" rIns="0" bIns="0" rtlCol="0" anchor="ctr"/>
           <a:lstStyle/>
           <a:p>
-            <a:pPr indent="0" marL="0">
-              <a:buNone/>
-            </a:pPr>
-            <a:r>
-              <a:rPr lang="en-US" sz="1500" b="1" spc="-20" kern="0" dirty="0">
+            <a:pPr marL="0" indent="0">
+              <a:buNone/>
+            </a:pPr>
+            <a:r>
+              <a:rPr lang="en-US" sz="1500" b="1" kern="0" spc="-20" dirty="0">
                 <a:solidFill>
                   <a:srgbClr val="000000"/>
                 </a:solidFill>
@@ -12633,7 +14051,7 @@
           <a:bodyPr wrap="square" lIns="0" tIns="0" rIns="0" bIns="0" rtlCol="0" anchor="ctr"/>
           <a:lstStyle/>
           <a:p>
-            <a:pPr indent="0" marL="0">
+            <a:pPr marL="0" indent="0">
               <a:buNone/>
             </a:pPr>
             <a:r>
@@ -12672,11 +14090,11 @@
           <a:bodyPr wrap="square" lIns="0" tIns="0" rIns="0" bIns="0" rtlCol="0" anchor="ctr"/>
           <a:lstStyle/>
           <a:p>
-            <a:pPr indent="0" marL="0">
-              <a:buNone/>
-            </a:pPr>
-            <a:r>
-              <a:rPr lang="en-US" sz="1050" b="1" spc="40" kern="0" dirty="0">
+            <a:pPr marL="0" indent="0">
+              <a:buNone/>
+            </a:pPr>
+            <a:r>
+              <a:rPr lang="en-US" sz="1050" b="1" kern="0" spc="40" dirty="0">
                 <a:solidFill>
                   <a:srgbClr val="000000"/>
                 </a:solidFill>
@@ -12714,6 +14132,13 @@
             <a:prstDash val="solid"/>
           </a:ln>
         </p:spPr>
+        <p:txBody>
+          <a:bodyPr/>
+          <a:lstStyle/>
+          <a:p>
+            <a:endParaRPr lang="en-US"/>
+          </a:p>
+        </p:txBody>
       </p:sp>
       <p:sp>
         <p:nvSpPr>
@@ -12739,6 +14164,13 @@
             <a:prstDash val="solid"/>
           </a:ln>
         </p:spPr>
+        <p:txBody>
+          <a:bodyPr/>
+          <a:lstStyle/>
+          <a:p>
+            <a:endParaRPr lang="en-US"/>
+          </a:p>
+        </p:txBody>
       </p:sp>
       <p:sp>
         <p:nvSpPr>
@@ -12764,6 +14196,13 @@
             <a:prstDash val="solid"/>
           </a:ln>
         </p:spPr>
+        <p:txBody>
+          <a:bodyPr/>
+          <a:lstStyle/>
+          <a:p>
+            <a:endParaRPr lang="en-US"/>
+          </a:p>
+        </p:txBody>
       </p:sp>
       <p:sp>
         <p:nvSpPr>
@@ -12786,11 +14225,11 @@
           <a:bodyPr wrap="square" lIns="0" tIns="0" rIns="0" bIns="0" rtlCol="0" anchor="ctr"/>
           <a:lstStyle/>
           <a:p>
-            <a:pPr algn="ctr" indent="0" marL="0">
-              <a:buNone/>
-            </a:pPr>
-            <a:r>
-              <a:rPr lang="en-US" sz="1050" b="1" spc="60" kern="0" dirty="0">
+            <a:pPr marL="0" indent="0" algn="ctr">
+              <a:buNone/>
+            </a:pPr>
+            <a:r>
+              <a:rPr lang="en-US" sz="1050" b="1" kern="0" spc="60" dirty="0">
                 <a:solidFill>
                   <a:srgbClr val="000000"/>
                 </a:solidFill>
@@ -12825,11 +14264,11 @@
           <a:bodyPr wrap="square" lIns="0" tIns="0" rIns="0" bIns="0" rtlCol="0" anchor="ctr"/>
           <a:lstStyle/>
           <a:p>
-            <a:pPr indent="0" marL="0">
-              <a:buNone/>
-            </a:pPr>
-            <a:r>
-              <a:rPr lang="en-US" sz="1500" b="1" spc="-20" kern="0" dirty="0">
+            <a:pPr marL="0" indent="0">
+              <a:buNone/>
+            </a:pPr>
+            <a:r>
+              <a:rPr lang="en-US" sz="1500" b="1" kern="0" spc="-20" dirty="0">
                 <a:solidFill>
                   <a:srgbClr val="000000"/>
                 </a:solidFill>
@@ -12864,7 +14303,7 @@
           <a:bodyPr wrap="square" lIns="0" tIns="0" rIns="0" bIns="0" rtlCol="0" anchor="ctr"/>
           <a:lstStyle/>
           <a:p>
-            <a:pPr indent="0" marL="0">
+            <a:pPr marL="0" indent="0">
               <a:buNone/>
             </a:pPr>
             <a:r>
@@ -12903,11 +14342,11 @@
           <a:bodyPr wrap="square" lIns="0" tIns="0" rIns="0" bIns="0" rtlCol="0" anchor="ctr"/>
           <a:lstStyle/>
           <a:p>
-            <a:pPr indent="0" marL="0">
-              <a:buNone/>
-            </a:pPr>
-            <a:r>
-              <a:rPr lang="en-US" sz="1050" b="1" spc="40" kern="0" dirty="0">
+            <a:pPr marL="0" indent="0">
+              <a:buNone/>
+            </a:pPr>
+            <a:r>
+              <a:rPr lang="en-US" sz="1050" b="1" kern="0" spc="40" dirty="0">
                 <a:solidFill>
                   <a:srgbClr val="000000"/>
                 </a:solidFill>
@@ -12945,6 +14384,13 @@
             <a:prstDash val="solid"/>
           </a:ln>
         </p:spPr>
+        <p:txBody>
+          <a:bodyPr/>
+          <a:lstStyle/>
+          <a:p>
+            <a:endParaRPr lang="en-US"/>
+          </a:p>
+        </p:txBody>
       </p:sp>
       <p:sp>
         <p:nvSpPr>
@@ -12970,6 +14416,13 @@
             <a:prstDash val="solid"/>
           </a:ln>
         </p:spPr>
+        <p:txBody>
+          <a:bodyPr/>
+          <a:lstStyle/>
+          <a:p>
+            <a:endParaRPr lang="en-US"/>
+          </a:p>
+        </p:txBody>
       </p:sp>
       <p:sp>
         <p:nvSpPr>
@@ -12995,6 +14448,13 @@
             <a:prstDash val="solid"/>
           </a:ln>
         </p:spPr>
+        <p:txBody>
+          <a:bodyPr/>
+          <a:lstStyle/>
+          <a:p>
+            <a:endParaRPr lang="en-US"/>
+          </a:p>
+        </p:txBody>
       </p:sp>
       <p:sp>
         <p:nvSpPr>
@@ -13017,11 +14477,11 @@
           <a:bodyPr wrap="square" lIns="0" tIns="0" rIns="0" bIns="0" rtlCol="0" anchor="ctr"/>
           <a:lstStyle/>
           <a:p>
-            <a:pPr algn="ctr" indent="0" marL="0">
-              <a:buNone/>
-            </a:pPr>
-            <a:r>
-              <a:rPr lang="en-US" sz="1050" b="1" spc="60" kern="0" dirty="0">
+            <a:pPr marL="0" indent="0" algn="ctr">
+              <a:buNone/>
+            </a:pPr>
+            <a:r>
+              <a:rPr lang="en-US" sz="1050" b="1" kern="0" spc="60" dirty="0">
                 <a:solidFill>
                   <a:srgbClr val="000000"/>
                 </a:solidFill>
@@ -13056,11 +14516,11 @@
           <a:bodyPr wrap="square" lIns="0" tIns="0" rIns="0" bIns="0" rtlCol="0" anchor="ctr"/>
           <a:lstStyle/>
           <a:p>
-            <a:pPr indent="0" marL="0">
-              <a:buNone/>
-            </a:pPr>
-            <a:r>
-              <a:rPr lang="en-US" sz="1500" b="1" spc="-20" kern="0" dirty="0">
+            <a:pPr marL="0" indent="0">
+              <a:buNone/>
+            </a:pPr>
+            <a:r>
+              <a:rPr lang="en-US" sz="1500" b="1" kern="0" spc="-20" dirty="0">
                 <a:solidFill>
                   <a:srgbClr val="000000"/>
                 </a:solidFill>
@@ -13095,7 +14555,7 @@
           <a:bodyPr wrap="square" lIns="0" tIns="0" rIns="0" bIns="0" rtlCol="0" anchor="ctr"/>
           <a:lstStyle/>
           <a:p>
-            <a:pPr indent="0" marL="0">
+            <a:pPr marL="0" indent="0">
               <a:buNone/>
             </a:pPr>
             <a:r>
@@ -13134,11 +14594,11 @@
           <a:bodyPr wrap="square" lIns="0" tIns="0" rIns="0" bIns="0" rtlCol="0" anchor="ctr"/>
           <a:lstStyle/>
           <a:p>
-            <a:pPr indent="0" marL="0">
-              <a:buNone/>
-            </a:pPr>
-            <a:r>
-              <a:rPr lang="en-US" sz="1050" b="1" spc="40" kern="0" dirty="0">
+            <a:pPr marL="0" indent="0">
+              <a:buNone/>
+            </a:pPr>
+            <a:r>
+              <a:rPr lang="en-US" sz="1050" b="1" kern="0" spc="40" dirty="0">
                 <a:solidFill>
                   <a:srgbClr val="000000"/>
                 </a:solidFill>
@@ -13146,9 +14606,8 @@
                 <a:ea typeface="Arial" pitchFamily="34" charset="-122"/>
                 <a:cs typeface="Arial" pitchFamily="34" charset="-120"/>
               </a:rPr>
-              <a:t>3D-PRINTED VAULT</a:t>
-            </a:r>
-            <a:endParaRPr lang="en-US" sz="1050" dirty="0"/>
+              <a:t>3D-PRINTED SYSTEM</a:t>
+            </a:r>
           </a:p>
         </p:txBody>
       </p:sp>
@@ -13176,6 +14635,13 @@
             <a:prstDash val="solid"/>
           </a:ln>
         </p:spPr>
+        <p:txBody>
+          <a:bodyPr/>
+          <a:lstStyle/>
+          <a:p>
+            <a:endParaRPr lang="en-US"/>
+          </a:p>
+        </p:txBody>
       </p:sp>
       <p:sp>
         <p:nvSpPr>
@@ -13201,6 +14667,13 @@
             <a:prstDash val="solid"/>
           </a:ln>
         </p:spPr>
+        <p:txBody>
+          <a:bodyPr/>
+          <a:lstStyle/>
+          <a:p>
+            <a:endParaRPr lang="en-US"/>
+          </a:p>
+        </p:txBody>
       </p:sp>
       <p:sp>
         <p:nvSpPr>
@@ -13226,6 +14699,13 @@
             <a:prstDash val="solid"/>
           </a:ln>
         </p:spPr>
+        <p:txBody>
+          <a:bodyPr/>
+          <a:lstStyle/>
+          <a:p>
+            <a:endParaRPr lang="en-US"/>
+          </a:p>
+        </p:txBody>
       </p:sp>
       <p:sp>
         <p:nvSpPr>
@@ -13248,11 +14728,11 @@
           <a:bodyPr wrap="square" lIns="0" tIns="0" rIns="0" bIns="0" rtlCol="0" anchor="ctr"/>
           <a:lstStyle/>
           <a:p>
-            <a:pPr algn="ctr" indent="0" marL="0">
-              <a:buNone/>
-            </a:pPr>
-            <a:r>
-              <a:rPr lang="en-US" sz="1050" b="1" spc="60" kern="0" dirty="0">
+            <a:pPr marL="0" indent="0" algn="ctr">
+              <a:buNone/>
+            </a:pPr>
+            <a:r>
+              <a:rPr lang="en-US" sz="1050" b="1" kern="0" spc="60" dirty="0">
                 <a:solidFill>
                   <a:srgbClr val="000000"/>
                 </a:solidFill>
@@ -13287,11 +14767,11 @@
           <a:bodyPr wrap="square" lIns="0" tIns="0" rIns="0" bIns="0" rtlCol="0" anchor="ctr"/>
           <a:lstStyle/>
           <a:p>
-            <a:pPr indent="0" marL="0">
-              <a:buNone/>
-            </a:pPr>
-            <a:r>
-              <a:rPr lang="en-US" sz="1500" b="1" spc="-20" kern="0" dirty="0">
+            <a:pPr marL="0" indent="0">
+              <a:buNone/>
+            </a:pPr>
+            <a:r>
+              <a:rPr lang="en-US" sz="1500" b="1" kern="0" spc="-20" dirty="0">
                 <a:solidFill>
                   <a:srgbClr val="000000"/>
                 </a:solidFill>
@@ -13326,7 +14806,7 @@
           <a:bodyPr wrap="square" lIns="0" tIns="0" rIns="0" bIns="0" rtlCol="0" anchor="ctr"/>
           <a:lstStyle/>
           <a:p>
-            <a:pPr indent="0" marL="0">
+            <a:pPr marL="0" indent="0">
               <a:buNone/>
             </a:pPr>
             <a:r>
@@ -13365,11 +14845,11 @@
           <a:bodyPr wrap="square" lIns="0" tIns="0" rIns="0" bIns="0" rtlCol="0" anchor="ctr"/>
           <a:lstStyle/>
           <a:p>
-            <a:pPr indent="0" marL="0">
-              <a:buNone/>
-            </a:pPr>
-            <a:r>
-              <a:rPr lang="en-US" sz="1050" b="1" spc="40" kern="0" dirty="0">
+            <a:pPr marL="0" indent="0">
+              <a:buNone/>
+            </a:pPr>
+            <a:r>
+              <a:rPr lang="en-US" sz="1050" b="1" kern="0" spc="40" dirty="0">
                 <a:solidFill>
                   <a:srgbClr val="000000"/>
                 </a:solidFill>
@@ -13684,4 +15164,319 @@
     </a:ext>
   </a:extLst>
 </a:theme>
+</file>
+
+<file path=ppt/theme/theme2.xml><?xml version="1.0" encoding="utf-8"?>
+<a:theme xmlns:a="http://schemas.openxmlformats.org/drawingml/2006/main" name="Office Theme">
+  <a:themeElements>
+    <a:clrScheme name="Office">
+      <a:dk1>
+        <a:sysClr val="windowText" lastClr="000000"/>
+      </a:dk1>
+      <a:lt1>
+        <a:sysClr val="window" lastClr="FFFFFF"/>
+      </a:lt1>
+      <a:dk2>
+        <a:srgbClr val="0E2841"/>
+      </a:dk2>
+      <a:lt2>
+        <a:srgbClr val="E8E8E8"/>
+      </a:lt2>
+      <a:accent1>
+        <a:srgbClr val="156082"/>
+      </a:accent1>
+      <a:accent2>
+        <a:srgbClr val="E97132"/>
+      </a:accent2>
+      <a:accent3>
+        <a:srgbClr val="196B24"/>
+      </a:accent3>
+      <a:accent4>
+        <a:srgbClr val="0F9ED5"/>
+      </a:accent4>
+      <a:accent5>
+        <a:srgbClr val="A02B93"/>
+      </a:accent5>
+      <a:accent6>
+        <a:srgbClr val="4EA72E"/>
+      </a:accent6>
+      <a:hlink>
+        <a:srgbClr val="467886"/>
+      </a:hlink>
+      <a:folHlink>
+        <a:srgbClr val="96607D"/>
+      </a:folHlink>
+    </a:clrScheme>
+    <a:fontScheme name="Office">
+      <a:majorFont>
+        <a:latin typeface="Aptos Display" panose="02110004020202020204"/>
+        <a:ea typeface=""/>
+        <a:cs typeface=""/>
+        <a:font script="Jpan" typeface="游ゴシック Light"/>
+        <a:font script="Hang" typeface="맑은 고딕"/>
+        <a:font script="Hans" typeface="等线 Light"/>
+        <a:font script="Hant" typeface="新細明體"/>
+        <a:font script="Arab" typeface="Times New Roman"/>
+        <a:font script="Hebr" typeface="Times New Roman"/>
+        <a:font script="Thai" typeface="Angsana New"/>
+        <a:font script="Ethi" typeface="Nyala"/>
+        <a:font script="Beng" typeface="Vrinda"/>
+        <a:font script="Gujr" typeface="Shruti"/>
+        <a:font script="Khmr" typeface="MoolBoran"/>
+        <a:font script="Knda" typeface="Tunga"/>
+        <a:font script="Guru" typeface="Raavi"/>
+        <a:font script="Cans" typeface="Euphemia"/>
+        <a:font script="Cher" typeface="Plantagenet Cherokee"/>
+        <a:font script="Yiii" typeface="Microsoft Yi Baiti"/>
+        <a:font script="Tibt" typeface="Microsoft Himalaya"/>
+        <a:font script="Thaa" typeface="MV Boli"/>
+        <a:font script="Deva" typeface="Mangal"/>
+        <a:font script="Telu" typeface="Gautami"/>
+        <a:font script="Taml" typeface="Latha"/>
+        <a:font script="Syrc" typeface="Estrangelo Edessa"/>
+        <a:font script="Orya" typeface="Kalinga"/>
+        <a:font script="Mlym" typeface="Kartika"/>
+        <a:font script="Laoo" typeface="DokChampa"/>
+        <a:font script="Sinh" typeface="Iskoola Pota"/>
+        <a:font script="Mong" typeface="Mongolian Baiti"/>
+        <a:font script="Viet" typeface="Times New Roman"/>
+        <a:font script="Uigh" typeface="Microsoft Uighur"/>
+        <a:font script="Geor" typeface="Sylfaen"/>
+        <a:font script="Armn" typeface="Arial"/>
+        <a:font script="Bugi" typeface="Leelawadee UI"/>
+        <a:font script="Bopo" typeface="Microsoft JhengHei"/>
+        <a:font script="Java" typeface="Javanese Text"/>
+        <a:font script="Lisu" typeface="Segoe UI"/>
+        <a:font script="Mymr" typeface="Myanmar Text"/>
+        <a:font script="Nkoo" typeface="Ebrima"/>
+        <a:font script="Olck" typeface="Nirmala UI"/>
+        <a:font script="Osma" typeface="Ebrima"/>
+        <a:font script="Phag" typeface="Phagspa"/>
+        <a:font script="Syrn" typeface="Estrangelo Edessa"/>
+        <a:font script="Syrj" typeface="Estrangelo Edessa"/>
+        <a:font script="Syre" typeface="Estrangelo Edessa"/>
+        <a:font script="Sora" typeface="Nirmala UI"/>
+        <a:font script="Tale" typeface="Microsoft Tai Le"/>
+        <a:font script="Talu" typeface="Microsoft New Tai Lue"/>
+        <a:font script="Tfng" typeface="Ebrima"/>
+      </a:majorFont>
+      <a:minorFont>
+        <a:latin typeface="Aptos" panose="02110004020202020204"/>
+        <a:ea typeface=""/>
+        <a:cs typeface=""/>
+        <a:font script="Jpan" typeface="游ゴシック"/>
+        <a:font script="Hang" typeface="맑은 고딕"/>
+        <a:font script="Hans" typeface="等线"/>
+        <a:font script="Hant" typeface="新細明體"/>
+        <a:font script="Arab" typeface="Arial"/>
+        <a:font script="Hebr" typeface="Arial"/>
+        <a:font script="Thai" typeface="Cordia New"/>
+        <a:font script="Ethi" typeface="Nyala"/>
+        <a:font script="Beng" typeface="Vrinda"/>
+        <a:font script="Gujr" typeface="Shruti"/>
+        <a:font script="Khmr" typeface="DaunPenh"/>
+        <a:font script="Knda" typeface="Tunga"/>
+        <a:font script="Guru" typeface="Raavi"/>
+        <a:font script="Cans" typeface="Euphemia"/>
+        <a:font script="Cher" typeface="Plantagenet Cherokee"/>
+        <a:font script="Yiii" typeface="Microsoft Yi Baiti"/>
+        <a:font script="Tibt" typeface="Microsoft Himalaya"/>
+        <a:font script="Thaa" typeface="MV Boli"/>
+        <a:font script="Deva" typeface="Mangal"/>
+        <a:font script="Telu" typeface="Gautami"/>
+        <a:font script="Taml" typeface="Latha"/>
+        <a:font script="Syrc" typeface="Estrangelo Edessa"/>
+        <a:font script="Orya" typeface="Kalinga"/>
+        <a:font script="Mlym" typeface="Kartika"/>
+        <a:font script="Laoo" typeface="DokChampa"/>
+        <a:font script="Sinh" typeface="Iskoola Pota"/>
+        <a:font script="Mong" typeface="Mongolian Baiti"/>
+        <a:font script="Viet" typeface="Arial"/>
+        <a:font script="Uigh" typeface="Microsoft Uighur"/>
+        <a:font script="Geor" typeface="Sylfaen"/>
+        <a:font script="Armn" typeface="Arial"/>
+        <a:font script="Bugi" typeface="Leelawadee UI"/>
+        <a:font script="Bopo" typeface="Microsoft JhengHei"/>
+        <a:font script="Java" typeface="Javanese Text"/>
+        <a:font script="Lisu" typeface="Segoe UI"/>
+        <a:font script="Mymr" typeface="Myanmar Text"/>
+        <a:font script="Nkoo" typeface="Ebrima"/>
+        <a:font script="Olck" typeface="Nirmala UI"/>
+        <a:font script="Osma" typeface="Ebrima"/>
+        <a:font script="Phag" typeface="Phagspa"/>
+        <a:font script="Syrn" typeface="Estrangelo Edessa"/>
+        <a:font script="Syrj" typeface="Estrangelo Edessa"/>
+        <a:font script="Syre" typeface="Estrangelo Edessa"/>
+        <a:font script="Sora" typeface="Nirmala UI"/>
+        <a:font script="Tale" typeface="Microsoft Tai Le"/>
+        <a:font script="Talu" typeface="Microsoft New Tai Lue"/>
+        <a:font script="Tfng" typeface="Ebrima"/>
+      </a:minorFont>
+    </a:fontScheme>
+    <a:fmtScheme name="Office">
+      <a:fillStyleLst>
+        <a:solidFill>
+          <a:schemeClr val="phClr"/>
+        </a:solidFill>
+        <a:gradFill rotWithShape="1">
+          <a:gsLst>
+            <a:gs pos="0">
+              <a:schemeClr val="phClr">
+                <a:lumMod val="110000"/>
+                <a:satMod val="105000"/>
+                <a:tint val="67000"/>
+              </a:schemeClr>
+            </a:gs>
+            <a:gs pos="50000">
+              <a:schemeClr val="phClr">
+                <a:lumMod val="105000"/>
+                <a:satMod val="103000"/>
+                <a:tint val="73000"/>
+              </a:schemeClr>
+            </a:gs>
+            <a:gs pos="100000">
+              <a:schemeClr val="phClr">
+                <a:lumMod val="105000"/>
+                <a:satMod val="109000"/>
+                <a:tint val="81000"/>
+              </a:schemeClr>
+            </a:gs>
+          </a:gsLst>
+          <a:lin ang="5400000" scaled="0"/>
+        </a:gradFill>
+        <a:gradFill rotWithShape="1">
+          <a:gsLst>
+            <a:gs pos="0">
+              <a:schemeClr val="phClr">
+                <a:satMod val="103000"/>
+                <a:lumMod val="102000"/>
+                <a:tint val="94000"/>
+              </a:schemeClr>
+            </a:gs>
+            <a:gs pos="50000">
+              <a:schemeClr val="phClr">
+                <a:satMod val="110000"/>
+                <a:lumMod val="100000"/>
+                <a:shade val="100000"/>
+              </a:schemeClr>
+            </a:gs>
+            <a:gs pos="100000">
+              <a:schemeClr val="phClr">
+                <a:lumMod val="99000"/>
+                <a:satMod val="120000"/>
+                <a:shade val="78000"/>
+              </a:schemeClr>
+            </a:gs>
+          </a:gsLst>
+          <a:lin ang="5400000" scaled="0"/>
+        </a:gradFill>
+      </a:fillStyleLst>
+      <a:lnStyleLst>
+        <a:ln w="12700" cap="flat" cmpd="sng" algn="ctr">
+          <a:solidFill>
+            <a:schemeClr val="phClr"/>
+          </a:solidFill>
+          <a:prstDash val="solid"/>
+          <a:miter lim="800000"/>
+        </a:ln>
+        <a:ln w="19050" cap="flat" cmpd="sng" algn="ctr">
+          <a:solidFill>
+            <a:schemeClr val="phClr"/>
+          </a:solidFill>
+          <a:prstDash val="solid"/>
+          <a:miter lim="800000"/>
+        </a:ln>
+        <a:ln w="25400" cap="flat" cmpd="sng" algn="ctr">
+          <a:solidFill>
+            <a:schemeClr val="phClr"/>
+          </a:solidFill>
+          <a:prstDash val="solid"/>
+          <a:miter lim="800000"/>
+        </a:ln>
+      </a:lnStyleLst>
+      <a:effectStyleLst>
+        <a:effectStyle>
+          <a:effectLst/>
+        </a:effectStyle>
+        <a:effectStyle>
+          <a:effectLst/>
+        </a:effectStyle>
+        <a:effectStyle>
+          <a:effectLst>
+            <a:outerShdw blurRad="57150" dist="19050" dir="5400000" algn="ctr" rotWithShape="0">
+              <a:srgbClr val="000000">
+                <a:alpha val="63000"/>
+              </a:srgbClr>
+            </a:outerShdw>
+          </a:effectLst>
+        </a:effectStyle>
+      </a:effectStyleLst>
+      <a:bgFillStyleLst>
+        <a:solidFill>
+          <a:schemeClr val="phClr"/>
+        </a:solidFill>
+        <a:solidFill>
+          <a:schemeClr val="phClr">
+            <a:tint val="95000"/>
+            <a:satMod val="170000"/>
+          </a:schemeClr>
+        </a:solidFill>
+        <a:gradFill rotWithShape="1">
+          <a:gsLst>
+            <a:gs pos="0">
+              <a:schemeClr val="phClr">
+                <a:tint val="93000"/>
+                <a:satMod val="150000"/>
+                <a:shade val="98000"/>
+                <a:lumMod val="102000"/>
+              </a:schemeClr>
+            </a:gs>
+            <a:gs pos="50000">
+              <a:schemeClr val="phClr">
+                <a:tint val="98000"/>
+                <a:satMod val="130000"/>
+                <a:shade val="90000"/>
+                <a:lumMod val="103000"/>
+              </a:schemeClr>
+            </a:gs>
+            <a:gs pos="100000">
+              <a:schemeClr val="phClr">
+                <a:shade val="63000"/>
+                <a:satMod val="120000"/>
+              </a:schemeClr>
+            </a:gs>
+          </a:gsLst>
+          <a:lin ang="5400000" scaled="0"/>
+        </a:gradFill>
+      </a:bgFillStyleLst>
+    </a:fmtScheme>
+  </a:themeElements>
+  <a:objectDefaults>
+    <a:lnDef>
+      <a:spPr/>
+      <a:bodyPr/>
+      <a:lstStyle/>
+      <a:style>
+        <a:lnRef idx="2">
+          <a:schemeClr val="accent1"/>
+        </a:lnRef>
+        <a:fillRef idx="0">
+          <a:schemeClr val="accent1"/>
+        </a:fillRef>
+        <a:effectRef idx="1">
+          <a:schemeClr val="accent1"/>
+        </a:effectRef>
+        <a:fontRef idx="minor">
+          <a:schemeClr val="tx1"/>
+        </a:fontRef>
+      </a:style>
+    </a:lnDef>
+  </a:objectDefaults>
+  <a:extraClrSchemeLst/>
+  <a:extLst>
+    <a:ext uri="{05A4C25C-085E-4340-85A3-A5531E510DB2}">
+      <thm15:themeFamily xmlns:thm15="http://schemas.microsoft.com/office/thememl/2012/main" name="Office Theme" id="{2E142A2C-CD16-42D6-873A-C26D2A0506FA}" vid="{1BDDFF52-6CD6-40A5-AB3C-68EB2F1E4D0A}"/>
+    </a:ext>
+  </a:extLst>
+</a:theme>
 </file>
--- a/slides/ARC3133_Class01.pptx
+++ b/slides/ARC3133_Class01.pptx
@@ -3179,7 +3179,7 @@
                 </a:solidFill>
                 <a:latin typeface="Arial"/>
               </a:rPr>
-              <a:t>CLASS 01  /  AUG 25  /  U01</a:t>
+              <a:t>CLASS 01  /  AUG 25</a:t>
             </a:r>
           </a:p>
         </p:txBody>
@@ -3757,7 +3757,7 @@
         <p:spPr>
           <a:xfrm>
             <a:off x="662940" y="1851660"/>
-            <a:ext cx="777240" cy="941831"/>
+            <a:ext cx="777240" cy="724204"/>
           </a:xfrm>
           <a:prstGeom prst="rect">
             <a:avLst/>
@@ -3801,7 +3801,7 @@
         <p:spPr>
           <a:xfrm>
             <a:off x="594360" y="1783080"/>
-            <a:ext cx="777240" cy="941831"/>
+            <a:ext cx="777240" cy="724204"/>
           </a:xfrm>
           <a:prstGeom prst="rect">
             <a:avLst/>
@@ -3844,7 +3844,7 @@
         </p:nvSpPr>
         <p:spPr>
           <a:xfrm>
-            <a:off x="594360" y="2153412"/>
+            <a:off x="594360" y="2044598"/>
             <a:ext cx="777240" cy="274320"/>
           </a:xfrm>
           <a:prstGeom prst="rect">
@@ -3880,7 +3880,7 @@
         <p:spPr>
           <a:xfrm>
             <a:off x="1714499" y="1851660"/>
-            <a:ext cx="9921240" cy="941831"/>
+            <a:ext cx="9921240" cy="724204"/>
           </a:xfrm>
           <a:prstGeom prst="rect">
             <a:avLst/>
@@ -3924,7 +3924,7 @@
         <p:spPr>
           <a:xfrm>
             <a:off x="1645919" y="1783080"/>
-            <a:ext cx="9921240" cy="941831"/>
+            <a:ext cx="9921240" cy="724204"/>
           </a:xfrm>
           <a:prstGeom prst="rect">
             <a:avLst/>
@@ -3968,7 +3968,7 @@
         <p:spPr>
           <a:xfrm>
             <a:off x="1920240" y="1874519"/>
-            <a:ext cx="9372600" cy="758951"/>
+            <a:ext cx="9372600" cy="541324"/>
           </a:xfrm>
           <a:prstGeom prst="rect">
             <a:avLst/>
@@ -3993,7 +3993,7 @@
                 </a:solidFill>
                 <a:latin typeface="Calibri"/>
               </a:rPr>
-              <a:t>At least eight pages defining the graphic system and showing tested applications.</a:t>
+              <a:t>Four pages, and no more. The manual is the graphic system itself, shown in use: rules with a tested application beside each one, not a description of intentions.</a:t>
             </a:r>
           </a:p>
         </p:txBody>
@@ -4006,8 +4006,8 @@
         </p:nvSpPr>
         <p:spPr>
           <a:xfrm>
-            <a:off x="662940" y="2939796"/>
-            <a:ext cx="777240" cy="941831"/>
+            <a:off x="662940" y="2722168"/>
+            <a:ext cx="777240" cy="724204"/>
           </a:xfrm>
           <a:prstGeom prst="rect">
             <a:avLst/>
@@ -4050,8 +4050,8 @@
         </p:nvSpPr>
         <p:spPr>
           <a:xfrm>
-            <a:off x="594360" y="2871215"/>
-            <a:ext cx="777240" cy="941831"/>
+            <a:off x="594360" y="2653588"/>
+            <a:ext cx="777240" cy="724204"/>
           </a:xfrm>
           <a:prstGeom prst="rect">
             <a:avLst/>
@@ -4094,7 +4094,7 @@
         </p:nvSpPr>
         <p:spPr>
           <a:xfrm>
-            <a:off x="594360" y="3241547"/>
+            <a:off x="594360" y="2915107"/>
             <a:ext cx="777240" cy="274320"/>
           </a:xfrm>
           <a:prstGeom prst="rect">
@@ -4129,8 +4129,8 @@
         </p:nvSpPr>
         <p:spPr>
           <a:xfrm>
-            <a:off x="1714499" y="2939796"/>
-            <a:ext cx="9921240" cy="941831"/>
+            <a:off x="1714499" y="2722168"/>
+            <a:ext cx="9921240" cy="724204"/>
           </a:xfrm>
           <a:prstGeom prst="rect">
             <a:avLst/>
@@ -4173,8 +4173,8 @@
         </p:nvSpPr>
         <p:spPr>
           <a:xfrm>
-            <a:off x="1645919" y="2871215"/>
-            <a:ext cx="9921240" cy="941831"/>
+            <a:off x="1645919" y="2653588"/>
+            <a:ext cx="9921240" cy="724204"/>
           </a:xfrm>
           <a:prstGeom prst="rect">
             <a:avLst/>
@@ -4217,8 +4217,8 @@
         </p:nvSpPr>
         <p:spPr>
           <a:xfrm>
-            <a:off x="1920240" y="2962656"/>
-            <a:ext cx="9372600" cy="758951"/>
+            <a:off x="1920240" y="2745028"/>
+            <a:ext cx="9372600" cy="541324"/>
           </a:xfrm>
           <a:prstGeom prst="rect">
             <a:avLst/>
@@ -4243,7 +4243,7 @@
                 </a:solidFill>
                 <a:latin typeface="Calibri"/>
               </a:rPr>
-              <a:t>Specify page grid, margins, typography, color, line weights, annotation, captions and image treatment.</a:t>
+              <a:t>One page per decision: (1) the template — sheet size, margins, grid and columns, with the placement rules; (2) typography and hierarchy; (3) color and line weights; (4) annotation, captions and image treatment, demonstrated on a real sheet from this course.</a:t>
             </a:r>
           </a:p>
         </p:txBody>
@@ -4256,8 +4256,8 @@
         </p:nvSpPr>
         <p:spPr>
           <a:xfrm>
-            <a:off x="662940" y="4027931"/>
-            <a:ext cx="777240" cy="941831"/>
+            <a:off x="662940" y="3592677"/>
+            <a:ext cx="777240" cy="724204"/>
           </a:xfrm>
           <a:prstGeom prst="rect">
             <a:avLst/>
@@ -4300,8 +4300,8 @@
         </p:nvSpPr>
         <p:spPr>
           <a:xfrm>
-            <a:off x="594360" y="3959351"/>
-            <a:ext cx="777240" cy="941831"/>
+            <a:off x="594360" y="3524097"/>
+            <a:ext cx="777240" cy="724204"/>
           </a:xfrm>
           <a:prstGeom prst="rect">
             <a:avLst/>
@@ -4344,7 +4344,7 @@
         </p:nvSpPr>
         <p:spPr>
           <a:xfrm>
-            <a:off x="594360" y="4329683"/>
+            <a:off x="594360" y="3785615"/>
             <a:ext cx="777240" cy="274320"/>
           </a:xfrm>
           <a:prstGeom prst="rect">
@@ -4379,8 +4379,8 @@
         </p:nvSpPr>
         <p:spPr>
           <a:xfrm>
-            <a:off x="1714499" y="4027931"/>
-            <a:ext cx="9921240" cy="941831"/>
+            <a:off x="1714499" y="3592677"/>
+            <a:ext cx="9921240" cy="724204"/>
           </a:xfrm>
           <a:prstGeom prst="rect">
             <a:avLst/>
@@ -4423,8 +4423,8 @@
         </p:nvSpPr>
         <p:spPr>
           <a:xfrm>
-            <a:off x="1645919" y="3959351"/>
-            <a:ext cx="9921240" cy="941831"/>
+            <a:off x="1645919" y="3524097"/>
+            <a:ext cx="9921240" cy="724204"/>
           </a:xfrm>
           <a:prstGeom prst="rect">
             <a:avLst/>
@@ -4467,8 +4467,8 @@
         </p:nvSpPr>
         <p:spPr>
           <a:xfrm>
-            <a:off x="1920240" y="4050791"/>
-            <a:ext cx="9372600" cy="758951"/>
+            <a:off x="1920240" y="3615537"/>
+            <a:ext cx="9372600" cy="541324"/>
           </a:xfrm>
           <a:prstGeom prst="rect">
             <a:avLst/>
@@ -4493,7 +4493,7 @@
                 </a:solidFill>
                 <a:latin typeface="Calibri"/>
               </a:rPr>
-              <a:t>Use no more than three typefaces, four hierarchy levels, five colors and four line weights.</a:t>
+              <a:t>Use no more than three typefaces, three colors in total — black, the paper and every accent count toward the three — four hierarchy levels and four line weights.</a:t>
             </a:r>
           </a:p>
         </p:txBody>
@@ -4506,8 +4506,8 @@
         </p:nvSpPr>
         <p:spPr>
           <a:xfrm>
-            <a:off x="662940" y="5116067"/>
-            <a:ext cx="777240" cy="941831"/>
+            <a:off x="662940" y="4463186"/>
+            <a:ext cx="777240" cy="724204"/>
           </a:xfrm>
           <a:prstGeom prst="rect">
             <a:avLst/>
@@ -4550,8 +4550,8 @@
         </p:nvSpPr>
         <p:spPr>
           <a:xfrm>
-            <a:off x="594360" y="5047487"/>
-            <a:ext cx="777240" cy="941831"/>
+            <a:off x="594360" y="4394606"/>
+            <a:ext cx="777240" cy="724204"/>
           </a:xfrm>
           <a:prstGeom prst="rect">
             <a:avLst/>
@@ -4594,7 +4594,7 @@
         </p:nvSpPr>
         <p:spPr>
           <a:xfrm>
-            <a:off x="594360" y="5417819"/>
+            <a:off x="594360" y="4656124"/>
             <a:ext cx="777240" cy="274320"/>
           </a:xfrm>
           <a:prstGeom prst="rect">
@@ -4629,8 +4629,8 @@
         </p:nvSpPr>
         <p:spPr>
           <a:xfrm>
-            <a:off x="1714499" y="5116067"/>
-            <a:ext cx="9921240" cy="941831"/>
+            <a:off x="1714499" y="4463186"/>
+            <a:ext cx="9921240" cy="724204"/>
           </a:xfrm>
           <a:prstGeom prst="rect">
             <a:avLst/>
@@ -4673,8 +4673,8 @@
         </p:nvSpPr>
         <p:spPr>
           <a:xfrm>
-            <a:off x="1645919" y="5047487"/>
-            <a:ext cx="9921240" cy="941831"/>
+            <a:off x="1645919" y="4394606"/>
+            <a:ext cx="9921240" cy="724204"/>
           </a:xfrm>
           <a:prstGeom prst="rect">
             <a:avLst/>
@@ -4717,8 +4717,8 @@
         </p:nvSpPr>
         <p:spPr>
           <a:xfrm>
-            <a:off x="1920240" y="5138927"/>
-            <a:ext cx="9372600" cy="758951"/>
+            <a:off x="1920240" y="4486046"/>
+            <a:ext cx="9372600" cy="541324"/>
           </a:xfrm>
           <a:prstGeom prst="rect">
             <a:avLst/>
@@ -4743,7 +4743,7 @@
                 </a:solidFill>
                 <a:latin typeface="Calibri"/>
               </a:rPr>
-              <a:t>Apply the manual to every sheet; revise it in response to actual use and critique.</a:t>
+              <a:t>Study the three manuals shown in Class 01 — NYCTA, NASA and Munich 1972 — and name one rule you took from them. All three are linked in full under reading and documentation.</a:t>
             </a:r>
           </a:p>
         </p:txBody>
@@ -4756,8 +4756,8 @@
         </p:nvSpPr>
         <p:spPr>
           <a:xfrm>
-            <a:off x="662940" y="6259067"/>
-            <a:ext cx="10972800" cy="512064"/>
+            <a:off x="662940" y="5333695"/>
+            <a:ext cx="777240" cy="724204"/>
           </a:xfrm>
           <a:prstGeom prst="rect">
             <a:avLst/>
@@ -4800,14 +4800,14 @@
         </p:nvSpPr>
         <p:spPr>
           <a:xfrm>
-            <a:off x="594360" y="6190487"/>
-            <a:ext cx="10972800" cy="512064"/>
-          </a:xfrm>
-          <a:prstGeom prst="rect">
-            <a:avLst/>
-          </a:prstGeom>
-          <a:solidFill>
-            <a:srgbClr val="FF4D8D"/>
+            <a:off x="594360" y="5265115"/>
+            <a:ext cx="777240" cy="724204"/>
+          </a:xfrm>
+          <a:prstGeom prst="rect">
+            <a:avLst/>
+          </a:prstGeom>
+          <a:solidFill>
+            <a:srgbClr val="00D9E1"/>
           </a:solidFill>
           <a:ln w="34925">
             <a:solidFill>
@@ -4844,7 +4844,257 @@
         </p:nvSpPr>
         <p:spPr>
           <a:xfrm>
-            <a:off x="914400" y="6190487"/>
+            <a:off x="594360" y="5526633"/>
+            <a:ext cx="777240" cy="274320"/>
+          </a:xfrm>
+          <a:prstGeom prst="rect">
+            <a:avLst/>
+          </a:prstGeom>
+          <a:noFill/>
+        </p:spPr>
+        <p:txBody>
+          <a:bodyPr wrap="square" lIns="0" rIns="0" tIns="0" bIns="0" anchor="t">
+            <a:spAutoFit/>
+          </a:bodyPr>
+          <a:lstStyle/>
+          <a:p>
+            <a:pPr algn="ctr"/>
+            <a:r>
+              <a:rPr sz="1500" b="1">
+                <a:solidFill>
+                  <a:srgbClr val="000000"/>
+                </a:solidFill>
+                <a:latin typeface="Arial"/>
+              </a:rPr>
+              <a:t>05</a:t>
+            </a:r>
+          </a:p>
+        </p:txBody>
+      </p:sp>
+      <p:sp>
+        <p:nvSpPr>
+          <p:cNvPr id="32" name="Rectangle 31"/>
+          <p:cNvSpPr/>
+          <p:nvPr/>
+        </p:nvSpPr>
+        <p:spPr>
+          <a:xfrm>
+            <a:off x="1714499" y="5333695"/>
+            <a:ext cx="9921240" cy="724204"/>
+          </a:xfrm>
+          <a:prstGeom prst="rect">
+            <a:avLst/>
+          </a:prstGeom>
+          <a:solidFill>
+            <a:srgbClr val="000000"/>
+          </a:solidFill>
+          <a:ln w="6350">
+            <a:solidFill>
+              <a:srgbClr val="000000"/>
+            </a:solidFill>
+          </a:ln>
+          <a:effectLst/>
+        </p:spPr>
+        <p:style>
+          <a:lnRef idx="1">
+            <a:schemeClr val="accent1"/>
+          </a:lnRef>
+          <a:fillRef idx="3">
+            <a:schemeClr val="accent1"/>
+          </a:fillRef>
+          <a:effectRef idx="2">
+            <a:schemeClr val="accent1"/>
+          </a:effectRef>
+          <a:fontRef idx="minor">
+            <a:schemeClr val="lt1"/>
+          </a:fontRef>
+        </p:style>
+        <p:txBody>
+          <a:bodyPr rtlCol="0" anchor="ctr"/>
+          <a:lstStyle/>
+          <a:p/>
+        </p:txBody>
+      </p:sp>
+      <p:sp>
+        <p:nvSpPr>
+          <p:cNvPr id="33" name="Rectangle 32"/>
+          <p:cNvSpPr/>
+          <p:nvPr/>
+        </p:nvSpPr>
+        <p:spPr>
+          <a:xfrm>
+            <a:off x="1645919" y="5265115"/>
+            <a:ext cx="9921240" cy="724204"/>
+          </a:xfrm>
+          <a:prstGeom prst="rect">
+            <a:avLst/>
+          </a:prstGeom>
+          <a:solidFill>
+            <a:srgbClr val="FFFDF7"/>
+          </a:solidFill>
+          <a:ln w="34925">
+            <a:solidFill>
+              <a:srgbClr val="000000"/>
+            </a:solidFill>
+          </a:ln>
+          <a:effectLst/>
+        </p:spPr>
+        <p:style>
+          <a:lnRef idx="1">
+            <a:schemeClr val="accent1"/>
+          </a:lnRef>
+          <a:fillRef idx="3">
+            <a:schemeClr val="accent1"/>
+          </a:fillRef>
+          <a:effectRef idx="2">
+            <a:schemeClr val="accent1"/>
+          </a:effectRef>
+          <a:fontRef idx="minor">
+            <a:schemeClr val="lt1"/>
+          </a:fontRef>
+        </p:style>
+        <p:txBody>
+          <a:bodyPr rtlCol="0" anchor="ctr"/>
+          <a:lstStyle/>
+          <a:p/>
+        </p:txBody>
+      </p:sp>
+      <p:sp>
+        <p:nvSpPr>
+          <p:cNvPr id="34" name="TextBox 33"/>
+          <p:cNvSpPr txBox="1"/>
+          <p:nvPr/>
+        </p:nvSpPr>
+        <p:spPr>
+          <a:xfrm>
+            <a:off x="1920240" y="5356555"/>
+            <a:ext cx="9372600" cy="541324"/>
+          </a:xfrm>
+          <a:prstGeom prst="rect">
+            <a:avLst/>
+          </a:prstGeom>
+          <a:noFill/>
+        </p:spPr>
+        <p:txBody>
+          <a:bodyPr wrap="square" lIns="0" rIns="0" tIns="0" bIns="0" anchor="ctr">
+            <a:spAutoFit/>
+          </a:bodyPr>
+          <a:lstStyle/>
+          <a:p>
+            <a:pPr algn="l">
+              <a:lnSpc>
+                <a:spcPct val="125000"/>
+              </a:lnSpc>
+            </a:pPr>
+            <a:r>
+              <a:rPr sz="1300">
+                <a:solidFill>
+                  <a:srgbClr val="000000"/>
+                </a:solidFill>
+                <a:latin typeface="Calibri"/>
+              </a:rPr>
+              <a:t>Apply the manual to every sheet; revise it in response to actual use and critique.</a:t>
+            </a:r>
+          </a:p>
+        </p:txBody>
+      </p:sp>
+      <p:sp>
+        <p:nvSpPr>
+          <p:cNvPr id="35" name="Rectangle 34"/>
+          <p:cNvSpPr/>
+          <p:nvPr/>
+        </p:nvSpPr>
+        <p:spPr>
+          <a:xfrm>
+            <a:off x="662940" y="6259068"/>
+            <a:ext cx="10972800" cy="512064"/>
+          </a:xfrm>
+          <a:prstGeom prst="rect">
+            <a:avLst/>
+          </a:prstGeom>
+          <a:solidFill>
+            <a:srgbClr val="000000"/>
+          </a:solidFill>
+          <a:ln w="6350">
+            <a:solidFill>
+              <a:srgbClr val="000000"/>
+            </a:solidFill>
+          </a:ln>
+          <a:effectLst/>
+        </p:spPr>
+        <p:style>
+          <a:lnRef idx="1">
+            <a:schemeClr val="accent1"/>
+          </a:lnRef>
+          <a:fillRef idx="3">
+            <a:schemeClr val="accent1"/>
+          </a:fillRef>
+          <a:effectRef idx="2">
+            <a:schemeClr val="accent1"/>
+          </a:effectRef>
+          <a:fontRef idx="minor">
+            <a:schemeClr val="lt1"/>
+          </a:fontRef>
+        </p:style>
+        <p:txBody>
+          <a:bodyPr rtlCol="0" anchor="ctr"/>
+          <a:lstStyle/>
+          <a:p/>
+        </p:txBody>
+      </p:sp>
+      <p:sp>
+        <p:nvSpPr>
+          <p:cNvPr id="36" name="Rectangle 35"/>
+          <p:cNvSpPr/>
+          <p:nvPr/>
+        </p:nvSpPr>
+        <p:spPr>
+          <a:xfrm>
+            <a:off x="594360" y="6190488"/>
+            <a:ext cx="10972800" cy="512064"/>
+          </a:xfrm>
+          <a:prstGeom prst="rect">
+            <a:avLst/>
+          </a:prstGeom>
+          <a:solidFill>
+            <a:srgbClr val="FF4D8D"/>
+          </a:solidFill>
+          <a:ln w="34925">
+            <a:solidFill>
+              <a:srgbClr val="000000"/>
+            </a:solidFill>
+          </a:ln>
+          <a:effectLst/>
+        </p:spPr>
+        <p:style>
+          <a:lnRef idx="1">
+            <a:schemeClr val="accent1"/>
+          </a:lnRef>
+          <a:fillRef idx="3">
+            <a:schemeClr val="accent1"/>
+          </a:fillRef>
+          <a:effectRef idx="2">
+            <a:schemeClr val="accent1"/>
+          </a:effectRef>
+          <a:fontRef idx="minor">
+            <a:schemeClr val="lt1"/>
+          </a:fontRef>
+        </p:style>
+        <p:txBody>
+          <a:bodyPr rtlCol="0" anchor="ctr"/>
+          <a:lstStyle/>
+          <a:p/>
+        </p:txBody>
+      </p:sp>
+      <p:sp>
+        <p:nvSpPr>
+          <p:cNvPr id="37" name="TextBox 36"/>
+          <p:cNvSpPr txBox="1"/>
+          <p:nvPr/>
+        </p:nvSpPr>
+        <p:spPr>
+          <a:xfrm>
+            <a:off x="914400" y="6190488"/>
             <a:ext cx="10332720" cy="512064"/>
           </a:xfrm>
           <a:prstGeom prst="rect">
@@ -5744,7 +5994,7 @@
                 </a:solidFill>
                 <a:latin typeface="Calibri"/>
               </a:rPr>
-              <a:t>A line-weight set, from hairline to heaviest</a:t>
+              <a:t>A line-weight set, from hairline to heaviest — four weights</a:t>
             </a:r>
           </a:p>
         </p:txBody>
@@ -5990,7 +6240,7 @@
                 </a:solidFill>
                 <a:latin typeface="Calibri"/>
               </a:rPr>
-              <a:t>A palette you can defend, and that survives being printed</a:t>
+              <a:t>Three colours you can defend, black included, that survive being printed</a:t>
             </a:r>
           </a:p>
         </p:txBody>
@@ -9918,7 +10168,7 @@
                 </a:solidFill>
                 <a:latin typeface="Calibri"/>
               </a:rPr>
-              <a:t>CSG massing sequence  →  Mesh from scratch  →  First print</a:t>
+              <a:t>CSG massing sequence  →  Panel from scratch  →  First print</a:t>
             </a:r>
           </a:p>
         </p:txBody>
@@ -10515,7 +10765,7 @@
                 </a:solidFill>
                 <a:latin typeface="Arial"/>
               </a:rPr>
-              <a:t>Connected systems — tessellation and lattices</a:t>
+              <a:t>Spatial arrays and assembly</a:t>
             </a:r>
           </a:p>
         </p:txBody>
@@ -10550,7 +10800,7 @@
                 </a:solidFill>
                 <a:latin typeface="Calibri"/>
               </a:rPr>
-              <a:t>Tessellation and lattice study  →  Modular print assembly</a:t>
+              <a:t>3D array and connection study  →  Modular print assembly</a:t>
             </a:r>
           </a:p>
         </p:txBody>
@@ -12985,7 +13235,7 @@
           <a:p>
             <a:pPr algn="l">
               <a:lnSpc>
-                <a:spcPct val="145000"/>
+                <a:spcPct val="140000"/>
               </a:lnSpc>
             </a:pPr>
             <a:r>
@@ -13001,7 +13251,7 @@
           <a:p>
             <a:pPr algn="l">
               <a:lnSpc>
-                <a:spcPct val="145000"/>
+                <a:spcPct val="140000"/>
               </a:lnSpc>
             </a:pPr>
             <a:r>
@@ -13017,7 +13267,7 @@
           <a:p>
             <a:pPr algn="l">
               <a:lnSpc>
-                <a:spcPct val="145000"/>
+                <a:spcPct val="140000"/>
               </a:lnSpc>
             </a:pPr>
             <a:r>
@@ -13033,7 +13283,7 @@
           <a:p>
             <a:pPr algn="l">
               <a:lnSpc>
-                <a:spcPct val="145000"/>
+                <a:spcPct val="140000"/>
               </a:lnSpc>
             </a:pPr>
             <a:r>
@@ -13043,13 +13293,13 @@
                 </a:solidFill>
                 <a:latin typeface="Calibri"/>
               </a:rPr>
-              <a:t>A line-weight set.</a:t>
+              <a:t>A line-weight set — four weights.</a:t>
             </a:r>
           </a:p>
           <a:p>
             <a:pPr algn="l">
               <a:lnSpc>
-                <a:spcPct val="145000"/>
+                <a:spcPct val="140000"/>
               </a:lnSpc>
             </a:pPr>
             <a:r>
@@ -13059,7 +13309,23 @@
                 </a:solidFill>
                 <a:latin typeface="Calibri"/>
               </a:rPr>
-              <a:t>A restrained palette.</a:t>
+              <a:t>A palette of three colours, and the black is one of them.</a:t>
+            </a:r>
+          </a:p>
+          <a:p>
+            <a:pPr algn="l">
+              <a:lnSpc>
+                <a:spcPct val="140000"/>
+              </a:lnSpc>
+            </a:pPr>
+            <a:r>
+              <a:rPr sz="1400">
+                <a:solidFill>
+                  <a:srgbClr val="000000"/>
+                </a:solidFill>
+                <a:latin typeface="Calibri"/>
+              </a:rPr>
+              <a:t>Three typefaces is the ceiling. Two is better.</a:t>
             </a:r>
           </a:p>
         </p:txBody>
@@ -13603,7 +13869,7 @@
                 </a:solidFill>
                 <a:latin typeface="Calibri"/>
               </a:rPr>
-              <a:t>Massimo Vignelli and Bob Noorda, Unimark - 1970</a:t>
+              <a:t>Massimo Vignelli and Bob Noorda, Unimark - 1970 - archive.org/details/nycta-gs-manual</a:t>
             </a:r>
           </a:p>
         </p:txBody>
@@ -13923,7 +14189,7 @@
                 </a:solidFill>
                 <a:latin typeface="Calibri"/>
               </a:rPr>
-              <a:t>Richard Danne and Bruce Blackburn - 1975</a:t>
+              <a:t>Richard Danne and Bruce Blackburn - 1975 - archive.org/details/NASA_Graphics_Standards_Manual</a:t>
             </a:r>
           </a:p>
         </p:txBody>
@@ -14243,7 +14509,7 @@
                 </a:solidFill>
                 <a:latin typeface="Calibri"/>
               </a:rPr>
-              <a:t>Otl Aicher - 1967 to 1972</a:t>
+              <a:t>Otl Aicher - 1967 to 1972 - otlaicher.de, 'the rainbow games'</a:t>
             </a:r>
           </a:p>
         </p:txBody>
@@ -14405,7 +14671,7 @@
                 </a:solidFill>
                 <a:latin typeface="Arial"/>
               </a:rPr>
-              <a:t>YOURS IS EIGHT PAGES, NOT THREE HUNDRED. THE PRINCIPLE IS IDENTICAL: DECIDE ONCE, WRITE IT DOWN, APPLY IT EVERY TIME.</a:t>
+              <a:t>YOURS IS FOUR PAGES, NOT THREE HUNDRED. THE PRINCIPLE IS IDENTICAL: DECIDE ONCE, WRITE IT DOWN, APPLY IT EVERY TIME.</a:t>
             </a:r>
           </a:p>
         </p:txBody>
@@ -14440,7 +14706,7 @@
                 </a:solidFill>
                 <a:latin typeface="Calibri"/>
               </a:rPr>
-              <a:t>All three are online in full. Look at how much of each one is rules rather than pictures.</a:t>
+              <a:t>All three are online in full, linked on the U01 lesson page and under Reading. Look at how much of each one is rules rather than pictures.</a:t>
             </a:r>
           </a:p>
         </p:txBody>
@@ -14580,7 +14846,7 @@
                 </a:solidFill>
                 <a:latin typeface="Calibri"/>
               </a:rPr>
-              <a:t>Six values, decided once. Every sheet this semester reads them.</a:t>
+              <a:t>A short list of values, decided once. Every sheet this semester reads them.</a:t>
             </a:r>
           </a:p>
         </p:txBody>
@@ -14703,7 +14969,7 @@
                 </a:solidFill>
                 <a:latin typeface="Courier New"/>
               </a:rPr>
-              <a:t>SHEET   = (17, 11)                 # inches</a:t>
+              <a:t>PAGES     = 4                # the whole manual</a:t>
             </a:r>
           </a:p>
         </p:txBody>
@@ -14738,7 +15004,7 @@
                 </a:solidFill>
                 <a:latin typeface="Courier New"/>
               </a:rPr>
-              <a:t>MARGIN  = 0.75</a:t>
+              <a:t>SHEET     = (17, 11)         # inches</a:t>
             </a:r>
           </a:p>
         </p:txBody>
@@ -14773,7 +15039,7 @@
                 </a:solidFill>
                 <a:latin typeface="Courier New"/>
               </a:rPr>
-              <a:t>COLUMNS = 6</a:t>
+              <a:t>MARGIN    = 0.75</a:t>
             </a:r>
           </a:p>
         </p:txBody>
@@ -14808,7 +15074,7 @@
                 </a:solidFill>
                 <a:latin typeface="Courier New"/>
               </a:rPr>
-              <a:t> </a:t>
+              <a:t>COLUMNS   = 6</a:t>
             </a:r>
           </a:p>
         </p:txBody>
@@ -14843,7 +15109,7 @@
                 </a:solidFill>
                 <a:latin typeface="Courier New"/>
               </a:rPr>
-              <a:t>TYPE    = {"title": 24, "heading": 14, "body": 9}</a:t>
+              <a:t> </a:t>
             </a:r>
           </a:p>
         </p:txBody>
@@ -14878,7 +15144,7 @@
                 </a:solidFill>
                 <a:latin typeface="Courier New"/>
               </a:rPr>
-              <a:t>WEIGHTS = [0.13, 0.35, 0.70]       # thin, medium, heavy</a:t>
+              <a:t>TYPEFACES = 2                # 3 is the ceiling</a:t>
             </a:r>
           </a:p>
         </p:txBody>
@@ -14913,7 +15179,7 @@
                 </a:solidFill>
                 <a:latin typeface="Courier New"/>
               </a:rPr>
-              <a:t>PALETTE = ["#000000", "#FFFDF7", "#C6F035"]</a:t>
+              <a:t>TYPE      = {"title": 24, "heading": 14, "body": 9}</a:t>
             </a:r>
           </a:p>
         </p:txBody>
@@ -14948,7 +15214,7 @@
                 </a:solidFill>
                 <a:latin typeface="Courier New"/>
               </a:rPr>
-              <a:t> </a:t>
+              <a:t>WEIGHTS   = [0.13, 0.35, 0.70]     # thin, medium, heavy</a:t>
             </a:r>
           </a:p>
         </p:txBody>
@@ -14983,14 +15249,119 @@
                 </a:solidFill>
                 <a:latin typeface="Courier New"/>
               </a:rPr>
-              <a:t># every sheet this semester reads these six values</a:t>
-            </a:r>
-          </a:p>
-        </p:txBody>
-      </p:sp>
-      <p:sp>
-        <p:nvSpPr>
-          <p:cNvPr id="16" name="Rectangle 15"/>
+              <a:t>COLORS    = 3                # the black counts as one</a:t>
+            </a:r>
+          </a:p>
+        </p:txBody>
+      </p:sp>
+      <p:sp>
+        <p:nvSpPr>
+          <p:cNvPr id="16" name="TextBox 15"/>
+          <p:cNvSpPr txBox="1"/>
+          <p:nvPr/>
+        </p:nvSpPr>
+        <p:spPr>
+          <a:xfrm>
+            <a:off x="886968" y="4480559"/>
+            <a:ext cx="6400800" cy="274320"/>
+          </a:xfrm>
+          <a:prstGeom prst="rect">
+            <a:avLst/>
+          </a:prstGeom>
+          <a:noFill/>
+        </p:spPr>
+        <p:txBody>
+          <a:bodyPr wrap="square" lIns="0" rIns="0" tIns="0" bIns="0" anchor="t">
+            <a:spAutoFit/>
+          </a:bodyPr>
+          <a:lstStyle/>
+          <a:p>
+            <a:pPr algn="l"/>
+            <a:r>
+              <a:rPr sz="1250">
+                <a:solidFill>
+                  <a:srgbClr val="000000"/>
+                </a:solidFill>
+                <a:latin typeface="Courier New"/>
+              </a:rPr>
+              <a:t>PALETTE   = ["#000000", "#FFFDF7", "#C6F035"]</a:t>
+            </a:r>
+          </a:p>
+        </p:txBody>
+      </p:sp>
+      <p:sp>
+        <p:nvSpPr>
+          <p:cNvPr id="17" name="TextBox 16"/>
+          <p:cNvSpPr txBox="1"/>
+          <p:nvPr/>
+        </p:nvSpPr>
+        <p:spPr>
+          <a:xfrm>
+            <a:off x="886968" y="4754879"/>
+            <a:ext cx="6400800" cy="274320"/>
+          </a:xfrm>
+          <a:prstGeom prst="rect">
+            <a:avLst/>
+          </a:prstGeom>
+          <a:noFill/>
+        </p:spPr>
+        <p:txBody>
+          <a:bodyPr wrap="square" lIns="0" rIns="0" tIns="0" bIns="0" anchor="t">
+            <a:spAutoFit/>
+          </a:bodyPr>
+          <a:lstStyle/>
+          <a:p>
+            <a:pPr algn="l"/>
+            <a:r>
+              <a:rPr sz="1250">
+                <a:solidFill>
+                  <a:srgbClr val="000000"/>
+                </a:solidFill>
+                <a:latin typeface="Courier New"/>
+              </a:rPr>
+              <a:t> </a:t>
+            </a:r>
+          </a:p>
+        </p:txBody>
+      </p:sp>
+      <p:sp>
+        <p:nvSpPr>
+          <p:cNvPr id="18" name="TextBox 17"/>
+          <p:cNvSpPr txBox="1"/>
+          <p:nvPr/>
+        </p:nvSpPr>
+        <p:spPr>
+          <a:xfrm>
+            <a:off x="886968" y="5029199"/>
+            <a:ext cx="6400800" cy="274320"/>
+          </a:xfrm>
+          <a:prstGeom prst="rect">
+            <a:avLst/>
+          </a:prstGeom>
+          <a:noFill/>
+        </p:spPr>
+        <p:txBody>
+          <a:bodyPr wrap="square" lIns="0" rIns="0" tIns="0" bIns="0" anchor="t">
+            <a:spAutoFit/>
+          </a:bodyPr>
+          <a:lstStyle/>
+          <a:p>
+            <a:pPr algn="l"/>
+            <a:r>
+              <a:rPr sz="1250">
+                <a:solidFill>
+                  <a:srgbClr val="000000"/>
+                </a:solidFill>
+                <a:latin typeface="Courier New"/>
+              </a:rPr>
+              <a:t># every sheet this semester reads these values</a:t>
+            </a:r>
+          </a:p>
+        </p:txBody>
+      </p:sp>
+      <p:sp>
+        <p:nvSpPr>
+          <p:cNvPr id="19" name="Rectangle 18"/>
           <p:cNvSpPr/>
           <p:nvPr/>
         </p:nvSpPr>
@@ -15034,7 +15405,7 @@
       </p:sp>
       <p:sp>
         <p:nvSpPr>
-          <p:cNvPr id="17" name="Rectangle 16"/>
+          <p:cNvPr id="20" name="Rectangle 19"/>
           <p:cNvSpPr/>
           <p:nvPr/>
         </p:nvSpPr>
@@ -15078,7 +15449,7 @@
       </p:sp>
       <p:sp>
         <p:nvSpPr>
-          <p:cNvPr id="18" name="Rectangle 17"/>
+          <p:cNvPr id="21" name="Rectangle 20"/>
           <p:cNvSpPr/>
           <p:nvPr/>
         </p:nvSpPr>
@@ -15122,7 +15493,7 @@
       </p:sp>
       <p:sp>
         <p:nvSpPr>
-          <p:cNvPr id="19" name="TextBox 18"/>
+          <p:cNvPr id="22" name="TextBox 21"/>
           <p:cNvSpPr txBox="1"/>
           <p:nvPr/>
         </p:nvSpPr>
@@ -15157,7 +15528,7 @@
       </p:sp>
       <p:sp>
         <p:nvSpPr>
-          <p:cNvPr id="20" name="TextBox 19"/>
+          <p:cNvPr id="23" name="TextBox 22"/>
           <p:cNvSpPr txBox="1"/>
           <p:nvPr/>
         </p:nvSpPr>
@@ -15276,7 +15647,7 @@
       </p:sp>
       <p:sp>
         <p:nvSpPr>
-          <p:cNvPr id="21" name="Rectangle 20"/>
+          <p:cNvPr id="24" name="Rectangle 23"/>
           <p:cNvSpPr/>
           <p:nvPr/>
         </p:nvSpPr>
@@ -15320,7 +15691,7 @@
       </p:sp>
       <p:sp>
         <p:nvSpPr>
-          <p:cNvPr id="22" name="Rectangle 21"/>
+          <p:cNvPr id="25" name="Rectangle 24"/>
           <p:cNvSpPr/>
           <p:nvPr/>
         </p:nvSpPr>
@@ -15364,7 +15735,7 @@
       </p:sp>
       <p:sp>
         <p:nvSpPr>
-          <p:cNvPr id="23" name="TextBox 22"/>
+          <p:cNvPr id="26" name="TextBox 25"/>
           <p:cNvSpPr txBox="1"/>
           <p:nvPr/>
         </p:nvSpPr>
@@ -15392,7 +15763,7 @@
                 </a:solidFill>
                 <a:latin typeface="Arial"/>
               </a:rPr>
-              <a:t>A BINDER OF RULES AND THESE SIX VALUES ARE THE SAME DOCUMENT, AT DIFFERENT SCALES.</a:t>
+              <a:t>A BINDER OF RULES AND THIS SHORT LIST ARE THE SAME DOCUMENT, AT DIFFERENT SCALES.</a:t>
             </a:r>
           </a:p>
         </p:txBody>

--- a/slides/ARC3133_Class01.pptx
+++ b/slides/ARC3133_Class01.pptx
@@ -3179,7 +3179,7 @@
                 </a:solidFill>
                 <a:latin typeface="Arial"/>
               </a:rPr>
-              <a:t>CLASS 01  /  AUG 25</a:t>
+              <a:t>CLASS 01  /  AUG 25  /  U01</a:t>
             </a:r>
           </a:p>
         </p:txBody>
@@ -3322,7 +3322,7 @@
                 </a:solidFill>
                 <a:latin typeface="Arial"/>
               </a:rPr>
-              <a:t>VISUAL IDENTITY</a:t>
+              <a:t>GRAPHIC STANDARDS MANUAL</a:t>
             </a:r>
           </a:p>
         </p:txBody>
@@ -3993,7 +3993,7 @@
                 </a:solidFill>
                 <a:latin typeface="Calibri"/>
               </a:rPr>
-              <a:t>Four pages, and no more. The manual is the graphic system itself, shown in use: rules with a tested application beside each one, not a description of intentions.</a:t>
+              <a:t>Make exactly four pages. Show each graphic rule beside a tested application.</a:t>
             </a:r>
           </a:p>
         </p:txBody>
@@ -4243,7 +4243,7 @@
                 </a:solidFill>
                 <a:latin typeface="Calibri"/>
               </a:rPr>
-              <a:t>One page per decision: (1) the template — sheet size, margins, grid and columns, with the placement rules; (2) typography and hierarchy; (3) color and line weights; (4) annotation, captions and image treatment, demonstrated on a real sheet from this course.</a:t>
+              <a:t>Use one page each for: (1) sheet size, margins, grid, columns and placement; (2) typography and hierarchy; (3) color and line weights; (4) annotations, captions and image treatment on a course sheet.</a:t>
             </a:r>
           </a:p>
         </p:txBody>
@@ -4493,7 +4493,7 @@
                 </a:solidFill>
                 <a:latin typeface="Calibri"/>
               </a:rPr>
-              <a:t>Use no more than three typefaces, three colors in total — black, the paper and every accent count toward the three — four hierarchy levels and four line weights.</a:t>
+              <a:t>Use at most three typefaces, three colors including black and paper, four hierarchy levels and four line weights.</a:t>
             </a:r>
           </a:p>
         </p:txBody>
@@ -4743,7 +4743,7 @@
                 </a:solidFill>
                 <a:latin typeface="Calibri"/>
               </a:rPr>
-              <a:t>Study the three manuals shown in Class 01 — NYCTA, NASA and Munich 1972 — and name one rule you took from them. All three are linked in full under reading and documentation.</a:t>
+              <a:t>Study the NYCTA, NASA and Munich 1972 manuals linked under Reading and documentation. Name one rule you adopted.</a:t>
             </a:r>
           </a:p>
         </p:txBody>
@@ -4993,7 +4993,7 @@
                 </a:solidFill>
                 <a:latin typeface="Calibri"/>
               </a:rPr>
-              <a:t>Apply the manual to every sheet; revise it in response to actual use and critique.</a:t>
+              <a:t>Apply the manual to every sheet and revise it after critique.</a:t>
             </a:r>
           </a:p>
         </p:txBody>
@@ -5256,7 +5256,7 @@
                 </a:solidFill>
                 <a:latin typeface="Calibri"/>
               </a:rPr>
-              <a:t>Rest of the session: set the page up and put something on it.</a:t>
+              <a:t>Rest of the class: set the page up and put something on it.</a:t>
             </a:r>
           </a:p>
         </p:txBody>
@@ -5748,7 +5748,7 @@
                 </a:solidFill>
                 <a:latin typeface="Calibri"/>
               </a:rPr>
-              <a:t>Type hierarchy chosen — three levels, and a reason for each</a:t>
+              <a:t>Type hierarchy chosen — up to four levels, and a reason for each</a:t>
             </a:r>
           </a:p>
         </p:txBody>
@@ -5994,7 +5994,7 @@
                 </a:solidFill>
                 <a:latin typeface="Calibri"/>
               </a:rPr>
-              <a:t>A line-weight set, from hairline to heaviest — four weights</a:t>
+              <a:t>A line-weight set, from hairline to heaviest — four weights at most</a:t>
             </a:r>
           </a:p>
         </p:txBody>
@@ -6240,7 +6240,7 @@
                 </a:solidFill>
                 <a:latin typeface="Calibri"/>
               </a:rPr>
-              <a:t>Three colours you can defend, black included, that survive being printed</a:t>
+              <a:t>Three colours you can defend, black and paper included, that survive printing</a:t>
             </a:r>
           </a:p>
         </p:txBody>
@@ -6964,7 +6964,7 @@
                 </a:solidFill>
                 <a:latin typeface="Calibri"/>
               </a:rPr>
-              <a:t>U02 — Transformations and CSG. The node editor, parameters, and the three Boolean operations. Check the unit page; watch a recording only once a link is posted.</a:t>
+              <a:t>U02 — Constructive Solid Geometry. Nodes, parameters, transformations and the three Boolean operations. Watch the CSG video tutorial (Blender or Rhino + Grasshopper) linked on the Class 02 page.</a:t>
             </a:r>
           </a:p>
         </p:txBody>
@@ -7214,7 +7214,7 @@
                 </a:solidFill>
                 <a:latin typeface="Calibri"/>
               </a:rPr>
-              <a:t>Blender, and set up a project folder you can open from a clean machine. File organization is part of the workflow, not an afterthought.</a:t>
+              <a:t>Blender, and a project folder you can open from a clean machine. File organization is part of the workflow, not an afterthought.</a:t>
             </a:r>
           </a:p>
         </p:txBody>
@@ -7464,7 +7464,7 @@
                 </a:solidFill>
                 <a:latin typeface="Calibri"/>
               </a:rPr>
-              <a:t>Your sample sheet and the file it came from.</a:t>
+              <a:t>Your sample sheet and the file it came from. The sheet gets an ungraded identity check next class (WEEK 2 — Sep 1).</a:t>
             </a:r>
           </a:p>
         </p:txBody>
@@ -7587,7 +7587,7 @@
                 </a:solidFill>
                 <a:latin typeface="Arial"/>
               </a:rPr>
-              <a:t>LOOK</a:t>
+              <a:t>PLAN</a:t>
             </a:r>
           </a:p>
         </p:txBody>
@@ -7714,7 +7714,7 @@
                 </a:solidFill>
                 <a:latin typeface="Calibri"/>
               </a:rPr>
-              <a:t>Three architectural drawings you think are well made. Be ready to say what makes each one readable.</a:t>
+              <a:t>GSM is due at the midterm, WEEK 10 — Oct 27. Study the three manuals and pick your rule before you lay out page 1.</a:t>
             </a:r>
           </a:p>
         </p:txBody>
@@ -9852,7 +9852,7 @@
                 </a:solidFill>
                 <a:latin typeface="Arial"/>
               </a:rPr>
-              <a:t>FOUR PROJECTS</a:t>
+              <a:t>FOUR PROJECTS, NINE ASSIGNMENTS</a:t>
             </a:r>
           </a:p>
         </p:txBody>
@@ -9887,7 +9887,7 @@
                 </a:solidFill>
                 <a:latin typeface="Calibri"/>
               </a:rPr>
-              <a:t>Ten short assignments, assembled into four. Nothing is graded twice.</a:t>
+              <a:t>Each assignment is graded once. Each project carries its geometry into the next.</a:t>
             </a:r>
           </a:p>
         </p:txBody>
@@ -9900,8 +9900,8 @@
         </p:nvSpPr>
         <p:spPr>
           <a:xfrm>
-            <a:off x="662940" y="1897380"/>
-            <a:ext cx="1051560" cy="914400"/>
+            <a:off x="662940" y="1851660"/>
+            <a:ext cx="914400" cy="841248"/>
           </a:xfrm>
           <a:prstGeom prst="rect">
             <a:avLst/>
@@ -9944,8 +9944,8 @@
         </p:nvSpPr>
         <p:spPr>
           <a:xfrm>
-            <a:off x="594360" y="1828800"/>
-            <a:ext cx="1051560" cy="914400"/>
+            <a:off x="594360" y="1783080"/>
+            <a:ext cx="914400" cy="841248"/>
           </a:xfrm>
           <a:prstGeom prst="rect">
             <a:avLst/>
@@ -9988,8 +9988,8 @@
         </p:nvSpPr>
         <p:spPr>
           <a:xfrm>
-            <a:off x="594360" y="2185416"/>
-            <a:ext cx="1051560" cy="274320"/>
+            <a:off x="594360" y="2103120"/>
+            <a:ext cx="914400" cy="274320"/>
           </a:xfrm>
           <a:prstGeom prst="rect">
             <a:avLst/>
@@ -10023,8 +10023,8 @@
         </p:nvSpPr>
         <p:spPr>
           <a:xfrm>
-            <a:off x="1988820" y="1897380"/>
-            <a:ext cx="9646920" cy="914400"/>
+            <a:off x="1805939" y="1851660"/>
+            <a:ext cx="9829800" cy="841248"/>
           </a:xfrm>
           <a:prstGeom prst="rect">
             <a:avLst/>
@@ -10067,8 +10067,8 @@
         </p:nvSpPr>
         <p:spPr>
           <a:xfrm>
-            <a:off x="1920240" y="1828800"/>
-            <a:ext cx="9646920" cy="914400"/>
+            <a:off x="1737360" y="1783080"/>
+            <a:ext cx="9829800" cy="841248"/>
           </a:xfrm>
           <a:prstGeom prst="rect">
             <a:avLst/>
@@ -10111,8 +10111,8 @@
         </p:nvSpPr>
         <p:spPr>
           <a:xfrm>
-            <a:off x="2194560" y="1947672"/>
-            <a:ext cx="7680960" cy="320040"/>
+            <a:off x="1965960" y="1874519"/>
+            <a:ext cx="8046720" cy="292608"/>
           </a:xfrm>
           <a:prstGeom prst="rect">
             <a:avLst/>
@@ -10127,13 +10127,13 @@
           <a:p>
             <a:pPr algn="l"/>
             <a:r>
-              <a:rPr sz="1400" b="1">
+              <a:rPr sz="1350" b="1">
                 <a:solidFill>
                   <a:srgbClr val="000000"/>
                 </a:solidFill>
                 <a:latin typeface="Arial"/>
               </a:rPr>
-              <a:t>Geometry — from operations to construction</a:t>
+              <a:t>GRAPHIC STANDARDS MANUAL</a:t>
             </a:r>
           </a:p>
         </p:txBody>
@@ -10146,8 +10146,8 @@
         </p:nvSpPr>
         <p:spPr>
           <a:xfrm>
-            <a:off x="2194560" y="2331720"/>
-            <a:ext cx="7680960" cy="320040"/>
+            <a:off x="1965960" y="2221991"/>
+            <a:ext cx="8046720" cy="310896"/>
           </a:xfrm>
           <a:prstGeom prst="rect">
             <a:avLst/>
@@ -10162,13 +10162,22 @@
           <a:p>
             <a:pPr algn="l"/>
             <a:r>
-              <a:rPr sz="1200">
+              <a:rPr sz="1150" b="1">
                 <a:solidFill>
                   <a:srgbClr val="000000"/>
                 </a:solidFill>
+                <a:latin typeface="Courier New"/>
+              </a:rPr>
+              <a:t>GSM</a:t>
+            </a:r>
+            <a:r>
+              <a:rPr sz="1150">
+                <a:solidFill>
+                  <a:srgbClr val="000000"/>
+                </a:solidFill>
                 <a:latin typeface="Calibri"/>
               </a:rPr>
-              <a:t>CSG massing sequence  →  Panel from scratch  →  First print</a:t>
+              <a:t> four-page manual · due W10</a:t>
             </a:r>
           </a:p>
         </p:txBody>
@@ -10181,8 +10190,8 @@
         </p:nvSpPr>
         <p:spPr>
           <a:xfrm>
-            <a:off x="9784080" y="1828800"/>
-            <a:ext cx="1463040" cy="914400"/>
+            <a:off x="10104120" y="1783080"/>
+            <a:ext cx="1463040" cy="841248"/>
           </a:xfrm>
           <a:prstGeom prst="rect">
             <a:avLst/>
@@ -10203,7 +10212,7 @@
                 </a:solidFill>
                 <a:latin typeface="Arial"/>
               </a:rPr>
-              <a:t>21%</a:t>
+              <a:t>7%</a:t>
             </a:r>
           </a:p>
         </p:txBody>
@@ -10216,8 +10225,8 @@
         </p:nvSpPr>
         <p:spPr>
           <a:xfrm>
-            <a:off x="662940" y="2948940"/>
-            <a:ext cx="1051560" cy="914400"/>
+            <a:off x="662940" y="2802636"/>
+            <a:ext cx="914400" cy="841248"/>
           </a:xfrm>
           <a:prstGeom prst="rect">
             <a:avLst/>
@@ -10260,8 +10269,8 @@
         </p:nvSpPr>
         <p:spPr>
           <a:xfrm>
-            <a:off x="594360" y="2880360"/>
-            <a:ext cx="1051560" cy="914400"/>
+            <a:off x="594360" y="2734056"/>
+            <a:ext cx="914400" cy="841248"/>
           </a:xfrm>
           <a:prstGeom prst="rect">
             <a:avLst/>
@@ -10304,8 +10313,8 @@
         </p:nvSpPr>
         <p:spPr>
           <a:xfrm>
-            <a:off x="594360" y="3236976"/>
-            <a:ext cx="1051560" cy="274320"/>
+            <a:off x="594360" y="3054096"/>
+            <a:ext cx="914400" cy="274320"/>
           </a:xfrm>
           <a:prstGeom prst="rect">
             <a:avLst/>
@@ -10339,8 +10348,8 @@
         </p:nvSpPr>
         <p:spPr>
           <a:xfrm>
-            <a:off x="1988820" y="2948940"/>
-            <a:ext cx="9646920" cy="914400"/>
+            <a:off x="1805939" y="2802636"/>
+            <a:ext cx="9829800" cy="841248"/>
           </a:xfrm>
           <a:prstGeom prst="rect">
             <a:avLst/>
@@ -10383,8 +10392,8 @@
         </p:nvSpPr>
         <p:spPr>
           <a:xfrm>
-            <a:off x="1920240" y="2880360"/>
-            <a:ext cx="9646920" cy="914400"/>
+            <a:off x="1737360" y="2734056"/>
+            <a:ext cx="9829800" cy="841248"/>
           </a:xfrm>
           <a:prstGeom prst="rect">
             <a:avLst/>
@@ -10427,8 +10436,8 @@
         </p:nvSpPr>
         <p:spPr>
           <a:xfrm>
-            <a:off x="2194560" y="2999232"/>
-            <a:ext cx="7680960" cy="320040"/>
+            <a:off x="1965960" y="2825496"/>
+            <a:ext cx="8046720" cy="292608"/>
           </a:xfrm>
           <a:prstGeom prst="rect">
             <a:avLst/>
@@ -10443,13 +10452,13 @@
           <a:p>
             <a:pPr algn="l"/>
             <a:r>
-              <a:rPr sz="1400" b="1">
+              <a:rPr sz="1350" b="1">
                 <a:solidFill>
                   <a:srgbClr val="000000"/>
                 </a:solidFill>
                 <a:latin typeface="Arial"/>
               </a:rPr>
-              <a:t>Repetition and response — arrays to attractors</a:t>
+              <a:t>CONSTRUCTIVE SOLID GEOMETRY</a:t>
             </a:r>
           </a:p>
         </p:txBody>
@@ -10462,8 +10471,8 @@
         </p:nvSpPr>
         <p:spPr>
           <a:xfrm>
-            <a:off x="2194560" y="3383280"/>
-            <a:ext cx="7680960" cy="320040"/>
+            <a:off x="1965960" y="3172968"/>
+            <a:ext cx="8046720" cy="310896"/>
           </a:xfrm>
           <a:prstGeom prst="rect">
             <a:avLst/>
@@ -10478,13 +10487,40 @@
           <a:p>
             <a:pPr algn="l"/>
             <a:r>
-              <a:rPr sz="1200">
+              <a:rPr sz="1150" b="1">
                 <a:solidFill>
                   <a:srgbClr val="000000"/>
                 </a:solidFill>
+                <a:latin typeface="Courier New"/>
+              </a:rPr>
+              <a:t>P2a</a:t>
+            </a:r>
+            <a:r>
+              <a:rPr sz="1150">
+                <a:solidFill>
+                  <a:srgbClr val="000000"/>
+                </a:solidFill>
                 <a:latin typeface="Calibri"/>
               </a:rPr>
-              <a:t>Arrays and conditional control  →  Attractor field study</a:t>
+              <a:t> CSG process sheet · due W4     </a:t>
+            </a:r>
+            <a:r>
+              <a:rPr sz="1150" b="1">
+                <a:solidFill>
+                  <a:srgbClr val="000000"/>
+                </a:solidFill>
+                <a:latin typeface="Courier New"/>
+              </a:rPr>
+              <a:t>P2b</a:t>
+            </a:r>
+            <a:r>
+              <a:rPr sz="1150">
+                <a:solidFill>
+                  <a:srgbClr val="000000"/>
+                </a:solidFill>
+                <a:latin typeface="Calibri"/>
+              </a:rPr>
+              <a:t> 3D printed object · due W10</a:t>
             </a:r>
           </a:p>
         </p:txBody>
@@ -10497,8 +10533,8 @@
         </p:nvSpPr>
         <p:spPr>
           <a:xfrm>
-            <a:off x="9784080" y="2880360"/>
-            <a:ext cx="1463040" cy="914400"/>
+            <a:off x="10104120" y="2734056"/>
+            <a:ext cx="1463040" cy="841248"/>
           </a:xfrm>
           <a:prstGeom prst="rect">
             <a:avLst/>
@@ -10532,8 +10568,8 @@
         </p:nvSpPr>
         <p:spPr>
           <a:xfrm>
-            <a:off x="662940" y="4000500"/>
-            <a:ext cx="1051560" cy="914400"/>
+            <a:off x="662940" y="3753612"/>
+            <a:ext cx="914400" cy="841248"/>
           </a:xfrm>
           <a:prstGeom prst="rect">
             <a:avLst/>
@@ -10576,8 +10612,8 @@
         </p:nvSpPr>
         <p:spPr>
           <a:xfrm>
-            <a:off x="594360" y="3931920"/>
-            <a:ext cx="1051560" cy="914400"/>
+            <a:off x="594360" y="3685032"/>
+            <a:ext cx="914400" cy="841248"/>
           </a:xfrm>
           <a:prstGeom prst="rect">
             <a:avLst/>
@@ -10620,8 +10656,8 @@
         </p:nvSpPr>
         <p:spPr>
           <a:xfrm>
-            <a:off x="594360" y="4288536"/>
-            <a:ext cx="1051560" cy="274320"/>
+            <a:off x="594360" y="4005072"/>
+            <a:ext cx="914400" cy="274320"/>
           </a:xfrm>
           <a:prstGeom prst="rect">
             <a:avLst/>
@@ -10655,8 +10691,8 @@
         </p:nvSpPr>
         <p:spPr>
           <a:xfrm>
-            <a:off x="1988820" y="4000500"/>
-            <a:ext cx="9646920" cy="914400"/>
+            <a:off x="1805939" y="3753612"/>
+            <a:ext cx="9829800" cy="841248"/>
           </a:xfrm>
           <a:prstGeom prst="rect">
             <a:avLst/>
@@ -10699,8 +10735,8 @@
         </p:nvSpPr>
         <p:spPr>
           <a:xfrm>
-            <a:off x="1920240" y="3931920"/>
-            <a:ext cx="9646920" cy="914400"/>
+            <a:off x="1737360" y="3685032"/>
+            <a:ext cx="9829800" cy="841248"/>
           </a:xfrm>
           <a:prstGeom prst="rect">
             <a:avLst/>
@@ -10743,8 +10779,8 @@
         </p:nvSpPr>
         <p:spPr>
           <a:xfrm>
-            <a:off x="2194560" y="4050791"/>
-            <a:ext cx="7680960" cy="320040"/>
+            <a:off x="1965960" y="3776472"/>
+            <a:ext cx="8046720" cy="292608"/>
           </a:xfrm>
           <a:prstGeom prst="rect">
             <a:avLst/>
@@ -10759,13 +10795,13 @@
           <a:p>
             <a:pPr algn="l"/>
             <a:r>
-              <a:rPr sz="1400" b="1">
+              <a:rPr sz="1350" b="1">
                 <a:solidFill>
                   <a:srgbClr val="000000"/>
                 </a:solidFill>
                 <a:latin typeface="Arial"/>
               </a:rPr>
-              <a:t>Spatial arrays and assembly</a:t>
+              <a:t>PANELING</a:t>
             </a:r>
           </a:p>
         </p:txBody>
@@ -10778,8 +10814,8 @@
         </p:nvSpPr>
         <p:spPr>
           <a:xfrm>
-            <a:off x="2194560" y="4434840"/>
-            <a:ext cx="7680960" cy="320040"/>
+            <a:off x="1965960" y="4123944"/>
+            <a:ext cx="8046720" cy="310896"/>
           </a:xfrm>
           <a:prstGeom prst="rect">
             <a:avLst/>
@@ -10794,13 +10830,76 @@
           <a:p>
             <a:pPr algn="l"/>
             <a:r>
-              <a:rPr sz="1200">
+              <a:rPr sz="1150" b="1">
                 <a:solidFill>
                   <a:srgbClr val="000000"/>
                 </a:solidFill>
+                <a:latin typeface="Courier New"/>
+              </a:rPr>
+              <a:t>P3a</a:t>
+            </a:r>
+            <a:r>
+              <a:rPr sz="1150">
+                <a:solidFill>
+                  <a:srgbClr val="000000"/>
+                </a:solidFill>
                 <a:latin typeface="Calibri"/>
               </a:rPr>
-              <a:t>3D array and connection study  →  Modular print assembly</a:t>
+              <a:t> module sheet · due W6     </a:t>
+            </a:r>
+            <a:r>
+              <a:rPr sz="1150" b="1">
+                <a:solidFill>
+                  <a:srgbClr val="000000"/>
+                </a:solidFill>
+                <a:latin typeface="Courier New"/>
+              </a:rPr>
+              <a:t>P3b</a:t>
+            </a:r>
+            <a:r>
+              <a:rPr sz="1150">
+                <a:solidFill>
+                  <a:srgbClr val="000000"/>
+                </a:solidFill>
+                <a:latin typeface="Calibri"/>
+              </a:rPr>
+              <a:t> arrays, two sheets · due W8     </a:t>
+            </a:r>
+            <a:r>
+              <a:rPr sz="1150" b="1">
+                <a:solidFill>
+                  <a:srgbClr val="000000"/>
+                </a:solidFill>
+                <a:latin typeface="Courier New"/>
+              </a:rPr>
+              <a:t>P3c</a:t>
+            </a:r>
+            <a:r>
+              <a:rPr sz="1150">
+                <a:solidFill>
+                  <a:srgbClr val="000000"/>
+                </a:solidFill>
+                <a:latin typeface="Calibri"/>
+              </a:rPr>
+              <a:t> plotter field · due W10     </a:t>
+            </a:r>
+            <a:r>
+              <a:rPr sz="1150" b="1">
+                <a:solidFill>
+                  <a:srgbClr val="000000"/>
+                </a:solidFill>
+                <a:latin typeface="Courier New"/>
+              </a:rPr>
+              <a:t>P3d</a:t>
+            </a:r>
+            <a:r>
+              <a:rPr sz="1150">
+                <a:solidFill>
+                  <a:srgbClr val="000000"/>
+                </a:solidFill>
+                <a:latin typeface="Calibri"/>
+              </a:rPr>
+              <a:t> site analysis · due W10</a:t>
             </a:r>
           </a:p>
         </p:txBody>
@@ -10813,8 +10912,8 @@
         </p:nvSpPr>
         <p:spPr>
           <a:xfrm>
-            <a:off x="9784080" y="3931920"/>
-            <a:ext cx="1463040" cy="914400"/>
+            <a:off x="10104120" y="3685032"/>
+            <a:ext cx="1463040" cy="841248"/>
           </a:xfrm>
           <a:prstGeom prst="rect">
             <a:avLst/>
@@ -10835,7 +10934,7 @@
                 </a:solidFill>
                 <a:latin typeface="Arial"/>
               </a:rPr>
-              <a:t>14%</a:t>
+              <a:t>28%</a:t>
             </a:r>
           </a:p>
         </p:txBody>
@@ -10848,8 +10947,8 @@
         </p:nvSpPr>
         <p:spPr>
           <a:xfrm>
-            <a:off x="662940" y="5052059"/>
-            <a:ext cx="1051560" cy="914400"/>
+            <a:off x="662940" y="4704588"/>
+            <a:ext cx="914400" cy="841248"/>
           </a:xfrm>
           <a:prstGeom prst="rect">
             <a:avLst/>
@@ -10892,8 +10991,8 @@
         </p:nvSpPr>
         <p:spPr>
           <a:xfrm>
-            <a:off x="594360" y="4983479"/>
-            <a:ext cx="1051560" cy="914400"/>
+            <a:off x="594360" y="4636008"/>
+            <a:ext cx="914400" cy="841248"/>
           </a:xfrm>
           <a:prstGeom prst="rect">
             <a:avLst/>
@@ -10936,8 +11035,8 @@
         </p:nvSpPr>
         <p:spPr>
           <a:xfrm>
-            <a:off x="594360" y="5340095"/>
-            <a:ext cx="1051560" cy="274320"/>
+            <a:off x="594360" y="4956048"/>
+            <a:ext cx="914400" cy="274320"/>
           </a:xfrm>
           <a:prstGeom prst="rect">
             <a:avLst/>
@@ -10971,8 +11070,8 @@
         </p:nvSpPr>
         <p:spPr>
           <a:xfrm>
-            <a:off x="1988820" y="5052059"/>
-            <a:ext cx="9646920" cy="914400"/>
+            <a:off x="1805939" y="4704588"/>
+            <a:ext cx="9829800" cy="841248"/>
           </a:xfrm>
           <a:prstGeom prst="rect">
             <a:avLst/>
@@ -11015,8 +11114,8 @@
         </p:nvSpPr>
         <p:spPr>
           <a:xfrm>
-            <a:off x="1920240" y="4983479"/>
-            <a:ext cx="9646920" cy="914400"/>
+            <a:off x="1737360" y="4636008"/>
+            <a:ext cx="9829800" cy="841248"/>
           </a:xfrm>
           <a:prstGeom prst="rect">
             <a:avLst/>
@@ -11059,8 +11158,8 @@
         </p:nvSpPr>
         <p:spPr>
           <a:xfrm>
-            <a:off x="2194560" y="5102351"/>
-            <a:ext cx="7680960" cy="320040"/>
+            <a:off x="1965960" y="4727448"/>
+            <a:ext cx="8046720" cy="292608"/>
           </a:xfrm>
           <a:prstGeom prst="rect">
             <a:avLst/>
@@ -11075,13 +11174,13 @@
           <a:p>
             <a:pPr algn="l"/>
             <a:r>
-              <a:rPr sz="1400" b="1">
+              <a:rPr sz="1350" b="1">
                 <a:solidFill>
                   <a:srgbClr val="000000"/>
                 </a:solidFill>
                 <a:latin typeface="Arial"/>
               </a:rPr>
-              <a:t>Samples, fields and sections</a:t>
+              <a:t>VOLUMETRIC DATA</a:t>
             </a:r>
           </a:p>
         </p:txBody>
@@ -11094,8 +11193,8 @@
         </p:nvSpPr>
         <p:spPr>
           <a:xfrm>
-            <a:off x="2194560" y="5486399"/>
-            <a:ext cx="7680960" cy="320040"/>
+            <a:off x="1965960" y="5074920"/>
+            <a:ext cx="8046720" cy="310896"/>
           </a:xfrm>
           <a:prstGeom prst="rect">
             <a:avLst/>
@@ -11110,13 +11209,40 @@
           <a:p>
             <a:pPr algn="l"/>
             <a:r>
-              <a:rPr sz="1200">
+              <a:rPr sz="1150" b="1">
                 <a:solidFill>
                   <a:srgbClr val="000000"/>
                 </a:solidFill>
+                <a:latin typeface="Courier New"/>
+              </a:rPr>
+              <a:t>P4a</a:t>
+            </a:r>
+            <a:r>
+              <a:rPr sz="1150">
+                <a:solidFill>
+                  <a:srgbClr val="000000"/>
+                </a:solidFill>
                 <a:latin typeface="Calibri"/>
               </a:rPr>
-              <a:t>Point-cloud analysis  →  Volume, section and light  →  Sectional fabrication</a:t>
+              <a:t> SDF volume · due W12     </a:t>
+            </a:r>
+            <a:r>
+              <a:rPr sz="1150" b="1">
+                <a:solidFill>
+                  <a:srgbClr val="000000"/>
+                </a:solidFill>
+                <a:latin typeface="Courier New"/>
+              </a:rPr>
+              <a:t>P4b</a:t>
+            </a:r>
+            <a:r>
+              <a:rPr sz="1150">
+                <a:solidFill>
+                  <a:srgbClr val="000000"/>
+                </a:solidFill>
+                <a:latin typeface="Calibri"/>
+              </a:rPr>
+              <a:t> laser-cut slices · due FINAL</a:t>
             </a:r>
           </a:p>
         </p:txBody>
@@ -11129,8 +11255,8 @@
         </p:nvSpPr>
         <p:spPr>
           <a:xfrm>
-            <a:off x="9784080" y="4983479"/>
-            <a:ext cx="1463040" cy="914400"/>
+            <a:off x="10104120" y="4636008"/>
+            <a:ext cx="1463040" cy="841248"/>
           </a:xfrm>
           <a:prstGeom prst="rect">
             <a:avLst/>
@@ -11151,7 +11277,7 @@
                 </a:solidFill>
                 <a:latin typeface="Arial"/>
               </a:rPr>
-              <a:t>21%</a:t>
+              <a:t>28%</a:t>
             </a:r>
           </a:p>
         </p:txBody>
@@ -11164,8 +11290,8 @@
         </p:nvSpPr>
         <p:spPr>
           <a:xfrm>
-            <a:off x="662940" y="6195060"/>
-            <a:ext cx="10972800" cy="566928"/>
+            <a:off x="662940" y="5756148"/>
+            <a:ext cx="10972800" cy="548640"/>
           </a:xfrm>
           <a:prstGeom prst="rect">
             <a:avLst/>
@@ -11208,8 +11334,8 @@
         </p:nvSpPr>
         <p:spPr>
           <a:xfrm>
-            <a:off x="594360" y="6126480"/>
-            <a:ext cx="10972800" cy="566928"/>
+            <a:off x="594360" y="5687568"/>
+            <a:ext cx="10972800" cy="548640"/>
           </a:xfrm>
           <a:prstGeom prst="rect">
             <a:avLst/>
@@ -11252,8 +11378,8 @@
         </p:nvSpPr>
         <p:spPr>
           <a:xfrm>
-            <a:off x="914400" y="6126480"/>
-            <a:ext cx="10332720" cy="566928"/>
+            <a:off x="777240" y="5687568"/>
+            <a:ext cx="10607040" cy="548640"/>
           </a:xfrm>
           <a:prstGeom prst="rect">
             <a:avLst/>
@@ -11266,15 +11392,50 @@
           </a:bodyPr>
           <a:lstStyle/>
           <a:p>
+            <a:pPr algn="ctr"/>
+            <a:r>
+              <a:rPr sz="1200" b="1">
+                <a:solidFill>
+                  <a:srgbClr val="000000"/>
+                </a:solidFill>
+                <a:latin typeface="Arial"/>
+              </a:rPr>
+              <a:t>MIDTERM REVIEW OF P1–P3 · WEEK 10 — OCT 27 · 7%     FINAL BOOKLET · DUE FINAL · 11%     PARTICIPATION · 5%</a:t>
+            </a:r>
+          </a:p>
+        </p:txBody>
+      </p:sp>
+      <p:sp>
+        <p:nvSpPr>
+          <p:cNvPr id="40" name="TextBox 39"/>
+          <p:cNvSpPr txBox="1"/>
+          <p:nvPr/>
+        </p:nvSpPr>
+        <p:spPr>
+          <a:xfrm>
+            <a:off x="594360" y="6382512"/>
+            <a:ext cx="10972800" cy="274320"/>
+          </a:xfrm>
+          <a:prstGeom prst="rect">
+            <a:avLst/>
+          </a:prstGeom>
+          <a:noFill/>
+        </p:spPr>
+        <p:txBody>
+          <a:bodyPr wrap="square" lIns="0" rIns="0" tIns="0" bIns="0" anchor="t">
+            <a:spAutoFit/>
+          </a:bodyPr>
+          <a:lstStyle/>
+          <a:p>
             <a:pPr algn="l"/>
             <a:r>
-              <a:rPr sz="1200" b="1">
-                <a:solidFill>
-                  <a:srgbClr val="000000"/>
-                </a:solidFill>
-                <a:latin typeface="Arial"/>
-              </a:rPr>
-              <a:t>You do the short assignment, then revise it inside its project. The project itself adds no second grade — the revision is what the booklet rewards.</a:t>
+              <a:rPr sz="1150">
+                <a:solidFill>
+                  <a:srgbClr val="6B6B6B"/>
+                </a:solidFill>
+                <a:latin typeface="Calibri"/>
+              </a:rPr>
+              <a:t>Dates after the midterm are provisional. The course site is the reference for every due date.</a:t>
             </a:r>
           </a:p>
         </p:txBody>
@@ -13277,7 +13438,7 @@
                 </a:solidFill>
                 <a:latin typeface="Calibri"/>
               </a:rPr>
-              <a:t>A type hierarchy — three levels, no more.</a:t>
+              <a:t>A type hierarchy — four levels at most.</a:t>
             </a:r>
           </a:p>
           <a:p>
@@ -13293,7 +13454,7 @@
                 </a:solidFill>
                 <a:latin typeface="Calibri"/>
               </a:rPr>
-              <a:t>A line-weight set — four weights.</a:t>
+              <a:t>A line-weight set — four weights at most.</a:t>
             </a:r>
           </a:p>
           <a:p>
@@ -13309,7 +13470,7 @@
                 </a:solidFill>
                 <a:latin typeface="Calibri"/>
               </a:rPr>
-              <a:t>A palette of three colours, and the black is one of them.</a:t>
+              <a:t>Three colours — black and paper count as two.</a:t>
             </a:r>
           </a:p>
           <a:p>
@@ -13448,7 +13609,7 @@
                 </a:solidFill>
                 <a:latin typeface="Arial"/>
               </a:rPr>
-              <a:t>DECIDE IT ONCE, APPLY IT EVERY WEEK, REVISE IT AT THE MIDTERM. IT IS NOT REMADE PER SHEET.</a:t>
+              <a:t>FOUR PAGES. DECIDE IT ONCE, APPLY IT EVERY WEEK, REVISE IT AFTER CRITIQUE. NOT REMADE PER SHEET.</a:t>
             </a:r>
           </a:p>
         </p:txBody>
@@ -13553,7 +13714,7 @@
                 </a:solidFill>
                 <a:latin typeface="Arial"/>
               </a:rPr>
-              <a:t>THREE MANUALS WORTH STEALING FROM</a:t>
+              <a:t>THREE MANUALS TO STUDY</a:t>
             </a:r>
           </a:p>
         </p:txBody>
@@ -13588,7 +13749,7 @@
                 </a:solidFill>
                 <a:latin typeface="Calibri"/>
               </a:rPr>
-              <a:t>This document type has a history. Each one is a page grid, a type hierarchy, and a rule for every case that comes up.</a:t>
+              <a:t>Each one is a set of rules, drawn out, and applied to real cases. Read them as systems.</a:t>
             </a:r>
           </a:p>
         </p:txBody>
@@ -13602,7 +13763,7 @@
         <p:spPr>
           <a:xfrm>
             <a:off x="662940" y="1851660"/>
-            <a:ext cx="3520440" cy="1737360"/>
+            <a:ext cx="3520440" cy="457200"/>
           </a:xfrm>
           <a:prstGeom prst="rect">
             <a:avLst/>
@@ -13646,13 +13807,13 @@
         <p:spPr>
           <a:xfrm>
             <a:off x="594360" y="1783080"/>
-            <a:ext cx="3520440" cy="1737360"/>
-          </a:xfrm>
-          <a:prstGeom prst="rect">
-            <a:avLst/>
-          </a:prstGeom>
-          <a:solidFill>
-            <a:srgbClr val="F4F4EE"/>
+            <a:ext cx="3520440" cy="457200"/>
+          </a:xfrm>
+          <a:prstGeom prst="rect">
+            <a:avLst/>
+          </a:prstGeom>
+          <a:solidFill>
+            <a:srgbClr val="00D9E1"/>
           </a:solidFill>
           <a:ln w="34925">
             <a:solidFill>
@@ -13689,130 +13850,7 @@
         </p:nvSpPr>
         <p:spPr>
           <a:xfrm>
-            <a:off x="868680" y="1783080"/>
-            <a:ext cx="2971800" cy="1737360"/>
-          </a:xfrm>
-          <a:prstGeom prst="rect">
-            <a:avLst/>
-          </a:prstGeom>
-          <a:noFill/>
-        </p:spPr>
-        <p:txBody>
-          <a:bodyPr wrap="square" lIns="0" rIns="0" tIns="0" bIns="0" anchor="ctr">
-            <a:spAutoFit/>
-          </a:bodyPr>
-          <a:lstStyle/>
-          <a:p>
-            <a:pPr algn="ctr"/>
-            <a:r>
-              <a:rPr sz="1150">
-                <a:solidFill>
-                  <a:srgbClr val="6B6B6B"/>
-                </a:solidFill>
-                <a:latin typeface="Calibri"/>
-              </a:rPr>
-              <a:t>Add: a spread from the NYCTA manual - a signage case with its dimensioned rule.</a:t>
-            </a:r>
-          </a:p>
-        </p:txBody>
-      </p:sp>
-      <p:sp>
-        <p:nvSpPr>
-          <p:cNvPr id="8" name="Rectangle 7"/>
-          <p:cNvSpPr/>
-          <p:nvPr/>
-        </p:nvSpPr>
-        <p:spPr>
-          <a:xfrm>
-            <a:off x="662940" y="3680460"/>
-            <a:ext cx="3520440" cy="438912"/>
-          </a:xfrm>
-          <a:prstGeom prst="rect">
-            <a:avLst/>
-          </a:prstGeom>
-          <a:solidFill>
-            <a:srgbClr val="000000"/>
-          </a:solidFill>
-          <a:ln w="6350">
-            <a:solidFill>
-              <a:srgbClr val="000000"/>
-            </a:solidFill>
-          </a:ln>
-          <a:effectLst/>
-        </p:spPr>
-        <p:style>
-          <a:lnRef idx="1">
-            <a:schemeClr val="accent1"/>
-          </a:lnRef>
-          <a:fillRef idx="3">
-            <a:schemeClr val="accent1"/>
-          </a:fillRef>
-          <a:effectRef idx="2">
-            <a:schemeClr val="accent1"/>
-          </a:effectRef>
-          <a:fontRef idx="minor">
-            <a:schemeClr val="lt1"/>
-          </a:fontRef>
-        </p:style>
-        <p:txBody>
-          <a:bodyPr rtlCol="0" anchor="ctr"/>
-          <a:lstStyle/>
-          <a:p/>
-        </p:txBody>
-      </p:sp>
-      <p:sp>
-        <p:nvSpPr>
-          <p:cNvPr id="9" name="Rectangle 8"/>
-          <p:cNvSpPr/>
-          <p:nvPr/>
-        </p:nvSpPr>
-        <p:spPr>
-          <a:xfrm>
-            <a:off x="594360" y="3611880"/>
-            <a:ext cx="3520440" cy="438912"/>
-          </a:xfrm>
-          <a:prstGeom prst="rect">
-            <a:avLst/>
-          </a:prstGeom>
-          <a:solidFill>
-            <a:srgbClr val="00D9E1"/>
-          </a:solidFill>
-          <a:ln w="34925">
-            <a:solidFill>
-              <a:srgbClr val="000000"/>
-            </a:solidFill>
-          </a:ln>
-          <a:effectLst/>
-        </p:spPr>
-        <p:style>
-          <a:lnRef idx="1">
-            <a:schemeClr val="accent1"/>
-          </a:lnRef>
-          <a:fillRef idx="3">
-            <a:schemeClr val="accent1"/>
-          </a:fillRef>
-          <a:effectRef idx="2">
-            <a:schemeClr val="accent1"/>
-          </a:effectRef>
-          <a:fontRef idx="minor">
-            <a:schemeClr val="lt1"/>
-          </a:fontRef>
-        </p:style>
-        <p:txBody>
-          <a:bodyPr rtlCol="0" anchor="ctr"/>
-          <a:lstStyle/>
-          <a:p/>
-        </p:txBody>
-      </p:sp>
-      <p:sp>
-        <p:nvSpPr>
-          <p:cNvPr id="10" name="TextBox 9"/>
-          <p:cNvSpPr txBox="1"/>
-          <p:nvPr/>
-        </p:nvSpPr>
-        <p:spPr>
-          <a:xfrm>
-            <a:off x="594360" y="3730752"/>
+            <a:off x="594360" y="1911095"/>
             <a:ext cx="3520440" cy="274320"/>
           </a:xfrm>
           <a:prstGeom prst="rect">
@@ -13828,27 +13866,115 @@
           <a:p>
             <a:pPr algn="ctr"/>
             <a:r>
-              <a:rPr sz="1100" b="1">
+              <a:rPr sz="1300" b="1">
                 <a:solidFill>
                   <a:srgbClr val="000000"/>
                 </a:solidFill>
                 <a:latin typeface="Arial"/>
               </a:rPr>
-              <a:t>NYCTA GRAPHICS STANDARDS</a:t>
-            </a:r>
-          </a:p>
-        </p:txBody>
-      </p:sp>
-      <p:sp>
-        <p:nvSpPr>
-          <p:cNvPr id="11" name="TextBox 10"/>
+              <a:t>NYCTA  ·  1970</a:t>
+            </a:r>
+          </a:p>
+        </p:txBody>
+      </p:sp>
+      <p:sp>
+        <p:nvSpPr>
+          <p:cNvPr id="8" name="Rectangle 7"/>
+          <p:cNvSpPr/>
+          <p:nvPr/>
+        </p:nvSpPr>
+        <p:spPr>
+          <a:xfrm>
+            <a:off x="662940" y="2400300"/>
+            <a:ext cx="3520440" cy="2331720"/>
+          </a:xfrm>
+          <a:prstGeom prst="rect">
+            <a:avLst/>
+          </a:prstGeom>
+          <a:solidFill>
+            <a:srgbClr val="000000"/>
+          </a:solidFill>
+          <a:ln w="6350">
+            <a:solidFill>
+              <a:srgbClr val="000000"/>
+            </a:solidFill>
+          </a:ln>
+          <a:effectLst/>
+        </p:spPr>
+        <p:style>
+          <a:lnRef idx="1">
+            <a:schemeClr val="accent1"/>
+          </a:lnRef>
+          <a:fillRef idx="3">
+            <a:schemeClr val="accent1"/>
+          </a:fillRef>
+          <a:effectRef idx="2">
+            <a:schemeClr val="accent1"/>
+          </a:effectRef>
+          <a:fontRef idx="minor">
+            <a:schemeClr val="lt1"/>
+          </a:fontRef>
+        </p:style>
+        <p:txBody>
+          <a:bodyPr rtlCol="0" anchor="ctr"/>
+          <a:lstStyle/>
+          <a:p/>
+        </p:txBody>
+      </p:sp>
+      <p:sp>
+        <p:nvSpPr>
+          <p:cNvPr id="9" name="Rectangle 8"/>
+          <p:cNvSpPr/>
+          <p:nvPr/>
+        </p:nvSpPr>
+        <p:spPr>
+          <a:xfrm>
+            <a:off x="594360" y="2331720"/>
+            <a:ext cx="3520440" cy="2331720"/>
+          </a:xfrm>
+          <a:prstGeom prst="rect">
+            <a:avLst/>
+          </a:prstGeom>
+          <a:solidFill>
+            <a:srgbClr val="FFFDF7"/>
+          </a:solidFill>
+          <a:ln w="34925">
+            <a:solidFill>
+              <a:srgbClr val="000000"/>
+            </a:solidFill>
+          </a:ln>
+          <a:effectLst/>
+        </p:spPr>
+        <p:style>
+          <a:lnRef idx="1">
+            <a:schemeClr val="accent1"/>
+          </a:lnRef>
+          <a:fillRef idx="3">
+            <a:schemeClr val="accent1"/>
+          </a:fillRef>
+          <a:effectRef idx="2">
+            <a:schemeClr val="accent1"/>
+          </a:effectRef>
+          <a:fontRef idx="minor">
+            <a:schemeClr val="lt1"/>
+          </a:fontRef>
+        </p:style>
+        <p:txBody>
+          <a:bodyPr rtlCol="0" anchor="ctr"/>
+          <a:lstStyle/>
+          <a:p/>
+        </p:txBody>
+      </p:sp>
+      <p:sp>
+        <p:nvSpPr>
+          <p:cNvPr id="10" name="TextBox 9"/>
           <p:cNvSpPr txBox="1"/>
           <p:nvPr/>
         </p:nvSpPr>
         <p:spPr>
           <a:xfrm>
-            <a:off x="640080" y="4187952"/>
-            <a:ext cx="3429000" cy="256032"/>
+            <a:off x="850392" y="2514600"/>
+            <a:ext cx="3017520" cy="274320"/>
           </a:xfrm>
           <a:prstGeom prst="rect">
             <a:avLst/>
@@ -13863,27 +13989,106 @@
           <a:p>
             <a:pPr algn="l"/>
             <a:r>
-              <a:rPr sz="1050">
+              <a:rPr sz="1150" b="1">
                 <a:solidFill>
                   <a:srgbClr val="6B6B6B"/>
                 </a:solidFill>
+                <a:latin typeface="Arial"/>
+              </a:rPr>
+              <a:t>GRAPHICS STANDARDS MANUAL</a:t>
+            </a:r>
+          </a:p>
+        </p:txBody>
+      </p:sp>
+      <p:sp>
+        <p:nvSpPr>
+          <p:cNvPr id="11" name="TextBox 10"/>
+          <p:cNvSpPr txBox="1"/>
+          <p:nvPr/>
+        </p:nvSpPr>
+        <p:spPr>
+          <a:xfrm>
+            <a:off x="850392" y="2852928"/>
+            <a:ext cx="3017520" cy="365760"/>
+          </a:xfrm>
+          <a:prstGeom prst="rect">
+            <a:avLst/>
+          </a:prstGeom>
+          <a:noFill/>
+        </p:spPr>
+        <p:txBody>
+          <a:bodyPr wrap="square" lIns="0" rIns="0" tIns="0" bIns="0" anchor="t">
+            <a:spAutoFit/>
+          </a:bodyPr>
+          <a:lstStyle/>
+          <a:p>
+            <a:pPr algn="l"/>
+            <a:r>
+              <a:rPr sz="1500" b="1">
+                <a:solidFill>
+                  <a:srgbClr val="000000"/>
+                </a:solidFill>
                 <a:latin typeface="Calibri"/>
               </a:rPr>
-              <a:t>Massimo Vignelli and Bob Noorda, Unimark - 1970 - archive.org/details/nycta-gs-manual</a:t>
-            </a:r>
-          </a:p>
-        </p:txBody>
-      </p:sp>
-      <p:sp>
-        <p:nvSpPr>
-          <p:cNvPr id="12" name="TextBox 11"/>
+              <a:t>A transit signage system.</a:t>
+            </a:r>
+          </a:p>
+        </p:txBody>
+      </p:sp>
+      <p:sp>
+        <p:nvSpPr>
+          <p:cNvPr id="12" name="Rectangle 11"/>
+          <p:cNvSpPr/>
+          <p:nvPr/>
+        </p:nvSpPr>
+        <p:spPr>
+          <a:xfrm>
+            <a:off x="850392" y="3401568"/>
+            <a:ext cx="3017520" cy="0"/>
+          </a:xfrm>
+          <a:prstGeom prst="rect">
+            <a:avLst/>
+          </a:prstGeom>
+          <a:noFill/>
+          <a:ln w="19050">
+            <a:solidFill>
+              <a:srgbClr val="B4B4AC"/>
+            </a:solidFill>
+          </a:ln>
+          <a:effectLst/>
+        </p:spPr>
+        <p:style>
+          <a:lnRef idx="1">
+            <a:schemeClr val="accent1"/>
+          </a:lnRef>
+          <a:fillRef idx="3">
+            <a:schemeClr val="accent1"/>
+          </a:fillRef>
+          <a:effectRef idx="2">
+            <a:schemeClr val="accent1"/>
+          </a:effectRef>
+          <a:fontRef idx="minor">
+            <a:schemeClr val="lt1"/>
+          </a:fontRef>
+        </p:style>
+        <p:txBody>
+          <a:bodyPr rtlCol="0" anchor="ctr"/>
+          <a:lstStyle/>
+          <a:p>
+            <a:pPr algn="ctr"/>
+          </a:p>
+        </p:txBody>
+      </p:sp>
+      <p:sp>
+        <p:nvSpPr>
+          <p:cNvPr id="13" name="TextBox 12"/>
           <p:cNvSpPr txBox="1"/>
           <p:nvPr/>
         </p:nvSpPr>
         <p:spPr>
           <a:xfrm>
-            <a:off x="640080" y="4526280"/>
-            <a:ext cx="3429000" cy="1051560"/>
+            <a:off x="850392" y="3547872"/>
+            <a:ext cx="3017520" cy="1005840"/>
           </a:xfrm>
           <a:prstGeom prst="rect">
             <a:avLst/>
@@ -13908,313 +14113,9 @@
                 </a:solidFill>
                 <a:latin typeface="Calibri"/>
               </a:rPr>
-              <a:t>A binder of cases. Every sign in the New York subway, drawn at size, with the rule beside it. The manual is the design - the signs are what falls out of it.</a:t>
-            </a:r>
-          </a:p>
-        </p:txBody>
-      </p:sp>
-      <p:sp>
-        <p:nvSpPr>
-          <p:cNvPr id="13" name="Rectangle 12"/>
-          <p:cNvSpPr/>
-          <p:nvPr/>
-        </p:nvSpPr>
-        <p:spPr>
-          <a:xfrm>
-            <a:off x="4393692" y="1851660"/>
-            <a:ext cx="3520440" cy="1737360"/>
-          </a:xfrm>
-          <a:prstGeom prst="rect">
-            <a:avLst/>
-          </a:prstGeom>
-          <a:solidFill>
-            <a:srgbClr val="000000"/>
-          </a:solidFill>
-          <a:ln w="6350">
-            <a:solidFill>
-              <a:srgbClr val="000000"/>
-            </a:solidFill>
-          </a:ln>
-          <a:effectLst/>
-        </p:spPr>
-        <p:style>
-          <a:lnRef idx="1">
-            <a:schemeClr val="accent1"/>
-          </a:lnRef>
-          <a:fillRef idx="3">
-            <a:schemeClr val="accent1"/>
-          </a:fillRef>
-          <a:effectRef idx="2">
-            <a:schemeClr val="accent1"/>
-          </a:effectRef>
-          <a:fontRef idx="minor">
-            <a:schemeClr val="lt1"/>
-          </a:fontRef>
-        </p:style>
-        <p:txBody>
-          <a:bodyPr rtlCol="0" anchor="ctr"/>
-          <a:lstStyle/>
-          <a:p/>
-        </p:txBody>
-      </p:sp>
-      <p:sp>
-        <p:nvSpPr>
-          <p:cNvPr id="14" name="Rectangle 13"/>
-          <p:cNvSpPr/>
-          <p:nvPr/>
-        </p:nvSpPr>
-        <p:spPr>
-          <a:xfrm>
-            <a:off x="4325112" y="1783080"/>
-            <a:ext cx="3520440" cy="1737360"/>
-          </a:xfrm>
-          <a:prstGeom prst="rect">
-            <a:avLst/>
-          </a:prstGeom>
-          <a:solidFill>
-            <a:srgbClr val="F4F4EE"/>
-          </a:solidFill>
-          <a:ln w="34925">
-            <a:solidFill>
-              <a:srgbClr val="000000"/>
-            </a:solidFill>
-          </a:ln>
-          <a:effectLst/>
-        </p:spPr>
-        <p:style>
-          <a:lnRef idx="1">
-            <a:schemeClr val="accent1"/>
-          </a:lnRef>
-          <a:fillRef idx="3">
-            <a:schemeClr val="accent1"/>
-          </a:fillRef>
-          <a:effectRef idx="2">
-            <a:schemeClr val="accent1"/>
-          </a:effectRef>
-          <a:fontRef idx="minor">
-            <a:schemeClr val="lt1"/>
-          </a:fontRef>
-        </p:style>
-        <p:txBody>
-          <a:bodyPr rtlCol="0" anchor="ctr"/>
-          <a:lstStyle/>
-          <a:p/>
-        </p:txBody>
-      </p:sp>
-      <p:sp>
-        <p:nvSpPr>
-          <p:cNvPr id="15" name="TextBox 14"/>
-          <p:cNvSpPr txBox="1"/>
-          <p:nvPr/>
-        </p:nvSpPr>
-        <p:spPr>
-          <a:xfrm>
-            <a:off x="4599432" y="1783080"/>
-            <a:ext cx="2971800" cy="1737360"/>
-          </a:xfrm>
-          <a:prstGeom prst="rect">
-            <a:avLst/>
-          </a:prstGeom>
-          <a:noFill/>
-        </p:spPr>
-        <p:txBody>
-          <a:bodyPr wrap="square" lIns="0" rIns="0" tIns="0" bIns="0" anchor="ctr">
-            <a:spAutoFit/>
-          </a:bodyPr>
-          <a:lstStyle/>
-          <a:p>
-            <a:pPr algn="ctr"/>
-            <a:r>
-              <a:rPr sz="1150">
-                <a:solidFill>
-                  <a:srgbClr val="6B6B6B"/>
-                </a:solidFill>
-                <a:latin typeface="Calibri"/>
-              </a:rPr>
-              <a:t>Add: a page from the NASA manual - the mark with its clearance and placement rules.</a:t>
-            </a:r>
-          </a:p>
-        </p:txBody>
-      </p:sp>
-      <p:sp>
-        <p:nvSpPr>
-          <p:cNvPr id="16" name="Rectangle 15"/>
-          <p:cNvSpPr/>
-          <p:nvPr/>
-        </p:nvSpPr>
-        <p:spPr>
-          <a:xfrm>
-            <a:off x="4393692" y="3680460"/>
-            <a:ext cx="3520440" cy="438912"/>
-          </a:xfrm>
-          <a:prstGeom prst="rect">
-            <a:avLst/>
-          </a:prstGeom>
-          <a:solidFill>
-            <a:srgbClr val="000000"/>
-          </a:solidFill>
-          <a:ln w="6350">
-            <a:solidFill>
-              <a:srgbClr val="000000"/>
-            </a:solidFill>
-          </a:ln>
-          <a:effectLst/>
-        </p:spPr>
-        <p:style>
-          <a:lnRef idx="1">
-            <a:schemeClr val="accent1"/>
-          </a:lnRef>
-          <a:fillRef idx="3">
-            <a:schemeClr val="accent1"/>
-          </a:fillRef>
-          <a:effectRef idx="2">
-            <a:schemeClr val="accent1"/>
-          </a:effectRef>
-          <a:fontRef idx="minor">
-            <a:schemeClr val="lt1"/>
-          </a:fontRef>
-        </p:style>
-        <p:txBody>
-          <a:bodyPr rtlCol="0" anchor="ctr"/>
-          <a:lstStyle/>
-          <a:p/>
-        </p:txBody>
-      </p:sp>
-      <p:sp>
-        <p:nvSpPr>
-          <p:cNvPr id="17" name="Rectangle 16"/>
-          <p:cNvSpPr/>
-          <p:nvPr/>
-        </p:nvSpPr>
-        <p:spPr>
-          <a:xfrm>
-            <a:off x="4325112" y="3611880"/>
-            <a:ext cx="3520440" cy="438912"/>
-          </a:xfrm>
-          <a:prstGeom prst="rect">
-            <a:avLst/>
-          </a:prstGeom>
-          <a:solidFill>
-            <a:srgbClr val="FF4D8D"/>
-          </a:solidFill>
-          <a:ln w="34925">
-            <a:solidFill>
-              <a:srgbClr val="000000"/>
-            </a:solidFill>
-          </a:ln>
-          <a:effectLst/>
-        </p:spPr>
-        <p:style>
-          <a:lnRef idx="1">
-            <a:schemeClr val="accent1"/>
-          </a:lnRef>
-          <a:fillRef idx="3">
-            <a:schemeClr val="accent1"/>
-          </a:fillRef>
-          <a:effectRef idx="2">
-            <a:schemeClr val="accent1"/>
-          </a:effectRef>
-          <a:fontRef idx="minor">
-            <a:schemeClr val="lt1"/>
-          </a:fontRef>
-        </p:style>
-        <p:txBody>
-          <a:bodyPr rtlCol="0" anchor="ctr"/>
-          <a:lstStyle/>
-          <a:p/>
-        </p:txBody>
-      </p:sp>
-      <p:sp>
-        <p:nvSpPr>
-          <p:cNvPr id="18" name="TextBox 17"/>
-          <p:cNvSpPr txBox="1"/>
-          <p:nvPr/>
-        </p:nvSpPr>
-        <p:spPr>
-          <a:xfrm>
-            <a:off x="4325112" y="3730752"/>
-            <a:ext cx="3520440" cy="274320"/>
-          </a:xfrm>
-          <a:prstGeom prst="rect">
-            <a:avLst/>
-          </a:prstGeom>
-          <a:noFill/>
-        </p:spPr>
-        <p:txBody>
-          <a:bodyPr wrap="square" lIns="0" rIns="0" tIns="0" bIns="0" anchor="t">
-            <a:spAutoFit/>
-          </a:bodyPr>
-          <a:lstStyle/>
-          <a:p>
-            <a:pPr algn="ctr"/>
-            <a:r>
-              <a:rPr sz="1100" b="1">
-                <a:solidFill>
-                  <a:srgbClr val="000000"/>
-                </a:solidFill>
-                <a:latin typeface="Arial"/>
-              </a:rPr>
-              <a:t>NASA GRAPHICS STANDARDS</a:t>
-            </a:r>
-          </a:p>
-        </p:txBody>
-      </p:sp>
-      <p:sp>
-        <p:nvSpPr>
-          <p:cNvPr id="19" name="TextBox 18"/>
-          <p:cNvSpPr txBox="1"/>
-          <p:nvPr/>
-        </p:nvSpPr>
-        <p:spPr>
-          <a:xfrm>
-            <a:off x="4370832" y="4187952"/>
-            <a:ext cx="3429000" cy="256032"/>
-          </a:xfrm>
-          <a:prstGeom prst="rect">
-            <a:avLst/>
-          </a:prstGeom>
-          <a:noFill/>
-        </p:spPr>
-        <p:txBody>
-          <a:bodyPr wrap="square" lIns="0" rIns="0" tIns="0" bIns="0" anchor="t">
-            <a:spAutoFit/>
-          </a:bodyPr>
-          <a:lstStyle/>
-          <a:p>
-            <a:pPr algn="l"/>
-            <a:r>
-              <a:rPr sz="1050">
-                <a:solidFill>
-                  <a:srgbClr val="6B6B6B"/>
-                </a:solidFill>
-                <a:latin typeface="Calibri"/>
-              </a:rPr>
-              <a:t>Richard Danne and Bruce Blackburn - 1975 - archive.org/details/NASA_Graphics_Standards_Manual</a:t>
-            </a:r>
-          </a:p>
-        </p:txBody>
-      </p:sp>
-      <p:sp>
-        <p:nvSpPr>
-          <p:cNvPr id="20" name="TextBox 19"/>
-          <p:cNvSpPr txBox="1"/>
-          <p:nvPr/>
-        </p:nvSpPr>
-        <p:spPr>
-          <a:xfrm>
-            <a:off x="4370832" y="4526280"/>
-            <a:ext cx="3429000" cy="1051560"/>
-          </a:xfrm>
-          <a:prstGeom prst="rect">
-            <a:avLst/>
-          </a:prstGeom>
-          <a:noFill/>
-        </p:spPr>
-        <p:txBody>
-          <a:bodyPr wrap="square" lIns="0" rIns="0" tIns="0" bIns="0" anchor="t">
-            <a:spAutoFit/>
-          </a:bodyPr>
-          <a:lstStyle/>
+              <a:t>Find one rule.</a:t>
+            </a:r>
+          </a:p>
           <a:p>
             <a:pPr algn="l">
               <a:lnSpc>
@@ -14228,313 +14129,9 @@
                 </a:solidFill>
                 <a:latin typeface="Calibri"/>
               </a:rPr>
-              <a:t>One mark, and a hundred pages of where it is allowed to go. What is being designed is the consistency, not the logotype.</a:t>
-            </a:r>
-          </a:p>
-        </p:txBody>
-      </p:sp>
-      <p:sp>
-        <p:nvSpPr>
-          <p:cNvPr id="21" name="Rectangle 20"/>
-          <p:cNvSpPr/>
-          <p:nvPr/>
-        </p:nvSpPr>
-        <p:spPr>
-          <a:xfrm>
-            <a:off x="8124444" y="1851660"/>
-            <a:ext cx="3520440" cy="1737360"/>
-          </a:xfrm>
-          <a:prstGeom prst="rect">
-            <a:avLst/>
-          </a:prstGeom>
-          <a:solidFill>
-            <a:srgbClr val="000000"/>
-          </a:solidFill>
-          <a:ln w="6350">
-            <a:solidFill>
-              <a:srgbClr val="000000"/>
-            </a:solidFill>
-          </a:ln>
-          <a:effectLst/>
-        </p:spPr>
-        <p:style>
-          <a:lnRef idx="1">
-            <a:schemeClr val="accent1"/>
-          </a:lnRef>
-          <a:fillRef idx="3">
-            <a:schemeClr val="accent1"/>
-          </a:fillRef>
-          <a:effectRef idx="2">
-            <a:schemeClr val="accent1"/>
-          </a:effectRef>
-          <a:fontRef idx="minor">
-            <a:schemeClr val="lt1"/>
-          </a:fontRef>
-        </p:style>
-        <p:txBody>
-          <a:bodyPr rtlCol="0" anchor="ctr"/>
-          <a:lstStyle/>
-          <a:p/>
-        </p:txBody>
-      </p:sp>
-      <p:sp>
-        <p:nvSpPr>
-          <p:cNvPr id="22" name="Rectangle 21"/>
-          <p:cNvSpPr/>
-          <p:nvPr/>
-        </p:nvSpPr>
-        <p:spPr>
-          <a:xfrm>
-            <a:off x="8055864" y="1783080"/>
-            <a:ext cx="3520440" cy="1737360"/>
-          </a:xfrm>
-          <a:prstGeom prst="rect">
-            <a:avLst/>
-          </a:prstGeom>
-          <a:solidFill>
-            <a:srgbClr val="F4F4EE"/>
-          </a:solidFill>
-          <a:ln w="34925">
-            <a:solidFill>
-              <a:srgbClr val="000000"/>
-            </a:solidFill>
-          </a:ln>
-          <a:effectLst/>
-        </p:spPr>
-        <p:style>
-          <a:lnRef idx="1">
-            <a:schemeClr val="accent1"/>
-          </a:lnRef>
-          <a:fillRef idx="3">
-            <a:schemeClr val="accent1"/>
-          </a:fillRef>
-          <a:effectRef idx="2">
-            <a:schemeClr val="accent1"/>
-          </a:effectRef>
-          <a:fontRef idx="minor">
-            <a:schemeClr val="lt1"/>
-          </a:fontRef>
-        </p:style>
-        <p:txBody>
-          <a:bodyPr rtlCol="0" anchor="ctr"/>
-          <a:lstStyle/>
-          <a:p/>
-        </p:txBody>
-      </p:sp>
-      <p:sp>
-        <p:nvSpPr>
-          <p:cNvPr id="23" name="TextBox 22"/>
-          <p:cNvSpPr txBox="1"/>
-          <p:nvPr/>
-        </p:nvSpPr>
-        <p:spPr>
-          <a:xfrm>
-            <a:off x="8330184" y="1783080"/>
-            <a:ext cx="2971800" cy="1737360"/>
-          </a:xfrm>
-          <a:prstGeom prst="rect">
-            <a:avLst/>
-          </a:prstGeom>
-          <a:noFill/>
-        </p:spPr>
-        <p:txBody>
-          <a:bodyPr wrap="square" lIns="0" rIns="0" tIns="0" bIns="0" anchor="ctr">
-            <a:spAutoFit/>
-          </a:bodyPr>
-          <a:lstStyle/>
-          <a:p>
-            <a:pPr algn="ctr"/>
-            <a:r>
-              <a:rPr sz="1150">
-                <a:solidFill>
-                  <a:srgbClr val="6B6B6B"/>
-                </a:solidFill>
-                <a:latin typeface="Calibri"/>
-              </a:rPr>
-              <a:t>Add: the Munich 1972 pictogram sheet, and the construction grid behind one figure.</a:t>
-            </a:r>
-          </a:p>
-        </p:txBody>
-      </p:sp>
-      <p:sp>
-        <p:nvSpPr>
-          <p:cNvPr id="24" name="Rectangle 23"/>
-          <p:cNvSpPr/>
-          <p:nvPr/>
-        </p:nvSpPr>
-        <p:spPr>
-          <a:xfrm>
-            <a:off x="8124444" y="3680460"/>
-            <a:ext cx="3520440" cy="438912"/>
-          </a:xfrm>
-          <a:prstGeom prst="rect">
-            <a:avLst/>
-          </a:prstGeom>
-          <a:solidFill>
-            <a:srgbClr val="000000"/>
-          </a:solidFill>
-          <a:ln w="6350">
-            <a:solidFill>
-              <a:srgbClr val="000000"/>
-            </a:solidFill>
-          </a:ln>
-          <a:effectLst/>
-        </p:spPr>
-        <p:style>
-          <a:lnRef idx="1">
-            <a:schemeClr val="accent1"/>
-          </a:lnRef>
-          <a:fillRef idx="3">
-            <a:schemeClr val="accent1"/>
-          </a:fillRef>
-          <a:effectRef idx="2">
-            <a:schemeClr val="accent1"/>
-          </a:effectRef>
-          <a:fontRef idx="minor">
-            <a:schemeClr val="lt1"/>
-          </a:fontRef>
-        </p:style>
-        <p:txBody>
-          <a:bodyPr rtlCol="0" anchor="ctr"/>
-          <a:lstStyle/>
-          <a:p/>
-        </p:txBody>
-      </p:sp>
-      <p:sp>
-        <p:nvSpPr>
-          <p:cNvPr id="25" name="Rectangle 24"/>
-          <p:cNvSpPr/>
-          <p:nvPr/>
-        </p:nvSpPr>
-        <p:spPr>
-          <a:xfrm>
-            <a:off x="8055864" y="3611880"/>
-            <a:ext cx="3520440" cy="438912"/>
-          </a:xfrm>
-          <a:prstGeom prst="rect">
-            <a:avLst/>
-          </a:prstGeom>
-          <a:solidFill>
-            <a:srgbClr val="C6F035"/>
-          </a:solidFill>
-          <a:ln w="34925">
-            <a:solidFill>
-              <a:srgbClr val="000000"/>
-            </a:solidFill>
-          </a:ln>
-          <a:effectLst/>
-        </p:spPr>
-        <p:style>
-          <a:lnRef idx="1">
-            <a:schemeClr val="accent1"/>
-          </a:lnRef>
-          <a:fillRef idx="3">
-            <a:schemeClr val="accent1"/>
-          </a:fillRef>
-          <a:effectRef idx="2">
-            <a:schemeClr val="accent1"/>
-          </a:effectRef>
-          <a:fontRef idx="minor">
-            <a:schemeClr val="lt1"/>
-          </a:fontRef>
-        </p:style>
-        <p:txBody>
-          <a:bodyPr rtlCol="0" anchor="ctr"/>
-          <a:lstStyle/>
-          <a:p/>
-        </p:txBody>
-      </p:sp>
-      <p:sp>
-        <p:nvSpPr>
-          <p:cNvPr id="26" name="TextBox 25"/>
-          <p:cNvSpPr txBox="1"/>
-          <p:nvPr/>
-        </p:nvSpPr>
-        <p:spPr>
-          <a:xfrm>
-            <a:off x="8055864" y="3730752"/>
-            <a:ext cx="3520440" cy="274320"/>
-          </a:xfrm>
-          <a:prstGeom prst="rect">
-            <a:avLst/>
-          </a:prstGeom>
-          <a:noFill/>
-        </p:spPr>
-        <p:txBody>
-          <a:bodyPr wrap="square" lIns="0" rIns="0" tIns="0" bIns="0" anchor="t">
-            <a:spAutoFit/>
-          </a:bodyPr>
-          <a:lstStyle/>
-          <a:p>
-            <a:pPr algn="ctr"/>
-            <a:r>
-              <a:rPr sz="1100" b="1">
-                <a:solidFill>
-                  <a:srgbClr val="000000"/>
-                </a:solidFill>
-                <a:latin typeface="Arial"/>
-              </a:rPr>
-              <a:t>MUNICH 1972</a:t>
-            </a:r>
-          </a:p>
-        </p:txBody>
-      </p:sp>
-      <p:sp>
-        <p:nvSpPr>
-          <p:cNvPr id="27" name="TextBox 26"/>
-          <p:cNvSpPr txBox="1"/>
-          <p:nvPr/>
-        </p:nvSpPr>
-        <p:spPr>
-          <a:xfrm>
-            <a:off x="8101584" y="4187952"/>
-            <a:ext cx="3429000" cy="256032"/>
-          </a:xfrm>
-          <a:prstGeom prst="rect">
-            <a:avLst/>
-          </a:prstGeom>
-          <a:noFill/>
-        </p:spPr>
-        <p:txBody>
-          <a:bodyPr wrap="square" lIns="0" rIns="0" tIns="0" bIns="0" anchor="t">
-            <a:spAutoFit/>
-          </a:bodyPr>
-          <a:lstStyle/>
-          <a:p>
-            <a:pPr algn="l"/>
-            <a:r>
-              <a:rPr sz="1050">
-                <a:solidFill>
-                  <a:srgbClr val="6B6B6B"/>
-                </a:solidFill>
-                <a:latin typeface="Calibri"/>
-              </a:rPr>
-              <a:t>Otl Aicher - 1967 to 1972 - otlaicher.de, 'the rainbow games'</a:t>
-            </a:r>
-          </a:p>
-        </p:txBody>
-      </p:sp>
-      <p:sp>
-        <p:nvSpPr>
-          <p:cNvPr id="28" name="TextBox 27"/>
-          <p:cNvSpPr txBox="1"/>
-          <p:nvPr/>
-        </p:nvSpPr>
-        <p:spPr>
-          <a:xfrm>
-            <a:off x="8101584" y="4526280"/>
-            <a:ext cx="3429000" cy="1051560"/>
-          </a:xfrm>
-          <a:prstGeom prst="rect">
-            <a:avLst/>
-          </a:prstGeom>
-          <a:noFill/>
-        </p:spPr>
-        <p:txBody>
-          <a:bodyPr wrap="square" lIns="0" rIns="0" tIns="0" bIns="0" anchor="t">
-            <a:spAutoFit/>
-          </a:bodyPr>
-          <a:lstStyle/>
+              <a:t>Find the drawing that dimensions it.</a:t>
+            </a:r>
+          </a:p>
           <a:p>
             <a:pPr algn="l">
               <a:lnSpc>
@@ -14548,21 +14145,21 @@
                 </a:solidFill>
                 <a:latin typeface="Calibri"/>
               </a:rPr>
-              <a:t>A grid, a fixed set of angles, and one component varied across a whole field of pictograms. You will build a system with this exact structure in Week 4.</a:t>
-            </a:r>
-          </a:p>
-        </p:txBody>
-      </p:sp>
-      <p:sp>
-        <p:nvSpPr>
-          <p:cNvPr id="29" name="Rectangle 28"/>
-          <p:cNvSpPr/>
-          <p:nvPr/>
-        </p:nvSpPr>
-        <p:spPr>
-          <a:xfrm>
-            <a:off x="662940" y="5737860"/>
-            <a:ext cx="10972800" cy="594360"/>
+              <a:t>Find where it is applied.</a:t>
+            </a:r>
+          </a:p>
+        </p:txBody>
+      </p:sp>
+      <p:sp>
+        <p:nvSpPr>
+          <p:cNvPr id="14" name="Rectangle 13"/>
+          <p:cNvSpPr/>
+          <p:nvPr/>
+        </p:nvSpPr>
+        <p:spPr>
+          <a:xfrm>
+            <a:off x="4393692" y="1851660"/>
+            <a:ext cx="3520440" cy="457200"/>
           </a:xfrm>
           <a:prstGeom prst="rect">
             <a:avLst/>
@@ -14599,46 +14196,679 @@
       </p:sp>
       <p:sp>
         <p:nvSpPr>
+          <p:cNvPr id="15" name="Rectangle 14"/>
+          <p:cNvSpPr/>
+          <p:nvPr/>
+        </p:nvSpPr>
+        <p:spPr>
+          <a:xfrm>
+            <a:off x="4325112" y="1783080"/>
+            <a:ext cx="3520440" cy="457200"/>
+          </a:xfrm>
+          <a:prstGeom prst="rect">
+            <a:avLst/>
+          </a:prstGeom>
+          <a:solidFill>
+            <a:srgbClr val="FF4D8D"/>
+          </a:solidFill>
+          <a:ln w="34925">
+            <a:solidFill>
+              <a:srgbClr val="000000"/>
+            </a:solidFill>
+          </a:ln>
+          <a:effectLst/>
+        </p:spPr>
+        <p:style>
+          <a:lnRef idx="1">
+            <a:schemeClr val="accent1"/>
+          </a:lnRef>
+          <a:fillRef idx="3">
+            <a:schemeClr val="accent1"/>
+          </a:fillRef>
+          <a:effectRef idx="2">
+            <a:schemeClr val="accent1"/>
+          </a:effectRef>
+          <a:fontRef idx="minor">
+            <a:schemeClr val="lt1"/>
+          </a:fontRef>
+        </p:style>
+        <p:txBody>
+          <a:bodyPr rtlCol="0" anchor="ctr"/>
+          <a:lstStyle/>
+          <a:p/>
+        </p:txBody>
+      </p:sp>
+      <p:sp>
+        <p:nvSpPr>
+          <p:cNvPr id="16" name="TextBox 15"/>
+          <p:cNvSpPr txBox="1"/>
+          <p:nvPr/>
+        </p:nvSpPr>
+        <p:spPr>
+          <a:xfrm>
+            <a:off x="4325112" y="1911095"/>
+            <a:ext cx="3520440" cy="274320"/>
+          </a:xfrm>
+          <a:prstGeom prst="rect">
+            <a:avLst/>
+          </a:prstGeom>
+          <a:noFill/>
+        </p:spPr>
+        <p:txBody>
+          <a:bodyPr wrap="square" lIns="0" rIns="0" tIns="0" bIns="0" anchor="t">
+            <a:spAutoFit/>
+          </a:bodyPr>
+          <a:lstStyle/>
+          <a:p>
+            <a:pPr algn="ctr"/>
+            <a:r>
+              <a:rPr sz="1300" b="1">
+                <a:solidFill>
+                  <a:srgbClr val="000000"/>
+                </a:solidFill>
+                <a:latin typeface="Arial"/>
+              </a:rPr>
+              <a:t>NASA  ·  1975</a:t>
+            </a:r>
+          </a:p>
+        </p:txBody>
+      </p:sp>
+      <p:sp>
+        <p:nvSpPr>
+          <p:cNvPr id="17" name="Rectangle 16"/>
+          <p:cNvSpPr/>
+          <p:nvPr/>
+        </p:nvSpPr>
+        <p:spPr>
+          <a:xfrm>
+            <a:off x="4393692" y="2400300"/>
+            <a:ext cx="3520440" cy="2331720"/>
+          </a:xfrm>
+          <a:prstGeom prst="rect">
+            <a:avLst/>
+          </a:prstGeom>
+          <a:solidFill>
+            <a:srgbClr val="000000"/>
+          </a:solidFill>
+          <a:ln w="6350">
+            <a:solidFill>
+              <a:srgbClr val="000000"/>
+            </a:solidFill>
+          </a:ln>
+          <a:effectLst/>
+        </p:spPr>
+        <p:style>
+          <a:lnRef idx="1">
+            <a:schemeClr val="accent1"/>
+          </a:lnRef>
+          <a:fillRef idx="3">
+            <a:schemeClr val="accent1"/>
+          </a:fillRef>
+          <a:effectRef idx="2">
+            <a:schemeClr val="accent1"/>
+          </a:effectRef>
+          <a:fontRef idx="minor">
+            <a:schemeClr val="lt1"/>
+          </a:fontRef>
+        </p:style>
+        <p:txBody>
+          <a:bodyPr rtlCol="0" anchor="ctr"/>
+          <a:lstStyle/>
+          <a:p/>
+        </p:txBody>
+      </p:sp>
+      <p:sp>
+        <p:nvSpPr>
+          <p:cNvPr id="18" name="Rectangle 17"/>
+          <p:cNvSpPr/>
+          <p:nvPr/>
+        </p:nvSpPr>
+        <p:spPr>
+          <a:xfrm>
+            <a:off x="4325112" y="2331720"/>
+            <a:ext cx="3520440" cy="2331720"/>
+          </a:xfrm>
+          <a:prstGeom prst="rect">
+            <a:avLst/>
+          </a:prstGeom>
+          <a:solidFill>
+            <a:srgbClr val="FFFDF7"/>
+          </a:solidFill>
+          <a:ln w="34925">
+            <a:solidFill>
+              <a:srgbClr val="000000"/>
+            </a:solidFill>
+          </a:ln>
+          <a:effectLst/>
+        </p:spPr>
+        <p:style>
+          <a:lnRef idx="1">
+            <a:schemeClr val="accent1"/>
+          </a:lnRef>
+          <a:fillRef idx="3">
+            <a:schemeClr val="accent1"/>
+          </a:fillRef>
+          <a:effectRef idx="2">
+            <a:schemeClr val="accent1"/>
+          </a:effectRef>
+          <a:fontRef idx="minor">
+            <a:schemeClr val="lt1"/>
+          </a:fontRef>
+        </p:style>
+        <p:txBody>
+          <a:bodyPr rtlCol="0" anchor="ctr"/>
+          <a:lstStyle/>
+          <a:p/>
+        </p:txBody>
+      </p:sp>
+      <p:sp>
+        <p:nvSpPr>
+          <p:cNvPr id="19" name="TextBox 18"/>
+          <p:cNvSpPr txBox="1"/>
+          <p:nvPr/>
+        </p:nvSpPr>
+        <p:spPr>
+          <a:xfrm>
+            <a:off x="4581144" y="2514600"/>
+            <a:ext cx="3017520" cy="274320"/>
+          </a:xfrm>
+          <a:prstGeom prst="rect">
+            <a:avLst/>
+          </a:prstGeom>
+          <a:noFill/>
+        </p:spPr>
+        <p:txBody>
+          <a:bodyPr wrap="square" lIns="0" rIns="0" tIns="0" bIns="0" anchor="t">
+            <a:spAutoFit/>
+          </a:bodyPr>
+          <a:lstStyle/>
+          <a:p>
+            <a:pPr algn="l"/>
+            <a:r>
+              <a:rPr sz="1150" b="1">
+                <a:solidFill>
+                  <a:srgbClr val="6B6B6B"/>
+                </a:solidFill>
+                <a:latin typeface="Arial"/>
+              </a:rPr>
+              <a:t>GRAPHICS STANDARDS MANUAL</a:t>
+            </a:r>
+          </a:p>
+        </p:txBody>
+      </p:sp>
+      <p:sp>
+        <p:nvSpPr>
+          <p:cNvPr id="20" name="TextBox 19"/>
+          <p:cNvSpPr txBox="1"/>
+          <p:nvPr/>
+        </p:nvSpPr>
+        <p:spPr>
+          <a:xfrm>
+            <a:off x="4581144" y="2852928"/>
+            <a:ext cx="3017520" cy="365760"/>
+          </a:xfrm>
+          <a:prstGeom prst="rect">
+            <a:avLst/>
+          </a:prstGeom>
+          <a:noFill/>
+        </p:spPr>
+        <p:txBody>
+          <a:bodyPr wrap="square" lIns="0" rIns="0" tIns="0" bIns="0" anchor="t">
+            <a:spAutoFit/>
+          </a:bodyPr>
+          <a:lstStyle/>
+          <a:p>
+            <a:pPr algn="l"/>
+            <a:r>
+              <a:rPr sz="1500" b="1">
+                <a:solidFill>
+                  <a:srgbClr val="000000"/>
+                </a:solidFill>
+                <a:latin typeface="Calibri"/>
+              </a:rPr>
+              <a:t>An agency identity manual.</a:t>
+            </a:r>
+          </a:p>
+        </p:txBody>
+      </p:sp>
+      <p:sp>
+        <p:nvSpPr>
+          <p:cNvPr id="21" name="Rectangle 20"/>
+          <p:cNvSpPr/>
+          <p:nvPr/>
+        </p:nvSpPr>
+        <p:spPr>
+          <a:xfrm>
+            <a:off x="4581144" y="3401568"/>
+            <a:ext cx="3017520" cy="0"/>
+          </a:xfrm>
+          <a:prstGeom prst="rect">
+            <a:avLst/>
+          </a:prstGeom>
+          <a:noFill/>
+          <a:ln w="19050">
+            <a:solidFill>
+              <a:srgbClr val="B4B4AC"/>
+            </a:solidFill>
+          </a:ln>
+          <a:effectLst/>
+        </p:spPr>
+        <p:style>
+          <a:lnRef idx="1">
+            <a:schemeClr val="accent1"/>
+          </a:lnRef>
+          <a:fillRef idx="3">
+            <a:schemeClr val="accent1"/>
+          </a:fillRef>
+          <a:effectRef idx="2">
+            <a:schemeClr val="accent1"/>
+          </a:effectRef>
+          <a:fontRef idx="minor">
+            <a:schemeClr val="lt1"/>
+          </a:fontRef>
+        </p:style>
+        <p:txBody>
+          <a:bodyPr rtlCol="0" anchor="ctr"/>
+          <a:lstStyle/>
+          <a:p>
+            <a:pPr algn="ctr"/>
+          </a:p>
+        </p:txBody>
+      </p:sp>
+      <p:sp>
+        <p:nvSpPr>
+          <p:cNvPr id="22" name="TextBox 21"/>
+          <p:cNvSpPr txBox="1"/>
+          <p:nvPr/>
+        </p:nvSpPr>
+        <p:spPr>
+          <a:xfrm>
+            <a:off x="4581144" y="3547872"/>
+            <a:ext cx="3017520" cy="1005840"/>
+          </a:xfrm>
+          <a:prstGeom prst="rect">
+            <a:avLst/>
+          </a:prstGeom>
+          <a:noFill/>
+        </p:spPr>
+        <p:txBody>
+          <a:bodyPr wrap="square" lIns="0" rIns="0" tIns="0" bIns="0" anchor="t">
+            <a:spAutoFit/>
+          </a:bodyPr>
+          <a:lstStyle/>
+          <a:p>
+            <a:pPr algn="l">
+              <a:lnSpc>
+                <a:spcPct val="130000"/>
+              </a:lnSpc>
+            </a:pPr>
+            <a:r>
+              <a:rPr sz="1250">
+                <a:solidFill>
+                  <a:srgbClr val="000000"/>
+                </a:solidFill>
+                <a:latin typeface="Calibri"/>
+              </a:rPr>
+              <a:t>Find one rule.</a:t>
+            </a:r>
+          </a:p>
+          <a:p>
+            <a:pPr algn="l">
+              <a:lnSpc>
+                <a:spcPct val="130000"/>
+              </a:lnSpc>
+            </a:pPr>
+            <a:r>
+              <a:rPr sz="1250">
+                <a:solidFill>
+                  <a:srgbClr val="000000"/>
+                </a:solidFill>
+                <a:latin typeface="Calibri"/>
+              </a:rPr>
+              <a:t>Find the drawing that dimensions it.</a:t>
+            </a:r>
+          </a:p>
+          <a:p>
+            <a:pPr algn="l">
+              <a:lnSpc>
+                <a:spcPct val="130000"/>
+              </a:lnSpc>
+            </a:pPr>
+            <a:r>
+              <a:rPr sz="1250">
+                <a:solidFill>
+                  <a:srgbClr val="000000"/>
+                </a:solidFill>
+                <a:latin typeface="Calibri"/>
+              </a:rPr>
+              <a:t>Find where it is applied.</a:t>
+            </a:r>
+          </a:p>
+        </p:txBody>
+      </p:sp>
+      <p:sp>
+        <p:nvSpPr>
+          <p:cNvPr id="23" name="Rectangle 22"/>
+          <p:cNvSpPr/>
+          <p:nvPr/>
+        </p:nvSpPr>
+        <p:spPr>
+          <a:xfrm>
+            <a:off x="8124444" y="1851660"/>
+            <a:ext cx="3520440" cy="457200"/>
+          </a:xfrm>
+          <a:prstGeom prst="rect">
+            <a:avLst/>
+          </a:prstGeom>
+          <a:solidFill>
+            <a:srgbClr val="000000"/>
+          </a:solidFill>
+          <a:ln w="6350">
+            <a:solidFill>
+              <a:srgbClr val="000000"/>
+            </a:solidFill>
+          </a:ln>
+          <a:effectLst/>
+        </p:spPr>
+        <p:style>
+          <a:lnRef idx="1">
+            <a:schemeClr val="accent1"/>
+          </a:lnRef>
+          <a:fillRef idx="3">
+            <a:schemeClr val="accent1"/>
+          </a:fillRef>
+          <a:effectRef idx="2">
+            <a:schemeClr val="accent1"/>
+          </a:effectRef>
+          <a:fontRef idx="minor">
+            <a:schemeClr val="lt1"/>
+          </a:fontRef>
+        </p:style>
+        <p:txBody>
+          <a:bodyPr rtlCol="0" anchor="ctr"/>
+          <a:lstStyle/>
+          <a:p/>
+        </p:txBody>
+      </p:sp>
+      <p:sp>
+        <p:nvSpPr>
+          <p:cNvPr id="24" name="Rectangle 23"/>
+          <p:cNvSpPr/>
+          <p:nvPr/>
+        </p:nvSpPr>
+        <p:spPr>
+          <a:xfrm>
+            <a:off x="8055864" y="1783080"/>
+            <a:ext cx="3520440" cy="457200"/>
+          </a:xfrm>
+          <a:prstGeom prst="rect">
+            <a:avLst/>
+          </a:prstGeom>
+          <a:solidFill>
+            <a:srgbClr val="C6F035"/>
+          </a:solidFill>
+          <a:ln w="34925">
+            <a:solidFill>
+              <a:srgbClr val="000000"/>
+            </a:solidFill>
+          </a:ln>
+          <a:effectLst/>
+        </p:spPr>
+        <p:style>
+          <a:lnRef idx="1">
+            <a:schemeClr val="accent1"/>
+          </a:lnRef>
+          <a:fillRef idx="3">
+            <a:schemeClr val="accent1"/>
+          </a:fillRef>
+          <a:effectRef idx="2">
+            <a:schemeClr val="accent1"/>
+          </a:effectRef>
+          <a:fontRef idx="minor">
+            <a:schemeClr val="lt1"/>
+          </a:fontRef>
+        </p:style>
+        <p:txBody>
+          <a:bodyPr rtlCol="0" anchor="ctr"/>
+          <a:lstStyle/>
+          <a:p/>
+        </p:txBody>
+      </p:sp>
+      <p:sp>
+        <p:nvSpPr>
+          <p:cNvPr id="25" name="TextBox 24"/>
+          <p:cNvSpPr txBox="1"/>
+          <p:nvPr/>
+        </p:nvSpPr>
+        <p:spPr>
+          <a:xfrm>
+            <a:off x="8055864" y="1911095"/>
+            <a:ext cx="3520440" cy="274320"/>
+          </a:xfrm>
+          <a:prstGeom prst="rect">
+            <a:avLst/>
+          </a:prstGeom>
+          <a:noFill/>
+        </p:spPr>
+        <p:txBody>
+          <a:bodyPr wrap="square" lIns="0" rIns="0" tIns="0" bIns="0" anchor="t">
+            <a:spAutoFit/>
+          </a:bodyPr>
+          <a:lstStyle/>
+          <a:p>
+            <a:pPr algn="ctr"/>
+            <a:r>
+              <a:rPr sz="1300" b="1">
+                <a:solidFill>
+                  <a:srgbClr val="000000"/>
+                </a:solidFill>
+                <a:latin typeface="Arial"/>
+              </a:rPr>
+              <a:t>MUNICH OLYMPICS  ·  1972</a:t>
+            </a:r>
+          </a:p>
+        </p:txBody>
+      </p:sp>
+      <p:sp>
+        <p:nvSpPr>
+          <p:cNvPr id="26" name="Rectangle 25"/>
+          <p:cNvSpPr/>
+          <p:nvPr/>
+        </p:nvSpPr>
+        <p:spPr>
+          <a:xfrm>
+            <a:off x="8124444" y="2400300"/>
+            <a:ext cx="3520440" cy="2331720"/>
+          </a:xfrm>
+          <a:prstGeom prst="rect">
+            <a:avLst/>
+          </a:prstGeom>
+          <a:solidFill>
+            <a:srgbClr val="000000"/>
+          </a:solidFill>
+          <a:ln w="6350">
+            <a:solidFill>
+              <a:srgbClr val="000000"/>
+            </a:solidFill>
+          </a:ln>
+          <a:effectLst/>
+        </p:spPr>
+        <p:style>
+          <a:lnRef idx="1">
+            <a:schemeClr val="accent1"/>
+          </a:lnRef>
+          <a:fillRef idx="3">
+            <a:schemeClr val="accent1"/>
+          </a:fillRef>
+          <a:effectRef idx="2">
+            <a:schemeClr val="accent1"/>
+          </a:effectRef>
+          <a:fontRef idx="minor">
+            <a:schemeClr val="lt1"/>
+          </a:fontRef>
+        </p:style>
+        <p:txBody>
+          <a:bodyPr rtlCol="0" anchor="ctr"/>
+          <a:lstStyle/>
+          <a:p/>
+        </p:txBody>
+      </p:sp>
+      <p:sp>
+        <p:nvSpPr>
+          <p:cNvPr id="27" name="Rectangle 26"/>
+          <p:cNvSpPr/>
+          <p:nvPr/>
+        </p:nvSpPr>
+        <p:spPr>
+          <a:xfrm>
+            <a:off x="8055864" y="2331720"/>
+            <a:ext cx="3520440" cy="2331720"/>
+          </a:xfrm>
+          <a:prstGeom prst="rect">
+            <a:avLst/>
+          </a:prstGeom>
+          <a:solidFill>
+            <a:srgbClr val="FFFDF7"/>
+          </a:solidFill>
+          <a:ln w="34925">
+            <a:solidFill>
+              <a:srgbClr val="000000"/>
+            </a:solidFill>
+          </a:ln>
+          <a:effectLst/>
+        </p:spPr>
+        <p:style>
+          <a:lnRef idx="1">
+            <a:schemeClr val="accent1"/>
+          </a:lnRef>
+          <a:fillRef idx="3">
+            <a:schemeClr val="accent1"/>
+          </a:fillRef>
+          <a:effectRef idx="2">
+            <a:schemeClr val="accent1"/>
+          </a:effectRef>
+          <a:fontRef idx="minor">
+            <a:schemeClr val="lt1"/>
+          </a:fontRef>
+        </p:style>
+        <p:txBody>
+          <a:bodyPr rtlCol="0" anchor="ctr"/>
+          <a:lstStyle/>
+          <a:p/>
+        </p:txBody>
+      </p:sp>
+      <p:sp>
+        <p:nvSpPr>
+          <p:cNvPr id="28" name="TextBox 27"/>
+          <p:cNvSpPr txBox="1"/>
+          <p:nvPr/>
+        </p:nvSpPr>
+        <p:spPr>
+          <a:xfrm>
+            <a:off x="8311896" y="2514600"/>
+            <a:ext cx="3017520" cy="274320"/>
+          </a:xfrm>
+          <a:prstGeom prst="rect">
+            <a:avLst/>
+          </a:prstGeom>
+          <a:noFill/>
+        </p:spPr>
+        <p:txBody>
+          <a:bodyPr wrap="square" lIns="0" rIns="0" tIns="0" bIns="0" anchor="t">
+            <a:spAutoFit/>
+          </a:bodyPr>
+          <a:lstStyle/>
+          <a:p>
+            <a:pPr algn="l"/>
+            <a:r>
+              <a:rPr sz="1150" b="1">
+                <a:solidFill>
+                  <a:srgbClr val="6B6B6B"/>
+                </a:solidFill>
+                <a:latin typeface="Arial"/>
+              </a:rPr>
+              <a:t>DESIGN GUIDELINES</a:t>
+            </a:r>
+          </a:p>
+        </p:txBody>
+      </p:sp>
+      <p:sp>
+        <p:nvSpPr>
+          <p:cNvPr id="29" name="TextBox 28"/>
+          <p:cNvSpPr txBox="1"/>
+          <p:nvPr/>
+        </p:nvSpPr>
+        <p:spPr>
+          <a:xfrm>
+            <a:off x="8311896" y="2852928"/>
+            <a:ext cx="3017520" cy="365760"/>
+          </a:xfrm>
+          <a:prstGeom prst="rect">
+            <a:avLst/>
+          </a:prstGeom>
+          <a:noFill/>
+        </p:spPr>
+        <p:txBody>
+          <a:bodyPr wrap="square" lIns="0" rIns="0" tIns="0" bIns="0" anchor="t">
+            <a:spAutoFit/>
+          </a:bodyPr>
+          <a:lstStyle/>
+          <a:p>
+            <a:pPr algn="l"/>
+            <a:r>
+              <a:rPr sz="1500" b="1">
+                <a:solidFill>
+                  <a:srgbClr val="000000"/>
+                </a:solidFill>
+                <a:latin typeface="Calibri"/>
+              </a:rPr>
+              <a:t>An Olympic identity system.</a:t>
+            </a:r>
+          </a:p>
+        </p:txBody>
+      </p:sp>
+      <p:sp>
+        <p:nvSpPr>
           <p:cNvPr id="30" name="Rectangle 29"/>
           <p:cNvSpPr/>
           <p:nvPr/>
         </p:nvSpPr>
         <p:spPr>
           <a:xfrm>
-            <a:off x="594360" y="5669280"/>
-            <a:ext cx="10972800" cy="594360"/>
-          </a:xfrm>
-          <a:prstGeom prst="rect">
-            <a:avLst/>
-          </a:prstGeom>
-          <a:solidFill>
-            <a:srgbClr val="000000"/>
-          </a:solidFill>
-          <a:ln w="34925">
-            <a:solidFill>
-              <a:srgbClr val="000000"/>
-            </a:solidFill>
-          </a:ln>
-          <a:effectLst/>
-        </p:spPr>
-        <p:style>
-          <a:lnRef idx="1">
-            <a:schemeClr val="accent1"/>
-          </a:lnRef>
-          <a:fillRef idx="3">
-            <a:schemeClr val="accent1"/>
-          </a:fillRef>
-          <a:effectRef idx="2">
-            <a:schemeClr val="accent1"/>
-          </a:effectRef>
-          <a:fontRef idx="minor">
-            <a:schemeClr val="lt1"/>
-          </a:fontRef>
-        </p:style>
-        <p:txBody>
-          <a:bodyPr rtlCol="0" anchor="ctr"/>
-          <a:lstStyle/>
-          <a:p/>
+            <a:off x="8311896" y="3401568"/>
+            <a:ext cx="3017520" cy="0"/>
+          </a:xfrm>
+          <a:prstGeom prst="rect">
+            <a:avLst/>
+          </a:prstGeom>
+          <a:noFill/>
+          <a:ln w="19050">
+            <a:solidFill>
+              <a:srgbClr val="B4B4AC"/>
+            </a:solidFill>
+          </a:ln>
+          <a:effectLst/>
+        </p:spPr>
+        <p:style>
+          <a:lnRef idx="1">
+            <a:schemeClr val="accent1"/>
+          </a:lnRef>
+          <a:fillRef idx="3">
+            <a:schemeClr val="accent1"/>
+          </a:fillRef>
+          <a:effectRef idx="2">
+            <a:schemeClr val="accent1"/>
+          </a:effectRef>
+          <a:fontRef idx="minor">
+            <a:schemeClr val="lt1"/>
+          </a:fontRef>
+        </p:style>
+        <p:txBody>
+          <a:bodyPr rtlCol="0" anchor="ctr"/>
+          <a:lstStyle/>
+          <a:p>
+            <a:pPr algn="ctr"/>
+          </a:p>
         </p:txBody>
       </p:sp>
       <p:sp>
@@ -14649,8 +14879,167 @@
         </p:nvSpPr>
         <p:spPr>
           <a:xfrm>
-            <a:off x="777240" y="5669280"/>
-            <a:ext cx="10607040" cy="594360"/>
+            <a:off x="8311896" y="3547872"/>
+            <a:ext cx="3017520" cy="1005840"/>
+          </a:xfrm>
+          <a:prstGeom prst="rect">
+            <a:avLst/>
+          </a:prstGeom>
+          <a:noFill/>
+        </p:spPr>
+        <p:txBody>
+          <a:bodyPr wrap="square" lIns="0" rIns="0" tIns="0" bIns="0" anchor="t">
+            <a:spAutoFit/>
+          </a:bodyPr>
+          <a:lstStyle/>
+          <a:p>
+            <a:pPr algn="l">
+              <a:lnSpc>
+                <a:spcPct val="130000"/>
+              </a:lnSpc>
+            </a:pPr>
+            <a:r>
+              <a:rPr sz="1250">
+                <a:solidFill>
+                  <a:srgbClr val="000000"/>
+                </a:solidFill>
+                <a:latin typeface="Calibri"/>
+              </a:rPr>
+              <a:t>Find one rule.</a:t>
+            </a:r>
+          </a:p>
+          <a:p>
+            <a:pPr algn="l">
+              <a:lnSpc>
+                <a:spcPct val="130000"/>
+              </a:lnSpc>
+            </a:pPr>
+            <a:r>
+              <a:rPr sz="1250">
+                <a:solidFill>
+                  <a:srgbClr val="000000"/>
+                </a:solidFill>
+                <a:latin typeface="Calibri"/>
+              </a:rPr>
+              <a:t>Find the drawing that dimensions it.</a:t>
+            </a:r>
+          </a:p>
+          <a:p>
+            <a:pPr algn="l">
+              <a:lnSpc>
+                <a:spcPct val="130000"/>
+              </a:lnSpc>
+            </a:pPr>
+            <a:r>
+              <a:rPr sz="1250">
+                <a:solidFill>
+                  <a:srgbClr val="000000"/>
+                </a:solidFill>
+                <a:latin typeface="Calibri"/>
+              </a:rPr>
+              <a:t>Find where it is applied.</a:t>
+            </a:r>
+          </a:p>
+        </p:txBody>
+      </p:sp>
+      <p:sp>
+        <p:nvSpPr>
+          <p:cNvPr id="32" name="Rectangle 31"/>
+          <p:cNvSpPr/>
+          <p:nvPr/>
+        </p:nvSpPr>
+        <p:spPr>
+          <a:xfrm>
+            <a:off x="662940" y="5052060"/>
+            <a:ext cx="10972800" cy="658368"/>
+          </a:xfrm>
+          <a:prstGeom prst="rect">
+            <a:avLst/>
+          </a:prstGeom>
+          <a:solidFill>
+            <a:srgbClr val="000000"/>
+          </a:solidFill>
+          <a:ln w="6350">
+            <a:solidFill>
+              <a:srgbClr val="000000"/>
+            </a:solidFill>
+          </a:ln>
+          <a:effectLst/>
+        </p:spPr>
+        <p:style>
+          <a:lnRef idx="1">
+            <a:schemeClr val="accent1"/>
+          </a:lnRef>
+          <a:fillRef idx="3">
+            <a:schemeClr val="accent1"/>
+          </a:fillRef>
+          <a:effectRef idx="2">
+            <a:schemeClr val="accent1"/>
+          </a:effectRef>
+          <a:fontRef idx="minor">
+            <a:schemeClr val="lt1"/>
+          </a:fontRef>
+        </p:style>
+        <p:txBody>
+          <a:bodyPr rtlCol="0" anchor="ctr"/>
+          <a:lstStyle/>
+          <a:p/>
+        </p:txBody>
+      </p:sp>
+      <p:sp>
+        <p:nvSpPr>
+          <p:cNvPr id="33" name="Rectangle 32"/>
+          <p:cNvSpPr/>
+          <p:nvPr/>
+        </p:nvSpPr>
+        <p:spPr>
+          <a:xfrm>
+            <a:off x="594360" y="4983480"/>
+            <a:ext cx="10972800" cy="658368"/>
+          </a:xfrm>
+          <a:prstGeom prst="rect">
+            <a:avLst/>
+          </a:prstGeom>
+          <a:solidFill>
+            <a:srgbClr val="000000"/>
+          </a:solidFill>
+          <a:ln w="34925">
+            <a:solidFill>
+              <a:srgbClr val="000000"/>
+            </a:solidFill>
+          </a:ln>
+          <a:effectLst/>
+        </p:spPr>
+        <p:style>
+          <a:lnRef idx="1">
+            <a:schemeClr val="accent1"/>
+          </a:lnRef>
+          <a:fillRef idx="3">
+            <a:schemeClr val="accent1"/>
+          </a:fillRef>
+          <a:effectRef idx="2">
+            <a:schemeClr val="accent1"/>
+          </a:effectRef>
+          <a:fontRef idx="minor">
+            <a:schemeClr val="lt1"/>
+          </a:fontRef>
+        </p:style>
+        <p:txBody>
+          <a:bodyPr rtlCol="0" anchor="ctr"/>
+          <a:lstStyle/>
+          <a:p/>
+        </p:txBody>
+      </p:sp>
+      <p:sp>
+        <p:nvSpPr>
+          <p:cNvPr id="34" name="TextBox 33"/>
+          <p:cNvSpPr txBox="1"/>
+          <p:nvPr/>
+        </p:nvSpPr>
+        <p:spPr>
+          <a:xfrm>
+            <a:off x="777240" y="4983480"/>
+            <a:ext cx="10607040" cy="658368"/>
           </a:xfrm>
           <a:prstGeom prst="rect">
             <a:avLst/>
@@ -14665,27 +15054,27 @@
           <a:p>
             <a:pPr algn="ctr"/>
             <a:r>
-              <a:rPr sz="1200" b="1">
+              <a:rPr sz="1250" b="1">
                 <a:solidFill>
                   <a:srgbClr val="00D9E1"/>
                 </a:solidFill>
                 <a:latin typeface="Arial"/>
               </a:rPr>
-              <a:t>YOURS IS FOUR PAGES, NOT THREE HUNDRED. THE PRINCIPLE IS IDENTICAL: DECIDE ONCE, WRITE IT DOWN, APPLY IT EVERY TIME.</a:t>
-            </a:r>
-          </a:p>
-        </p:txBody>
-      </p:sp>
-      <p:sp>
-        <p:nvSpPr>
-          <p:cNvPr id="32" name="TextBox 31"/>
+              <a:t>YOUR TASK: PICK ONE RULE FROM ONE MANUAL. ADOPT IT IN YOUR GSM, AND NAME IT ON THE PAGE WHERE YOU USE IT.</a:t>
+            </a:r>
+          </a:p>
+        </p:txBody>
+      </p:sp>
+      <p:sp>
+        <p:nvSpPr>
+          <p:cNvPr id="35" name="TextBox 34"/>
           <p:cNvSpPr txBox="1"/>
           <p:nvPr/>
         </p:nvSpPr>
         <p:spPr>
           <a:xfrm>
-            <a:off x="594360" y="6400800"/>
-            <a:ext cx="10972800" cy="274320"/>
+            <a:off x="594360" y="5897880"/>
+            <a:ext cx="10972800" cy="548640"/>
           </a:xfrm>
           <a:prstGeom prst="rect">
             <a:avLst/>
@@ -14698,15 +15087,19 @@
           </a:bodyPr>
           <a:lstStyle/>
           <a:p>
-            <a:pPr algn="l"/>
-            <a:r>
-              <a:rPr sz="1200">
+            <a:pPr algn="l">
+              <a:lnSpc>
+                <a:spcPct val="125000"/>
+              </a:lnSpc>
+            </a:pPr>
+            <a:r>
+              <a:rPr sz="1300">
                 <a:solidFill>
                   <a:srgbClr val="6B6B6B"/>
                 </a:solidFill>
                 <a:latin typeface="Calibri"/>
               </a:rPr>
-              <a:t>All three are online in full, linked on the U01 lesson page and under Reading. Look at how much of each one is rules rather than pictures.</a:t>
+              <a:t>All three are linked in full under Reading and documentation. Notice how much of each one is rules rather than pictures. Yours is four pages; the principle is the same.</a:t>
             </a:r>
           </a:p>
         </p:txBody>
@@ -16026,7 +16419,7 @@
                 </a:solidFill>
                 <a:latin typeface="Arial"/>
               </a:rPr>
-              <a:t>DUE WEEK 8 — Oct 13   /   7%</a:t>
+              <a:t>DUE WEEK 10 — Oct 27   /   7%</a:t>
             </a:r>
           </a:p>
         </p:txBody>

--- a/slides/ARC3133_Class01.pptx
+++ b/slides/ARC3133_Class01.pptx
@@ -7714,7 +7714,7 @@
                 </a:solidFill>
                 <a:latin typeface="Calibri"/>
               </a:rPr>
-              <a:t>GSM is due at the midterm, WEEK 10 — Oct 27. Study the three manuals and pick your rule before you lay out page 1.</a:t>
+              <a:t>GSM is due at the mid-semester deadline, WEEK 10 — Oct 27. Study the three manuals and pick your rule before you lay out page 1.</a:t>
             </a:r>
           </a:p>
         </p:txBody>
@@ -10147,7 +10147,7 @@
         <p:spPr>
           <a:xfrm>
             <a:off x="1965960" y="2221991"/>
-            <a:ext cx="8046720" cy="310896"/>
+            <a:ext cx="8458200" cy="310896"/>
           </a:xfrm>
           <a:prstGeom prst="rect">
             <a:avLst/>
@@ -10472,7 +10472,7 @@
         <p:spPr>
           <a:xfrm>
             <a:off x="1965960" y="3172968"/>
-            <a:ext cx="8046720" cy="310896"/>
+            <a:ext cx="8458200" cy="310896"/>
           </a:xfrm>
           <a:prstGeom prst="rect">
             <a:avLst/>
@@ -10502,7 +10502,7 @@
                 </a:solidFill>
                 <a:latin typeface="Calibri"/>
               </a:rPr>
-              <a:t> CSG process sheet · due W4     </a:t>
+              <a:t> CSG process sheet · due W4    </a:t>
             </a:r>
             <a:r>
               <a:rPr sz="1150" b="1">
@@ -10815,7 +10815,7 @@
         <p:spPr>
           <a:xfrm>
             <a:off x="1965960" y="4123944"/>
-            <a:ext cx="8046720" cy="310896"/>
+            <a:ext cx="8458200" cy="310896"/>
           </a:xfrm>
           <a:prstGeom prst="rect">
             <a:avLst/>
@@ -10845,7 +10845,7 @@
                 </a:solidFill>
                 <a:latin typeface="Calibri"/>
               </a:rPr>
-              <a:t> module sheet · due W6     </a:t>
+              <a:t> module sheet · due W6    </a:t>
             </a:r>
             <a:r>
               <a:rPr sz="1150" b="1">
@@ -10863,7 +10863,7 @@
                 </a:solidFill>
                 <a:latin typeface="Calibri"/>
               </a:rPr>
-              <a:t> arrays, two sheets · due W8     </a:t>
+              <a:t> arrays, two sheets · due W8    </a:t>
             </a:r>
             <a:r>
               <a:rPr sz="1150" b="1">
@@ -10881,7 +10881,7 @@
                 </a:solidFill>
                 <a:latin typeface="Calibri"/>
               </a:rPr>
-              <a:t> plotter field · due W10     </a:t>
+              <a:t> 2D field drawing · due W10    </a:t>
             </a:r>
             <a:r>
               <a:rPr sz="1150" b="1">
@@ -10899,7 +10899,7 @@
                 </a:solidFill>
                 <a:latin typeface="Calibri"/>
               </a:rPr>
-              <a:t> site analysis · due W10</a:t>
+              <a:t> layered site analysis · due W11</a:t>
             </a:r>
           </a:p>
         </p:txBody>
@@ -11194,7 +11194,7 @@
         <p:spPr>
           <a:xfrm>
             <a:off x="1965960" y="5074920"/>
-            <a:ext cx="8046720" cy="310896"/>
+            <a:ext cx="8458200" cy="310896"/>
           </a:xfrm>
           <a:prstGeom prst="rect">
             <a:avLst/>
@@ -11224,7 +11224,7 @@
                 </a:solidFill>
                 <a:latin typeface="Calibri"/>
               </a:rPr>
-              <a:t> SDF volume · due W12     </a:t>
+              <a:t> SDF volume · due W12    </a:t>
             </a:r>
             <a:r>
               <a:rPr sz="1150" b="1">
@@ -11400,7 +11400,7 @@
                 </a:solidFill>
                 <a:latin typeface="Arial"/>
               </a:rPr>
-              <a:t>MIDTERM REVIEW OF P1–P3 · WEEK 10 — OCT 27 · 7%     FINAL BOOKLET · DUE FINAL · 11%     PARTICIPATION · 5%</a:t>
+              <a:t>MID-SEMESTER DEADLINE · WEEK 10 — OCT 27     FINAL BOOKLET · DUE FINAL · 18%     PARTICIPATION · 5%</a:t>
             </a:r>
           </a:p>
         </p:txBody>
@@ -11435,7 +11435,7 @@
                 </a:solidFill>
                 <a:latin typeface="Calibri"/>
               </a:rPr>
-              <a:t>Dates after the midterm are provisional. The course site is the reference for every due date.</a:t>
+              <a:t>Everything through Arrays is due by Week 10. Later dates are provisional; the course site is the reference for every due date.</a:t>
             </a:r>
           </a:p>
         </p:txBody>
@@ -17313,7 +17313,7 @@
                 </a:solidFill>
                 <a:latin typeface="Calibri"/>
               </a:rPr>
-              <a:t>Due at the midterm, revised again for the booklet.</a:t>
+              <a:t>Due Week 10, revised again for the booklet.</a:t>
             </a:r>
           </a:p>
         </p:txBody>
